--- a/presentation/ECRI_Faculty_Board_Briefing_ZfE.pptx
+++ b/presentation/ECRI_Faculty_Board_Briefing_ZfE.pptx
@@ -3095,22 +3095,46 @@
         <p:nvPr/>
       </p:nvGrpSpPr>
       <p:grpSpPr/>
-      <p:sp>
-        <p:nvSpPr>
-          <p:cNvPr id="2" name="Rectangle 1"/>
+      <p:pic>
+        <p:nvPicPr>
+          <p:cNvPr id="2" name="Picture 1" descr="cover_hero.jpg"/>
+          <p:cNvPicPr>
+            <a:picLocks noChangeAspect="1"/>
+          </p:cNvPicPr>
+          <p:nvPr/>
+        </p:nvPicPr>
+        <p:blipFill>
+          <a:blip r:embed="rId2"/>
+          <a:stretch>
+            <a:fillRect/>
+          </a:stretch>
+        </p:blipFill>
+        <p:spPr>
+          <a:xfrm>
+            <a:off x="0" y="0"/>
+            <a:ext cx="12191695" cy="6858000"/>
+          </a:xfrm>
+          <a:prstGeom prst="rect">
+            <a:avLst/>
+          </a:prstGeom>
+        </p:spPr>
+      </p:pic>
+      <p:sp>
+        <p:nvSpPr>
+          <p:cNvPr id="3" name="Rectangle 2"/>
           <p:cNvSpPr/>
           <p:nvPr/>
         </p:nvSpPr>
         <p:spPr>
           <a:xfrm>
             <a:off x="0" y="0"/>
-            <a:ext cx="12192000" cy="6858000"/>
+            <a:ext cx="256032" cy="6858000"/>
           </a:xfrm>
           <a:prstGeom prst="rect">
             <a:avLst/>
           </a:prstGeom>
           <a:solidFill>
-            <a:srgbClr val="1C1C1E"/>
+            <a:srgbClr val="E2007A"/>
           </a:solidFill>
           <a:ln>
             <a:noFill/>
@@ -3141,20 +3165,20 @@
       </p:sp>
       <p:sp>
         <p:nvSpPr>
-          <p:cNvPr id="3" name="Rectangle 2"/>
+          <p:cNvPr id="4" name="Rectangle 3"/>
           <p:cNvSpPr/>
           <p:nvPr/>
         </p:nvSpPr>
         <p:spPr>
           <a:xfrm>
-            <a:off x="0" y="0"/>
-            <a:ext cx="256032" cy="6858000"/>
+            <a:off x="777240" y="777240"/>
+            <a:ext cx="4162348" cy="274320"/>
           </a:xfrm>
           <a:prstGeom prst="rect">
             <a:avLst/>
           </a:prstGeom>
           <a:solidFill>
-            <a:srgbClr val="B6267C"/>
+            <a:srgbClr val="E2007A"/>
           </a:solidFill>
           <a:ln>
             <a:noFill/>
@@ -3185,20 +3209,153 @@
       </p:sp>
       <p:sp>
         <p:nvSpPr>
-          <p:cNvPr id="4" name="Rectangle 3"/>
+          <p:cNvPr id="5" name="TextBox 4"/>
+          <p:cNvSpPr txBox="1"/>
+          <p:nvPr/>
+        </p:nvSpPr>
+        <p:spPr>
+          <a:xfrm>
+            <a:off x="777240" y="777240"/>
+            <a:ext cx="4162348" cy="274320"/>
+          </a:xfrm>
+          <a:prstGeom prst="rect">
+            <a:avLst/>
+          </a:prstGeom>
+          <a:noFill/>
+        </p:spPr>
+        <p:txBody>
+          <a:bodyPr wrap="square" anchor="ctr" lIns="0" rIns="0" tIns="0" bIns="0">
+            <a:noAutofit/>
+          </a:bodyPr>
+          <a:lstStyle/>
+          <a:p>
+            <a:pPr algn="ctr">
+              <a:lnSpc>
+                <a:spcPct val="100000"/>
+              </a:lnSpc>
+            </a:pPr>
+            <a:r>
+              <a:rPr sz="1100" b="1" i="0" spc="120">
+                <a:solidFill>
+                  <a:srgbClr val="FFFFFF"/>
+                </a:solidFill>
+                <a:latin typeface="Calibri"/>
+              </a:rPr>
+              <a:t>FACULTY BOARD BRIEFING · 16.06.2026</a:t>
+            </a:r>
+          </a:p>
+        </p:txBody>
+      </p:sp>
+      <p:sp>
+        <p:nvSpPr>
+          <p:cNvPr id="6" name="TextBox 5"/>
+          <p:cNvSpPr txBox="1"/>
+          <p:nvPr/>
+        </p:nvSpPr>
+        <p:spPr>
+          <a:xfrm>
+            <a:off x="758952" y="1828800"/>
+            <a:ext cx="10515600" cy="2011680"/>
+          </a:xfrm>
+          <a:prstGeom prst="rect">
+            <a:avLst/>
+          </a:prstGeom>
+          <a:noFill/>
+        </p:spPr>
+        <p:txBody>
+          <a:bodyPr wrap="square" anchor="t" lIns="0" rIns="0" tIns="0" bIns="0">
+            <a:noAutofit/>
+          </a:bodyPr>
+          <a:lstStyle/>
+          <a:p>
+            <a:pPr algn="l">
+              <a:lnSpc>
+                <a:spcPct val="98000"/>
+              </a:lnSpc>
+            </a:pPr>
+            <a:r>
+              <a:rPr sz="6000" b="1" i="0">
+                <a:solidFill>
+                  <a:srgbClr val="FFFFFF"/>
+                </a:solidFill>
+                <a:latin typeface="Calibri"/>
+              </a:rPr>
+              <a:t>ECRI Founder</a:t>
+            </a:r>
+          </a:p>
+          <a:p>
+            <a:pPr algn="l">
+              <a:lnSpc>
+                <a:spcPct val="98000"/>
+              </a:lnSpc>
+            </a:pPr>
+            <a:r>
+              <a:rPr sz="6000" b="1" i="0">
+                <a:solidFill>
+                  <a:srgbClr val="E2007A"/>
+                </a:solidFill>
+                <a:latin typeface="Calibri"/>
+              </a:rPr>
+              <a:t>Coaching.</a:t>
+            </a:r>
+          </a:p>
+        </p:txBody>
+      </p:sp>
+      <p:sp>
+        <p:nvSpPr>
+          <p:cNvPr id="7" name="TextBox 6"/>
+          <p:cNvSpPr txBox="1"/>
+          <p:nvPr/>
+        </p:nvSpPr>
+        <p:spPr>
+          <a:xfrm>
+            <a:off x="777240" y="4023360"/>
+            <a:ext cx="6949440" cy="1097280"/>
+          </a:xfrm>
+          <a:prstGeom prst="rect">
+            <a:avLst/>
+          </a:prstGeom>
+          <a:noFill/>
+        </p:spPr>
+        <p:txBody>
+          <a:bodyPr wrap="square" anchor="t" lIns="0" rIns="0" tIns="0" bIns="0">
+            <a:noAutofit/>
+          </a:bodyPr>
+          <a:lstStyle/>
+          <a:p>
+            <a:pPr algn="l">
+              <a:lnSpc>
+                <a:spcPct val="125000"/>
+              </a:lnSpc>
+            </a:pPr>
+            <a:r>
+              <a:rPr sz="1450" b="0" i="0">
+                <a:solidFill>
+                  <a:srgbClr val="ECECEF"/>
+                </a:solidFill>
+                <a:latin typeface="Calibri"/>
+              </a:rPr>
+              <a:t>Where our founders are today, the formats that support them, the numbers behind the work, and what we need from the faculty to grow.</a:t>
+            </a:r>
+          </a:p>
+        </p:txBody>
+      </p:sp>
+      <p:sp>
+        <p:nvSpPr>
+          <p:cNvPr id="8" name="Rectangle 7"/>
           <p:cNvSpPr/>
           <p:nvPr/>
         </p:nvSpPr>
         <p:spPr>
           <a:xfrm>
-            <a:off x="777240" y="566928"/>
-            <a:ext cx="822960" cy="64008"/>
+            <a:off x="777240" y="5532120"/>
+            <a:ext cx="411480" cy="32004"/>
           </a:xfrm>
           <a:prstGeom prst="rect">
             <a:avLst/>
           </a:prstGeom>
           <a:solidFill>
-            <a:srgbClr val="B6267C"/>
+            <a:srgbClr val="E2007A"/>
           </a:solidFill>
           <a:ln>
             <a:noFill/>
@@ -3229,14 +3386,14 @@
       </p:sp>
       <p:sp>
         <p:nvSpPr>
-          <p:cNvPr id="5" name="TextBox 4"/>
-          <p:cNvSpPr txBox="1"/>
-          <p:nvPr/>
-        </p:nvSpPr>
-        <p:spPr>
-          <a:xfrm>
-            <a:off x="777240" y="713232"/>
-            <a:ext cx="9144000" cy="365760"/>
+          <p:cNvPr id="9" name="TextBox 8"/>
+          <p:cNvSpPr txBox="1"/>
+          <p:nvPr/>
+        </p:nvSpPr>
+        <p:spPr>
+          <a:xfrm>
+            <a:off x="777240" y="5632704"/>
+            <a:ext cx="2514600" cy="274320"/>
           </a:xfrm>
           <a:prstGeom prst="rect">
             <a:avLst/>
@@ -3255,27 +3412,27 @@
               </a:lnSpc>
             </a:pPr>
             <a:r>
-              <a:rPr sz="1200" b="1" i="0" spc="250">
-                <a:solidFill>
-                  <a:srgbClr val="B6267C"/>
-                </a:solidFill>
-                <a:latin typeface="Arial"/>
-              </a:rPr>
-              <a:t>FACULTY BOARD BRIEFING · 16.06.2026</a:t>
-            </a:r>
-          </a:p>
-        </p:txBody>
-      </p:sp>
-      <p:sp>
-        <p:nvSpPr>
-          <p:cNvPr id="6" name="TextBox 5"/>
-          <p:cNvSpPr txBox="1"/>
-          <p:nvPr/>
-        </p:nvSpPr>
-        <p:spPr>
-          <a:xfrm>
-            <a:off x="758952" y="1920240"/>
-            <a:ext cx="10515600" cy="2011680"/>
+              <a:rPr sz="900" b="1" i="0" spc="180">
+                <a:solidFill>
+                  <a:srgbClr val="E2007A"/>
+                </a:solidFill>
+                <a:latin typeface="Calibri"/>
+              </a:rPr>
+              <a:t>PREPARED BY</a:t>
+            </a:r>
+          </a:p>
+        </p:txBody>
+      </p:sp>
+      <p:sp>
+        <p:nvSpPr>
+          <p:cNvPr id="10" name="TextBox 9"/>
+          <p:cNvSpPr txBox="1"/>
+          <p:nvPr/>
+        </p:nvSpPr>
+        <p:spPr>
+          <a:xfrm>
+            <a:off x="777240" y="5907024"/>
+            <a:ext cx="2514600" cy="548640"/>
           </a:xfrm>
           <a:prstGeom prst="rect">
             <a:avLst/>
@@ -3290,92 +3447,53 @@
           <a:p>
             <a:pPr algn="l">
               <a:lnSpc>
-                <a:spcPct val="98000"/>
-              </a:lnSpc>
-            </a:pPr>
-            <a:r>
-              <a:rPr sz="6000" b="1" i="0">
+                <a:spcPct val="110000"/>
+              </a:lnSpc>
+            </a:pPr>
+            <a:r>
+              <a:rPr sz="1100" b="1" i="0">
                 <a:solidFill>
                   <a:srgbClr val="FFFFFF"/>
                 </a:solidFill>
-                <a:latin typeface="Arial"/>
-              </a:rPr>
-              <a:t>ECRI Founder</a:t>
+                <a:latin typeface="Calibri"/>
+              </a:rPr>
+              <a:t>Mohammad Abu-Rezeq</a:t>
             </a:r>
           </a:p>
           <a:p>
             <a:pPr algn="l">
               <a:lnSpc>
-                <a:spcPct val="98000"/>
-              </a:lnSpc>
-            </a:pPr>
-            <a:r>
-              <a:rPr sz="6000" b="1" i="0">
-                <a:solidFill>
-                  <a:srgbClr val="B6267C"/>
-                </a:solidFill>
-                <a:latin typeface="Arial"/>
-              </a:rPr>
-              <a:t>Coaching.</a:t>
-            </a:r>
-          </a:p>
-        </p:txBody>
-      </p:sp>
-      <p:sp>
-        <p:nvSpPr>
-          <p:cNvPr id="7" name="TextBox 6"/>
-          <p:cNvSpPr txBox="1"/>
-          <p:nvPr/>
-        </p:nvSpPr>
-        <p:spPr>
-          <a:xfrm>
-            <a:off x="777240" y="4160520"/>
-            <a:ext cx="7680960" cy="1097280"/>
-          </a:xfrm>
-          <a:prstGeom prst="rect">
-            <a:avLst/>
-          </a:prstGeom>
-          <a:noFill/>
-        </p:spPr>
-        <p:txBody>
-          <a:bodyPr wrap="square" anchor="t" lIns="0" rIns="0" tIns="0" bIns="0">
-            <a:noAutofit/>
-          </a:bodyPr>
-          <a:lstStyle/>
-          <a:p>
-            <a:pPr algn="l">
-              <a:lnSpc>
-                <a:spcPct val="125000"/>
-              </a:lnSpc>
-            </a:pPr>
-            <a:r>
-              <a:rPr sz="1450" b="0" i="0">
-                <a:solidFill>
-                  <a:srgbClr val="CFCFD2"/>
-                </a:solidFill>
-                <a:latin typeface="Arial"/>
-              </a:rPr>
-              <a:t>Where our founders are today, the formats that support them, the numbers behind the work, and what we need from the faculty to grow.</a:t>
-            </a:r>
-          </a:p>
-        </p:txBody>
-      </p:sp>
-      <p:sp>
-        <p:nvSpPr>
-          <p:cNvPr id="8" name="Rectangle 7"/>
+                <a:spcPct val="110000"/>
+              </a:lnSpc>
+            </a:pPr>
+            <a:r>
+              <a:rPr sz="1000" b="0" i="0">
+                <a:solidFill>
+                  <a:srgbClr val="B9B9BE"/>
+                </a:solidFill>
+                <a:latin typeface="Calibri"/>
+              </a:rPr>
+              <a:t>ECRI, Unit 01</a:t>
+            </a:r>
+          </a:p>
+        </p:txBody>
+      </p:sp>
+      <p:sp>
+        <p:nvSpPr>
+          <p:cNvPr id="11" name="Rectangle 10"/>
           <p:cNvSpPr/>
           <p:nvPr/>
         </p:nvSpPr>
         <p:spPr>
           <a:xfrm>
-            <a:off x="777240" y="5532120"/>
+            <a:off x="3474720" y="5532120"/>
             <a:ext cx="411480" cy="32004"/>
           </a:xfrm>
           <a:prstGeom prst="rect">
             <a:avLst/>
           </a:prstGeom>
           <a:solidFill>
-            <a:srgbClr val="B6267C"/>
+            <a:srgbClr val="E2007A"/>
           </a:solidFill>
           <a:ln>
             <a:noFill/>
@@ -3406,14 +3524,14 @@
       </p:sp>
       <p:sp>
         <p:nvSpPr>
-          <p:cNvPr id="9" name="TextBox 8"/>
-          <p:cNvSpPr txBox="1"/>
-          <p:nvPr/>
-        </p:nvSpPr>
-        <p:spPr>
-          <a:xfrm>
-            <a:off x="777240" y="5632704"/>
-            <a:ext cx="2423160" cy="274320"/>
+          <p:cNvPr id="12" name="TextBox 11"/>
+          <p:cNvSpPr txBox="1"/>
+          <p:nvPr/>
+        </p:nvSpPr>
+        <p:spPr>
+          <a:xfrm>
+            <a:off x="3474720" y="5632704"/>
+            <a:ext cx="2514600" cy="274320"/>
           </a:xfrm>
           <a:prstGeom prst="rect">
             <a:avLst/>
@@ -3434,25 +3552,25 @@
             <a:r>
               <a:rPr sz="900" b="1" i="0" spc="180">
                 <a:solidFill>
-                  <a:srgbClr val="B6267C"/>
-                </a:solidFill>
-                <a:latin typeface="Arial"/>
-              </a:rPr>
-              <a:t>PREPARED BY</a:t>
-            </a:r>
-          </a:p>
-        </p:txBody>
-      </p:sp>
-      <p:sp>
-        <p:nvSpPr>
-          <p:cNvPr id="10" name="TextBox 9"/>
-          <p:cNvSpPr txBox="1"/>
-          <p:nvPr/>
-        </p:nvSpPr>
-        <p:spPr>
-          <a:xfrm>
-            <a:off x="777240" y="5907024"/>
-            <a:ext cx="2423160" cy="548640"/>
+                  <a:srgbClr val="E2007A"/>
+                </a:solidFill>
+                <a:latin typeface="Calibri"/>
+              </a:rPr>
+              <a:t>FOR</a:t>
+            </a:r>
+          </a:p>
+        </p:txBody>
+      </p:sp>
+      <p:sp>
+        <p:nvSpPr>
+          <p:cNvPr id="13" name="TextBox 12"/>
+          <p:cNvSpPr txBox="1"/>
+          <p:nvPr/>
+        </p:nvSpPr>
+        <p:spPr>
+          <a:xfrm>
+            <a:off x="3474720" y="5907024"/>
+            <a:ext cx="2514600" cy="548640"/>
           </a:xfrm>
           <a:prstGeom prst="rect">
             <a:avLst/>
@@ -3475,9 +3593,9 @@
                 <a:solidFill>
                   <a:srgbClr val="FFFFFF"/>
                 </a:solidFill>
-                <a:latin typeface="Arial"/>
-              </a:rPr>
-              <a:t>Mohammad Abu-Rezeq</a:t>
+                <a:latin typeface="Calibri"/>
+              </a:rPr>
+              <a:t>Prof. Dr. Dominik Boehler</a:t>
             </a:r>
           </a:p>
           <a:p>
@@ -3489,31 +3607,31 @@
             <a:r>
               <a:rPr sz="1000" b="0" i="0">
                 <a:solidFill>
-                  <a:srgbClr val="9A9A9A"/>
-                </a:solidFill>
-                <a:latin typeface="Arial"/>
-              </a:rPr>
-              <a:t>ECRI, Unit 01</a:t>
-            </a:r>
-          </a:p>
-        </p:txBody>
-      </p:sp>
-      <p:sp>
-        <p:nvSpPr>
-          <p:cNvPr id="11" name="Rectangle 10"/>
+                  <a:srgbClr val="B9B9BE"/>
+                </a:solidFill>
+                <a:latin typeface="Calibri"/>
+              </a:rPr>
+              <a:t>Faculty Board</a:t>
+            </a:r>
+          </a:p>
+        </p:txBody>
+      </p:sp>
+      <p:sp>
+        <p:nvSpPr>
+          <p:cNvPr id="14" name="Rectangle 13"/>
           <p:cNvSpPr/>
           <p:nvPr/>
         </p:nvSpPr>
         <p:spPr>
           <a:xfrm>
-            <a:off x="3383280" y="5532120"/>
+            <a:off x="6172200" y="5532120"/>
             <a:ext cx="411480" cy="32004"/>
           </a:xfrm>
           <a:prstGeom prst="rect">
             <a:avLst/>
           </a:prstGeom>
           <a:solidFill>
-            <a:srgbClr val="B6267C"/>
+            <a:srgbClr val="E2007A"/>
           </a:solidFill>
           <a:ln>
             <a:noFill/>
@@ -3544,14 +3662,14 @@
       </p:sp>
       <p:sp>
         <p:nvSpPr>
-          <p:cNvPr id="12" name="TextBox 11"/>
-          <p:cNvSpPr txBox="1"/>
-          <p:nvPr/>
-        </p:nvSpPr>
-        <p:spPr>
-          <a:xfrm>
-            <a:off x="3383280" y="5632704"/>
-            <a:ext cx="2423160" cy="274320"/>
+          <p:cNvPr id="15" name="TextBox 14"/>
+          <p:cNvSpPr txBox="1"/>
+          <p:nvPr/>
+        </p:nvSpPr>
+        <p:spPr>
+          <a:xfrm>
+            <a:off x="6172200" y="5632704"/>
+            <a:ext cx="2514600" cy="274320"/>
           </a:xfrm>
           <a:prstGeom prst="rect">
             <a:avLst/>
@@ -3572,25 +3690,25 @@
             <a:r>
               <a:rPr sz="900" b="1" i="0" spc="180">
                 <a:solidFill>
-                  <a:srgbClr val="B6267C"/>
-                </a:solidFill>
-                <a:latin typeface="Arial"/>
-              </a:rPr>
-              <a:t>FOR</a:t>
-            </a:r>
-          </a:p>
-        </p:txBody>
-      </p:sp>
-      <p:sp>
-        <p:nvSpPr>
-          <p:cNvPr id="13" name="TextBox 12"/>
-          <p:cNvSpPr txBox="1"/>
-          <p:nvPr/>
-        </p:nvSpPr>
-        <p:spPr>
-          <a:xfrm>
-            <a:off x="3383280" y="5907024"/>
-            <a:ext cx="2423160" cy="548640"/>
+                  <a:srgbClr val="E2007A"/>
+                </a:solidFill>
+                <a:latin typeface="Calibri"/>
+              </a:rPr>
+              <a:t>PR CONTACT</a:t>
+            </a:r>
+          </a:p>
+        </p:txBody>
+      </p:sp>
+      <p:sp>
+        <p:nvSpPr>
+          <p:cNvPr id="16" name="TextBox 15"/>
+          <p:cNvSpPr txBox="1"/>
+          <p:nvPr/>
+        </p:nvSpPr>
+        <p:spPr>
+          <a:xfrm>
+            <a:off x="6172200" y="5907024"/>
+            <a:ext cx="2514600" cy="548640"/>
           </a:xfrm>
           <a:prstGeom prst="rect">
             <a:avLst/>
@@ -3613,9 +3731,9 @@
                 <a:solidFill>
                   <a:srgbClr val="FFFFFF"/>
                 </a:solidFill>
-                <a:latin typeface="Arial"/>
-              </a:rPr>
-              <a:t>Prof. Dr. Dominik Boehler</a:t>
+                <a:latin typeface="Calibri"/>
+              </a:rPr>
+              <a:t>Herwig Slezak</a:t>
             </a:r>
           </a:p>
           <a:p>
@@ -3627,31 +3745,31 @@
             <a:r>
               <a:rPr sz="1000" b="0" i="0">
                 <a:solidFill>
-                  <a:srgbClr val="9A9A9A"/>
-                </a:solidFill>
-                <a:latin typeface="Arial"/>
-              </a:rPr>
-              <a:t>Faculty Board</a:t>
-            </a:r>
-          </a:p>
-        </p:txBody>
-      </p:sp>
-      <p:sp>
-        <p:nvSpPr>
-          <p:cNvPr id="14" name="Rectangle 13"/>
+                  <a:srgbClr val="B9B9BE"/>
+                </a:solidFill>
+                <a:latin typeface="Calibri"/>
+              </a:rPr>
+              <a:t>Marketing</a:t>
+            </a:r>
+          </a:p>
+        </p:txBody>
+      </p:sp>
+      <p:sp>
+        <p:nvSpPr>
+          <p:cNvPr id="17" name="Rectangle 16"/>
           <p:cNvSpPr/>
           <p:nvPr/>
         </p:nvSpPr>
         <p:spPr>
           <a:xfrm>
-            <a:off x="5989320" y="5532120"/>
+            <a:off x="8869680" y="5532120"/>
             <a:ext cx="411480" cy="32004"/>
           </a:xfrm>
           <a:prstGeom prst="rect">
             <a:avLst/>
           </a:prstGeom>
           <a:solidFill>
-            <a:srgbClr val="B6267C"/>
+            <a:srgbClr val="E2007A"/>
           </a:solidFill>
           <a:ln>
             <a:noFill/>
@@ -3682,14 +3800,14 @@
       </p:sp>
       <p:sp>
         <p:nvSpPr>
-          <p:cNvPr id="15" name="TextBox 14"/>
-          <p:cNvSpPr txBox="1"/>
-          <p:nvPr/>
-        </p:nvSpPr>
-        <p:spPr>
-          <a:xfrm>
-            <a:off x="5989320" y="5632704"/>
-            <a:ext cx="2423160" cy="274320"/>
+          <p:cNvPr id="18" name="TextBox 17"/>
+          <p:cNvSpPr txBox="1"/>
+          <p:nvPr/>
+        </p:nvSpPr>
+        <p:spPr>
+          <a:xfrm>
+            <a:off x="8869680" y="5632704"/>
+            <a:ext cx="2514600" cy="274320"/>
           </a:xfrm>
           <a:prstGeom prst="rect">
             <a:avLst/>
@@ -3710,25 +3828,25 @@
             <a:r>
               <a:rPr sz="900" b="1" i="0" spc="180">
                 <a:solidFill>
-                  <a:srgbClr val="B6267C"/>
-                </a:solidFill>
-                <a:latin typeface="Arial"/>
-              </a:rPr>
-              <a:t>PR CONTACT</a:t>
-            </a:r>
-          </a:p>
-        </p:txBody>
-      </p:sp>
-      <p:sp>
-        <p:nvSpPr>
-          <p:cNvPr id="16" name="TextBox 15"/>
-          <p:cNvSpPr txBox="1"/>
-          <p:nvPr/>
-        </p:nvSpPr>
-        <p:spPr>
-          <a:xfrm>
-            <a:off x="5989320" y="5907024"/>
-            <a:ext cx="2423160" cy="548640"/>
+                  <a:srgbClr val="E2007A"/>
+                </a:solidFill>
+                <a:latin typeface="Calibri"/>
+              </a:rPr>
+              <a:t>MEETING</a:t>
+            </a:r>
+          </a:p>
+        </p:txBody>
+      </p:sp>
+      <p:sp>
+        <p:nvSpPr>
+          <p:cNvPr id="19" name="TextBox 18"/>
+          <p:cNvSpPr txBox="1"/>
+          <p:nvPr/>
+        </p:nvSpPr>
+        <p:spPr>
+          <a:xfrm>
+            <a:off x="8869680" y="5907024"/>
+            <a:ext cx="2514600" cy="548640"/>
           </a:xfrm>
           <a:prstGeom prst="rect">
             <a:avLst/>
@@ -3751,9 +3869,9 @@
                 <a:solidFill>
                   <a:srgbClr val="FFFFFF"/>
                 </a:solidFill>
-                <a:latin typeface="Arial"/>
-              </a:rPr>
-              <a:t>Herwig Slezak</a:t>
+                <a:latin typeface="Calibri"/>
+              </a:rPr>
+              <a:t>16 June 2026 · 14:00</a:t>
             </a:r>
           </a:p>
           <a:p>
@@ -3765,147 +3883,9 @@
             <a:r>
               <a:rPr sz="1000" b="0" i="0">
                 <a:solidFill>
-                  <a:srgbClr val="9A9A9A"/>
-                </a:solidFill>
-                <a:latin typeface="Arial"/>
-              </a:rPr>
-              <a:t>Marketing</a:t>
-            </a:r>
-          </a:p>
-        </p:txBody>
-      </p:sp>
-      <p:sp>
-        <p:nvSpPr>
-          <p:cNvPr id="17" name="Rectangle 16"/>
-          <p:cNvSpPr/>
-          <p:nvPr/>
-        </p:nvSpPr>
-        <p:spPr>
-          <a:xfrm>
-            <a:off x="8595360" y="5532120"/>
-            <a:ext cx="411480" cy="32004"/>
-          </a:xfrm>
-          <a:prstGeom prst="rect">
-            <a:avLst/>
-          </a:prstGeom>
-          <a:solidFill>
-            <a:srgbClr val="B6267C"/>
-          </a:solidFill>
-          <a:ln>
-            <a:noFill/>
-          </a:ln>
-          <a:effectLst/>
-        </p:spPr>
-        <p:style>
-          <a:lnRef idx="1">
-            <a:schemeClr val="accent1"/>
-          </a:lnRef>
-          <a:fillRef idx="3">
-            <a:schemeClr val="accent1"/>
-          </a:fillRef>
-          <a:effectRef idx="2">
-            <a:schemeClr val="accent1"/>
-          </a:effectRef>
-          <a:fontRef idx="minor">
-            <a:schemeClr val="lt1"/>
-          </a:fontRef>
-        </p:style>
-        <p:txBody>
-          <a:bodyPr rtlCol="0" anchor="ctr"/>
-          <a:lstStyle/>
-          <a:p>
-            <a:pPr algn="ctr"/>
-          </a:p>
-        </p:txBody>
-      </p:sp>
-      <p:sp>
-        <p:nvSpPr>
-          <p:cNvPr id="18" name="TextBox 17"/>
-          <p:cNvSpPr txBox="1"/>
-          <p:nvPr/>
-        </p:nvSpPr>
-        <p:spPr>
-          <a:xfrm>
-            <a:off x="8595360" y="5632704"/>
-            <a:ext cx="2423160" cy="274320"/>
-          </a:xfrm>
-          <a:prstGeom prst="rect">
-            <a:avLst/>
-          </a:prstGeom>
-          <a:noFill/>
-        </p:spPr>
-        <p:txBody>
-          <a:bodyPr wrap="square" anchor="t" lIns="0" rIns="0" tIns="0" bIns="0">
-            <a:noAutofit/>
-          </a:bodyPr>
-          <a:lstStyle/>
-          <a:p>
-            <a:pPr algn="l">
-              <a:lnSpc>
-                <a:spcPct val="100000"/>
-              </a:lnSpc>
-            </a:pPr>
-            <a:r>
-              <a:rPr sz="900" b="1" i="0" spc="180">
-                <a:solidFill>
-                  <a:srgbClr val="B6267C"/>
-                </a:solidFill>
-                <a:latin typeface="Arial"/>
-              </a:rPr>
-              <a:t>MEETING</a:t>
-            </a:r>
-          </a:p>
-        </p:txBody>
-      </p:sp>
-      <p:sp>
-        <p:nvSpPr>
-          <p:cNvPr id="19" name="TextBox 18"/>
-          <p:cNvSpPr txBox="1"/>
-          <p:nvPr/>
-        </p:nvSpPr>
-        <p:spPr>
-          <a:xfrm>
-            <a:off x="8595360" y="5907024"/>
-            <a:ext cx="2423160" cy="548640"/>
-          </a:xfrm>
-          <a:prstGeom prst="rect">
-            <a:avLst/>
-          </a:prstGeom>
-          <a:noFill/>
-        </p:spPr>
-        <p:txBody>
-          <a:bodyPr wrap="square" anchor="t" lIns="0" rIns="0" tIns="0" bIns="0">
-            <a:noAutofit/>
-          </a:bodyPr>
-          <a:lstStyle/>
-          <a:p>
-            <a:pPr algn="l">
-              <a:lnSpc>
-                <a:spcPct val="110000"/>
-              </a:lnSpc>
-            </a:pPr>
-            <a:r>
-              <a:rPr sz="1100" b="1" i="0">
-                <a:solidFill>
-                  <a:srgbClr val="FFFFFF"/>
-                </a:solidFill>
-                <a:latin typeface="Arial"/>
-              </a:rPr>
-              <a:t>16 June 2026 · 14:00</a:t>
-            </a:r>
-          </a:p>
-          <a:p>
-            <a:pPr algn="l">
-              <a:lnSpc>
-                <a:spcPct val="110000"/>
-              </a:lnSpc>
-            </a:pPr>
-            <a:r>
-              <a:rPr sz="1000" b="0" i="0">
-                <a:solidFill>
-                  <a:srgbClr val="9A9A9A"/>
-                </a:solidFill>
-                <a:latin typeface="Arial"/>
+                  <a:srgbClr val="B9B9BE"/>
+                </a:solidFill>
+                <a:latin typeface="Calibri"/>
               </a:rPr>
               <a:t>THD · ZFE</a:t>
             </a:r>
@@ -3942,18 +3922,18 @@
             <a:r>
               <a:rPr sz="850" b="1" i="0">
                 <a:solidFill>
-                  <a:srgbClr val="B6267C"/>
-                </a:solidFill>
-                <a:latin typeface="Arial"/>
+                  <a:srgbClr val="E2007A"/>
+                </a:solidFill>
+                <a:latin typeface="Calibri"/>
               </a:rPr>
               <a:t>01</a:t>
             </a:r>
             <a:r>
               <a:rPr sz="850" b="0" i="0">
                 <a:solidFill>
-                  <a:srgbClr val="9A9A9A"/>
-                </a:solidFill>
-                <a:latin typeface="Arial"/>
+                  <a:srgbClr val="B9B9BE"/>
+                </a:solidFill>
+                <a:latin typeface="Calibri"/>
               </a:rPr>
               <a:t>  /  08</a:t>
             </a:r>
@@ -4031,13 +4011,13 @@
         <p:spPr>
           <a:xfrm>
             <a:off x="777240" y="640080"/>
-            <a:ext cx="880932" cy="274320"/>
+            <a:ext cx="864656" cy="274320"/>
           </a:xfrm>
           <a:prstGeom prst="rect">
             <a:avLst/>
           </a:prstGeom>
           <a:solidFill>
-            <a:srgbClr val="B6267C"/>
+            <a:srgbClr val="E2007A"/>
           </a:solidFill>
           <a:ln>
             <a:noFill/>
@@ -4075,7 +4055,7 @@
         <p:spPr>
           <a:xfrm>
             <a:off x="777240" y="640080"/>
-            <a:ext cx="880932" cy="274320"/>
+            <a:ext cx="864656" cy="274320"/>
           </a:xfrm>
           <a:prstGeom prst="rect">
             <a:avLst/>
@@ -4098,7 +4078,7 @@
                 <a:solidFill>
                   <a:srgbClr val="FFFFFF"/>
                 </a:solidFill>
-                <a:latin typeface="Arial"/>
+                <a:latin typeface="Calibri"/>
               </a:rPr>
               <a:t>AGENDA</a:t>
             </a:r>
@@ -4114,7 +4094,7 @@
         <p:spPr>
           <a:xfrm>
             <a:off x="758952" y="1078992"/>
-            <a:ext cx="10058400" cy="1097280"/>
+            <a:ext cx="6400800" cy="1097280"/>
           </a:xfrm>
           <a:prstGeom prst="rect">
             <a:avLst/>
@@ -4137,32 +4117,56 @@
                 <a:solidFill>
                   <a:srgbClr val="222222"/>
                 </a:solidFill>
-                <a:latin typeface="Arial"/>
+                <a:latin typeface="Calibri"/>
               </a:rPr>
               <a:t>Agenda</a:t>
             </a:r>
             <a:r>
               <a:rPr sz="3300" b="1" i="0">
                 <a:solidFill>
-                  <a:srgbClr val="B6267C"/>
-                </a:solidFill>
-                <a:latin typeface="Arial"/>
+                  <a:srgbClr val="E2007A"/>
+                </a:solidFill>
+                <a:latin typeface="Calibri"/>
               </a:rPr>
               <a:t/>
             </a:r>
           </a:p>
         </p:txBody>
       </p:sp>
-      <p:sp>
-        <p:nvSpPr>
-          <p:cNvPr id="6" name="TextBox 5"/>
-          <p:cNvSpPr txBox="1"/>
-          <p:nvPr/>
-        </p:nvSpPr>
-        <p:spPr>
-          <a:xfrm>
-            <a:off x="777240" y="1828800"/>
-            <a:ext cx="6858000" cy="731520"/>
+      <p:pic>
+        <p:nvPicPr>
+          <p:cNvPr id="6" name="Picture 5" descr="agenda_photo.png"/>
+          <p:cNvPicPr>
+            <a:picLocks noChangeAspect="1"/>
+          </p:cNvPicPr>
+          <p:nvPr/>
+        </p:nvPicPr>
+        <p:blipFill>
+          <a:blip r:embed="rId2"/>
+          <a:stretch>
+            <a:fillRect/>
+          </a:stretch>
+        </p:blipFill>
+        <p:spPr>
+          <a:xfrm>
+            <a:off x="8732520" y="640080"/>
+            <a:ext cx="2679192" cy="3840480"/>
+          </a:xfrm>
+          <a:prstGeom prst="rect">
+            <a:avLst/>
+          </a:prstGeom>
+        </p:spPr>
+      </p:pic>
+      <p:sp>
+        <p:nvSpPr>
+          <p:cNvPr id="7" name="TextBox 6"/>
+          <p:cNvSpPr txBox="1"/>
+          <p:nvPr/>
+        </p:nvSpPr>
+        <p:spPr>
+          <a:xfrm>
+            <a:off x="777240" y="1783080"/>
+            <a:ext cx="7315200" cy="731520"/>
           </a:xfrm>
           <a:prstGeom prst="rect">
             <a:avLst/>
@@ -4185,7 +4189,7 @@
                 <a:solidFill>
                   <a:srgbClr val="6E6E6E"/>
                 </a:solidFill>
-                <a:latin typeface="Arial"/>
+                <a:latin typeface="Calibri"/>
               </a:rPr>
               <a:t>A short briefing on the state of ECRI founder coaching: who we are working with, how we reach them, the numbers, and what we need to grow.</a:t>
             </a:r>
@@ -4194,14 +4198,14 @@
       </p:sp>
       <p:sp>
         <p:nvSpPr>
-          <p:cNvPr id="7" name="TextBox 6"/>
-          <p:cNvSpPr txBox="1"/>
-          <p:nvPr/>
-        </p:nvSpPr>
-        <p:spPr>
-          <a:xfrm>
-            <a:off x="777240" y="2788920"/>
-            <a:ext cx="822960" cy="676656"/>
+          <p:cNvPr id="8" name="TextBox 7"/>
+          <p:cNvSpPr txBox="1"/>
+          <p:nvPr/>
+        </p:nvSpPr>
+        <p:spPr>
+          <a:xfrm>
+            <a:off x="777240" y="2743200"/>
+            <a:ext cx="822960" cy="667512"/>
           </a:xfrm>
           <a:prstGeom prst="rect">
             <a:avLst/>
@@ -4220,11 +4224,11 @@
               </a:lnSpc>
             </a:pPr>
             <a:r>
-              <a:rPr sz="2500" b="1" i="0">
-                <a:solidFill>
-                  <a:srgbClr val="B6267C"/>
-                </a:solidFill>
-                <a:latin typeface="Arial"/>
+              <a:rPr sz="2400" b="1" i="0">
+                <a:solidFill>
+                  <a:srgbClr val="E2007A"/>
+                </a:solidFill>
+                <a:latin typeface="Calibri"/>
               </a:rPr>
               <a:t>01</a:t>
             </a:r>
@@ -4233,14 +4237,14 @@
       </p:sp>
       <p:sp>
         <p:nvSpPr>
-          <p:cNvPr id="8" name="TextBox 7"/>
-          <p:cNvSpPr txBox="1"/>
-          <p:nvPr/>
-        </p:nvSpPr>
-        <p:spPr>
-          <a:xfrm>
-            <a:off x="1783080" y="2788920"/>
-            <a:ext cx="4754880" cy="676656"/>
+          <p:cNvPr id="9" name="TextBox 8"/>
+          <p:cNvSpPr txBox="1"/>
+          <p:nvPr/>
+        </p:nvSpPr>
+        <p:spPr>
+          <a:xfrm>
+            <a:off x="1737360" y="2743200"/>
+            <a:ext cx="3657600" cy="667512"/>
           </a:xfrm>
           <a:prstGeom prst="rect">
             <a:avLst/>
@@ -4259,11 +4263,11 @@
               </a:lnSpc>
             </a:pPr>
             <a:r>
-              <a:rPr sz="1600" b="1" i="0">
+              <a:rPr sz="1550" b="1" i="0">
                 <a:solidFill>
                   <a:srgbClr val="222222"/>
                 </a:solidFill>
-                <a:latin typeface="Arial"/>
+                <a:latin typeface="Calibri"/>
               </a:rPr>
               <a:t>Teams</a:t>
             </a:r>
@@ -4272,14 +4276,14 @@
       </p:sp>
       <p:sp>
         <p:nvSpPr>
-          <p:cNvPr id="9" name="TextBox 8"/>
-          <p:cNvSpPr txBox="1"/>
-          <p:nvPr/>
-        </p:nvSpPr>
-        <p:spPr>
-          <a:xfrm>
-            <a:off x="6583680" y="2788920"/>
-            <a:ext cx="3657600" cy="676656"/>
+          <p:cNvPr id="10" name="TextBox 9"/>
+          <p:cNvSpPr txBox="1"/>
+          <p:nvPr/>
+        </p:nvSpPr>
+        <p:spPr>
+          <a:xfrm>
+            <a:off x="5486400" y="2743200"/>
+            <a:ext cx="2468880" cy="667512"/>
           </a:xfrm>
           <a:prstGeom prst="rect">
             <a:avLst/>
@@ -4298,11 +4302,11 @@
               </a:lnSpc>
             </a:pPr>
             <a:r>
-              <a:rPr sz="1200" b="0" i="0">
+              <a:rPr sz="1100" b="0" i="0">
                 <a:solidFill>
                   <a:srgbClr val="6E6E6E"/>
                 </a:solidFill>
-                <a:latin typeface="Arial"/>
+                <a:latin typeface="Calibri"/>
               </a:rPr>
               <a:t>Active student ventures</a:t>
             </a:r>
@@ -4311,14 +4315,14 @@
       </p:sp>
       <p:sp>
         <p:nvSpPr>
-          <p:cNvPr id="10" name="TextBox 9"/>
-          <p:cNvSpPr txBox="1"/>
-          <p:nvPr/>
-        </p:nvSpPr>
-        <p:spPr>
-          <a:xfrm>
-            <a:off x="10332720" y="2788920"/>
-            <a:ext cx="1097280" cy="676656"/>
+          <p:cNvPr id="11" name="TextBox 10"/>
+          <p:cNvSpPr txBox="1"/>
+          <p:nvPr/>
+        </p:nvSpPr>
+        <p:spPr>
+          <a:xfrm>
+            <a:off x="7955279" y="2743200"/>
+            <a:ext cx="640080" cy="667512"/>
           </a:xfrm>
           <a:prstGeom prst="rect">
             <a:avLst/>
@@ -4337,11 +4341,11 @@
               </a:lnSpc>
             </a:pPr>
             <a:r>
-              <a:rPr sz="1100" b="1" i="0">
-                <a:solidFill>
-                  <a:srgbClr val="B6267C"/>
-                </a:solidFill>
-                <a:latin typeface="Arial"/>
+              <a:rPr sz="1050" b="1" i="0">
+                <a:solidFill>
+                  <a:srgbClr val="E2007A"/>
+                </a:solidFill>
+                <a:latin typeface="Calibri"/>
               </a:rPr>
               <a:t>S. 03</a:t>
             </a:r>
@@ -4350,14 +4354,14 @@
       </p:sp>
       <p:sp>
         <p:nvSpPr>
-          <p:cNvPr id="11" name="Rectangle 10"/>
+          <p:cNvPr id="12" name="Rectangle 11"/>
           <p:cNvSpPr/>
           <p:nvPr/>
         </p:nvSpPr>
         <p:spPr>
           <a:xfrm>
-            <a:off x="777240" y="3447288"/>
-            <a:ext cx="10637215" cy="9144"/>
+            <a:off x="777240" y="3392424"/>
+            <a:ext cx="7818120" cy="9144"/>
           </a:xfrm>
           <a:prstGeom prst="rect">
             <a:avLst/>
@@ -4394,14 +4398,14 @@
       </p:sp>
       <p:sp>
         <p:nvSpPr>
-          <p:cNvPr id="12" name="TextBox 11"/>
-          <p:cNvSpPr txBox="1"/>
-          <p:nvPr/>
-        </p:nvSpPr>
-        <p:spPr>
-          <a:xfrm>
-            <a:off x="777240" y="3465576"/>
-            <a:ext cx="822960" cy="676656"/>
+          <p:cNvPr id="13" name="TextBox 12"/>
+          <p:cNvSpPr txBox="1"/>
+          <p:nvPr/>
+        </p:nvSpPr>
+        <p:spPr>
+          <a:xfrm>
+            <a:off x="777240" y="3410712"/>
+            <a:ext cx="822960" cy="667512"/>
           </a:xfrm>
           <a:prstGeom prst="rect">
             <a:avLst/>
@@ -4420,11 +4424,11 @@
               </a:lnSpc>
             </a:pPr>
             <a:r>
-              <a:rPr sz="2500" b="1" i="0">
-                <a:solidFill>
-                  <a:srgbClr val="B6267C"/>
-                </a:solidFill>
-                <a:latin typeface="Arial"/>
+              <a:rPr sz="2400" b="1" i="0">
+                <a:solidFill>
+                  <a:srgbClr val="E2007A"/>
+                </a:solidFill>
+                <a:latin typeface="Calibri"/>
               </a:rPr>
               <a:t>02</a:t>
             </a:r>
@@ -4433,14 +4437,14 @@
       </p:sp>
       <p:sp>
         <p:nvSpPr>
-          <p:cNvPr id="13" name="TextBox 12"/>
-          <p:cNvSpPr txBox="1"/>
-          <p:nvPr/>
-        </p:nvSpPr>
-        <p:spPr>
-          <a:xfrm>
-            <a:off x="1783080" y="3465576"/>
-            <a:ext cx="4754880" cy="676656"/>
+          <p:cNvPr id="14" name="TextBox 13"/>
+          <p:cNvSpPr txBox="1"/>
+          <p:nvPr/>
+        </p:nvSpPr>
+        <p:spPr>
+          <a:xfrm>
+            <a:off x="1737360" y="3410712"/>
+            <a:ext cx="3657600" cy="667512"/>
           </a:xfrm>
           <a:prstGeom prst="rect">
             <a:avLst/>
@@ -4459,11 +4463,11 @@
               </a:lnSpc>
             </a:pPr>
             <a:r>
-              <a:rPr sz="1600" b="1" i="0">
+              <a:rPr sz="1550" b="1" i="0">
                 <a:solidFill>
                   <a:srgbClr val="222222"/>
                 </a:solidFill>
-                <a:latin typeface="Arial"/>
+                <a:latin typeface="Calibri"/>
               </a:rPr>
               <a:t>The founder network</a:t>
             </a:r>
@@ -4472,14 +4476,14 @@
       </p:sp>
       <p:sp>
         <p:nvSpPr>
-          <p:cNvPr id="14" name="TextBox 13"/>
-          <p:cNvSpPr txBox="1"/>
-          <p:nvPr/>
-        </p:nvSpPr>
-        <p:spPr>
-          <a:xfrm>
-            <a:off x="6583680" y="3465576"/>
-            <a:ext cx="3657600" cy="676656"/>
+          <p:cNvPr id="15" name="TextBox 14"/>
+          <p:cNvSpPr txBox="1"/>
+          <p:nvPr/>
+        </p:nvSpPr>
+        <p:spPr>
+          <a:xfrm>
+            <a:off x="5486400" y="3410712"/>
+            <a:ext cx="2468880" cy="667512"/>
           </a:xfrm>
           <a:prstGeom prst="rect">
             <a:avLst/>
@@ -4498,11 +4502,11 @@
               </a:lnSpc>
             </a:pPr>
             <a:r>
-              <a:rPr sz="1200" b="0" i="0">
+              <a:rPr sz="1100" b="0" i="0">
                 <a:solidFill>
                   <a:srgbClr val="6E6E6E"/>
                 </a:solidFill>
-                <a:latin typeface="Arial"/>
+                <a:latin typeface="Calibri"/>
               </a:rPr>
               <a:t>Founders, talent and mentors joining</a:t>
             </a:r>
@@ -4511,14 +4515,14 @@
       </p:sp>
       <p:sp>
         <p:nvSpPr>
-          <p:cNvPr id="15" name="TextBox 14"/>
-          <p:cNvSpPr txBox="1"/>
-          <p:nvPr/>
-        </p:nvSpPr>
-        <p:spPr>
-          <a:xfrm>
-            <a:off x="10332720" y="3465576"/>
-            <a:ext cx="1097280" cy="676656"/>
+          <p:cNvPr id="16" name="TextBox 15"/>
+          <p:cNvSpPr txBox="1"/>
+          <p:nvPr/>
+        </p:nvSpPr>
+        <p:spPr>
+          <a:xfrm>
+            <a:off x="7955279" y="3410712"/>
+            <a:ext cx="640080" cy="667512"/>
           </a:xfrm>
           <a:prstGeom prst="rect">
             <a:avLst/>
@@ -4537,11 +4541,11 @@
               </a:lnSpc>
             </a:pPr>
             <a:r>
-              <a:rPr sz="1100" b="1" i="0">
-                <a:solidFill>
-                  <a:srgbClr val="B6267C"/>
-                </a:solidFill>
-                <a:latin typeface="Arial"/>
+              <a:rPr sz="1050" b="1" i="0">
+                <a:solidFill>
+                  <a:srgbClr val="E2007A"/>
+                </a:solidFill>
+                <a:latin typeface="Calibri"/>
               </a:rPr>
               <a:t>S. 04</a:t>
             </a:r>
@@ -4550,14 +4554,14 @@
       </p:sp>
       <p:sp>
         <p:nvSpPr>
-          <p:cNvPr id="16" name="Rectangle 15"/>
+          <p:cNvPr id="17" name="Rectangle 16"/>
           <p:cNvSpPr/>
           <p:nvPr/>
         </p:nvSpPr>
         <p:spPr>
           <a:xfrm>
-            <a:off x="777240" y="4123944"/>
-            <a:ext cx="10637215" cy="9144"/>
+            <a:off x="777240" y="4059936"/>
+            <a:ext cx="7818120" cy="9144"/>
           </a:xfrm>
           <a:prstGeom prst="rect">
             <a:avLst/>
@@ -4594,14 +4598,14 @@
       </p:sp>
       <p:sp>
         <p:nvSpPr>
-          <p:cNvPr id="17" name="TextBox 16"/>
-          <p:cNvSpPr txBox="1"/>
-          <p:nvPr/>
-        </p:nvSpPr>
-        <p:spPr>
-          <a:xfrm>
-            <a:off x="777240" y="4142231"/>
-            <a:ext cx="822960" cy="676656"/>
+          <p:cNvPr id="18" name="TextBox 17"/>
+          <p:cNvSpPr txBox="1"/>
+          <p:nvPr/>
+        </p:nvSpPr>
+        <p:spPr>
+          <a:xfrm>
+            <a:off x="777240" y="4078224"/>
+            <a:ext cx="822960" cy="667512"/>
           </a:xfrm>
           <a:prstGeom prst="rect">
             <a:avLst/>
@@ -4620,11 +4624,11 @@
               </a:lnSpc>
             </a:pPr>
             <a:r>
-              <a:rPr sz="2500" b="1" i="0">
-                <a:solidFill>
-                  <a:srgbClr val="B6267C"/>
-                </a:solidFill>
-                <a:latin typeface="Arial"/>
+              <a:rPr sz="2400" b="1" i="0">
+                <a:solidFill>
+                  <a:srgbClr val="E2007A"/>
+                </a:solidFill>
+                <a:latin typeface="Calibri"/>
               </a:rPr>
               <a:t>03</a:t>
             </a:r>
@@ -4633,14 +4637,14 @@
       </p:sp>
       <p:sp>
         <p:nvSpPr>
-          <p:cNvPr id="18" name="TextBox 17"/>
-          <p:cNvSpPr txBox="1"/>
-          <p:nvPr/>
-        </p:nvSpPr>
-        <p:spPr>
-          <a:xfrm>
-            <a:off x="1783080" y="4142231"/>
-            <a:ext cx="4754880" cy="676656"/>
+          <p:cNvPr id="19" name="TextBox 18"/>
+          <p:cNvSpPr txBox="1"/>
+          <p:nvPr/>
+        </p:nvSpPr>
+        <p:spPr>
+          <a:xfrm>
+            <a:off x="1737360" y="4078224"/>
+            <a:ext cx="3657600" cy="667512"/>
           </a:xfrm>
           <a:prstGeom prst="rect">
             <a:avLst/>
@@ -4659,11 +4663,11 @@
               </a:lnSpc>
             </a:pPr>
             <a:r>
-              <a:rPr sz="1600" b="1" i="0">
+              <a:rPr sz="1550" b="1" i="0">
                 <a:solidFill>
                   <a:srgbClr val="222222"/>
                 </a:solidFill>
-                <a:latin typeface="Arial"/>
+                <a:latin typeface="Calibri"/>
               </a:rPr>
               <a:t>Formats and resources</a:t>
             </a:r>
@@ -4672,14 +4676,14 @@
       </p:sp>
       <p:sp>
         <p:nvSpPr>
-          <p:cNvPr id="19" name="TextBox 18"/>
-          <p:cNvSpPr txBox="1"/>
-          <p:nvPr/>
-        </p:nvSpPr>
-        <p:spPr>
-          <a:xfrm>
-            <a:off x="6583680" y="4142231"/>
-            <a:ext cx="3657600" cy="676656"/>
+          <p:cNvPr id="20" name="TextBox 19"/>
+          <p:cNvSpPr txBox="1"/>
+          <p:nvPr/>
+        </p:nvSpPr>
+        <p:spPr>
+          <a:xfrm>
+            <a:off x="5486400" y="4078224"/>
+            <a:ext cx="2468880" cy="667512"/>
           </a:xfrm>
           <a:prstGeom prst="rect">
             <a:avLst/>
@@ -4698,11 +4702,11 @@
               </a:lnSpc>
             </a:pPr>
             <a:r>
-              <a:rPr sz="1200" b="0" i="0">
+              <a:rPr sz="1100" b="0" i="0">
                 <a:solidFill>
                   <a:srgbClr val="6E6E6E"/>
                 </a:solidFill>
-                <a:latin typeface="Arial"/>
+                <a:latin typeface="Calibri"/>
               </a:rPr>
               <a:t>How we reach and support founders</a:t>
             </a:r>
@@ -4711,14 +4715,14 @@
       </p:sp>
       <p:sp>
         <p:nvSpPr>
-          <p:cNvPr id="20" name="TextBox 19"/>
-          <p:cNvSpPr txBox="1"/>
-          <p:nvPr/>
-        </p:nvSpPr>
-        <p:spPr>
-          <a:xfrm>
-            <a:off x="10332720" y="4142231"/>
-            <a:ext cx="1097280" cy="676656"/>
+          <p:cNvPr id="21" name="TextBox 20"/>
+          <p:cNvSpPr txBox="1"/>
+          <p:nvPr/>
+        </p:nvSpPr>
+        <p:spPr>
+          <a:xfrm>
+            <a:off x="7955279" y="4078224"/>
+            <a:ext cx="640080" cy="667512"/>
           </a:xfrm>
           <a:prstGeom prst="rect">
             <a:avLst/>
@@ -4737,11 +4741,11 @@
               </a:lnSpc>
             </a:pPr>
             <a:r>
-              <a:rPr sz="1100" b="1" i="0">
-                <a:solidFill>
-                  <a:srgbClr val="B6267C"/>
-                </a:solidFill>
-                <a:latin typeface="Arial"/>
+              <a:rPr sz="1050" b="1" i="0">
+                <a:solidFill>
+                  <a:srgbClr val="E2007A"/>
+                </a:solidFill>
+                <a:latin typeface="Calibri"/>
               </a:rPr>
               <a:t>S. 05</a:t>
             </a:r>
@@ -4750,14 +4754,14 @@
       </p:sp>
       <p:sp>
         <p:nvSpPr>
-          <p:cNvPr id="21" name="Rectangle 20"/>
+          <p:cNvPr id="22" name="Rectangle 21"/>
           <p:cNvSpPr/>
           <p:nvPr/>
         </p:nvSpPr>
         <p:spPr>
           <a:xfrm>
-            <a:off x="777240" y="4800600"/>
-            <a:ext cx="10637215" cy="9144"/>
+            <a:off x="777240" y="4727448"/>
+            <a:ext cx="7818120" cy="9144"/>
           </a:xfrm>
           <a:prstGeom prst="rect">
             <a:avLst/>
@@ -4794,14 +4798,14 @@
       </p:sp>
       <p:sp>
         <p:nvSpPr>
-          <p:cNvPr id="22" name="TextBox 21"/>
-          <p:cNvSpPr txBox="1"/>
-          <p:nvPr/>
-        </p:nvSpPr>
-        <p:spPr>
-          <a:xfrm>
-            <a:off x="777240" y="4818888"/>
-            <a:ext cx="822960" cy="676656"/>
+          <p:cNvPr id="23" name="TextBox 22"/>
+          <p:cNvSpPr txBox="1"/>
+          <p:nvPr/>
+        </p:nvSpPr>
+        <p:spPr>
+          <a:xfrm>
+            <a:off x="777240" y="4745736"/>
+            <a:ext cx="822960" cy="667512"/>
           </a:xfrm>
           <a:prstGeom prst="rect">
             <a:avLst/>
@@ -4820,11 +4824,11 @@
               </a:lnSpc>
             </a:pPr>
             <a:r>
-              <a:rPr sz="2500" b="1" i="0">
-                <a:solidFill>
-                  <a:srgbClr val="B6267C"/>
-                </a:solidFill>
-                <a:latin typeface="Arial"/>
+              <a:rPr sz="2400" b="1" i="0">
+                <a:solidFill>
+                  <a:srgbClr val="E2007A"/>
+                </a:solidFill>
+                <a:latin typeface="Calibri"/>
               </a:rPr>
               <a:t>04</a:t>
             </a:r>
@@ -4833,14 +4837,14 @@
       </p:sp>
       <p:sp>
         <p:nvSpPr>
-          <p:cNvPr id="23" name="TextBox 22"/>
-          <p:cNvSpPr txBox="1"/>
-          <p:nvPr/>
-        </p:nvSpPr>
-        <p:spPr>
-          <a:xfrm>
-            <a:off x="1783080" y="4818888"/>
-            <a:ext cx="4754880" cy="676656"/>
+          <p:cNvPr id="24" name="TextBox 23"/>
+          <p:cNvSpPr txBox="1"/>
+          <p:nvPr/>
+        </p:nvSpPr>
+        <p:spPr>
+          <a:xfrm>
+            <a:off x="1737360" y="4745736"/>
+            <a:ext cx="3657600" cy="667512"/>
           </a:xfrm>
           <a:prstGeom prst="rect">
             <a:avLst/>
@@ -4859,11 +4863,11 @@
               </a:lnSpc>
             </a:pPr>
             <a:r>
-              <a:rPr sz="1600" b="1" i="0">
+              <a:rPr sz="1550" b="1" i="0">
                 <a:solidFill>
                   <a:srgbClr val="222222"/>
                 </a:solidFill>
-                <a:latin typeface="Arial"/>
+                <a:latin typeface="Calibri"/>
               </a:rPr>
               <a:t>Activities and KPIs</a:t>
             </a:r>
@@ -4872,14 +4876,14 @@
       </p:sp>
       <p:sp>
         <p:nvSpPr>
-          <p:cNvPr id="24" name="TextBox 23"/>
-          <p:cNvSpPr txBox="1"/>
-          <p:nvPr/>
-        </p:nvSpPr>
-        <p:spPr>
-          <a:xfrm>
-            <a:off x="6583680" y="4818888"/>
-            <a:ext cx="3657600" cy="676656"/>
+          <p:cNvPr id="25" name="TextBox 24"/>
+          <p:cNvSpPr txBox="1"/>
+          <p:nvPr/>
+        </p:nvSpPr>
+        <p:spPr>
+          <a:xfrm>
+            <a:off x="5486400" y="4745736"/>
+            <a:ext cx="2468880" cy="667512"/>
           </a:xfrm>
           <a:prstGeom prst="rect">
             <a:avLst/>
@@ -4898,11 +4902,11 @@
               </a:lnSpc>
             </a:pPr>
             <a:r>
-              <a:rPr sz="1200" b="0" i="0">
+              <a:rPr sz="1100" b="0" i="0">
                 <a:solidFill>
                   <a:srgbClr val="6E6E6E"/>
                 </a:solidFill>
-                <a:latin typeface="Arial"/>
+                <a:latin typeface="Calibri"/>
               </a:rPr>
               <a:t>The current term in figures</a:t>
             </a:r>
@@ -4911,14 +4915,14 @@
       </p:sp>
       <p:sp>
         <p:nvSpPr>
-          <p:cNvPr id="25" name="TextBox 24"/>
-          <p:cNvSpPr txBox="1"/>
-          <p:nvPr/>
-        </p:nvSpPr>
-        <p:spPr>
-          <a:xfrm>
-            <a:off x="10332720" y="4818888"/>
-            <a:ext cx="1097280" cy="676656"/>
+          <p:cNvPr id="26" name="TextBox 25"/>
+          <p:cNvSpPr txBox="1"/>
+          <p:nvPr/>
+        </p:nvSpPr>
+        <p:spPr>
+          <a:xfrm>
+            <a:off x="7955279" y="4745736"/>
+            <a:ext cx="640080" cy="667512"/>
           </a:xfrm>
           <a:prstGeom prst="rect">
             <a:avLst/>
@@ -4937,11 +4941,11 @@
               </a:lnSpc>
             </a:pPr>
             <a:r>
-              <a:rPr sz="1100" b="1" i="0">
-                <a:solidFill>
-                  <a:srgbClr val="B6267C"/>
-                </a:solidFill>
-                <a:latin typeface="Arial"/>
+              <a:rPr sz="1050" b="1" i="0">
+                <a:solidFill>
+                  <a:srgbClr val="E2007A"/>
+                </a:solidFill>
+                <a:latin typeface="Calibri"/>
               </a:rPr>
               <a:t>S. 06</a:t>
             </a:r>
@@ -4950,14 +4954,14 @@
       </p:sp>
       <p:sp>
         <p:nvSpPr>
-          <p:cNvPr id="26" name="Rectangle 25"/>
+          <p:cNvPr id="27" name="Rectangle 26"/>
           <p:cNvSpPr/>
           <p:nvPr/>
         </p:nvSpPr>
         <p:spPr>
           <a:xfrm>
-            <a:off x="777240" y="5477256"/>
-            <a:ext cx="10637215" cy="9144"/>
+            <a:off x="777240" y="5394960"/>
+            <a:ext cx="7818120" cy="9144"/>
           </a:xfrm>
           <a:prstGeom prst="rect">
             <a:avLst/>
@@ -4994,14 +4998,14 @@
       </p:sp>
       <p:sp>
         <p:nvSpPr>
-          <p:cNvPr id="27" name="TextBox 26"/>
-          <p:cNvSpPr txBox="1"/>
-          <p:nvPr/>
-        </p:nvSpPr>
-        <p:spPr>
-          <a:xfrm>
-            <a:off x="777240" y="5495544"/>
-            <a:ext cx="822960" cy="676656"/>
+          <p:cNvPr id="28" name="TextBox 27"/>
+          <p:cNvSpPr txBox="1"/>
+          <p:nvPr/>
+        </p:nvSpPr>
+        <p:spPr>
+          <a:xfrm>
+            <a:off x="777240" y="5413248"/>
+            <a:ext cx="822960" cy="667512"/>
           </a:xfrm>
           <a:prstGeom prst="rect">
             <a:avLst/>
@@ -5020,11 +5024,11 @@
               </a:lnSpc>
             </a:pPr>
             <a:r>
-              <a:rPr sz="2500" b="1" i="0">
-                <a:solidFill>
-                  <a:srgbClr val="B6267C"/>
-                </a:solidFill>
-                <a:latin typeface="Arial"/>
+              <a:rPr sz="2400" b="1" i="0">
+                <a:solidFill>
+                  <a:srgbClr val="E2007A"/>
+                </a:solidFill>
+                <a:latin typeface="Calibri"/>
               </a:rPr>
               <a:t>05</a:t>
             </a:r>
@@ -5033,14 +5037,14 @@
       </p:sp>
       <p:sp>
         <p:nvSpPr>
-          <p:cNvPr id="28" name="TextBox 27"/>
-          <p:cNvSpPr txBox="1"/>
-          <p:nvPr/>
-        </p:nvSpPr>
-        <p:spPr>
-          <a:xfrm>
-            <a:off x="1783080" y="5495544"/>
-            <a:ext cx="4754880" cy="676656"/>
+          <p:cNvPr id="29" name="TextBox 28"/>
+          <p:cNvSpPr txBox="1"/>
+          <p:nvPr/>
+        </p:nvSpPr>
+        <p:spPr>
+          <a:xfrm>
+            <a:off x="1737360" y="5413248"/>
+            <a:ext cx="3657600" cy="667512"/>
           </a:xfrm>
           <a:prstGeom prst="rect">
             <a:avLst/>
@@ -5059,11 +5063,11 @@
               </a:lnSpc>
             </a:pPr>
             <a:r>
-              <a:rPr sz="1600" b="1" i="0">
+              <a:rPr sz="1550" b="1" i="0">
                 <a:solidFill>
                   <a:srgbClr val="222222"/>
                 </a:solidFill>
-                <a:latin typeface="Arial"/>
+                <a:latin typeface="Calibri"/>
               </a:rPr>
               <a:t>What we need</a:t>
             </a:r>
@@ -5072,14 +5076,14 @@
       </p:sp>
       <p:sp>
         <p:nvSpPr>
-          <p:cNvPr id="29" name="TextBox 28"/>
-          <p:cNvSpPr txBox="1"/>
-          <p:nvPr/>
-        </p:nvSpPr>
-        <p:spPr>
-          <a:xfrm>
-            <a:off x="6583680" y="5495544"/>
-            <a:ext cx="3657600" cy="676656"/>
+          <p:cNvPr id="30" name="TextBox 29"/>
+          <p:cNvSpPr txBox="1"/>
+          <p:nvPr/>
+        </p:nvSpPr>
+        <p:spPr>
+          <a:xfrm>
+            <a:off x="5486400" y="5413248"/>
+            <a:ext cx="2468880" cy="667512"/>
           </a:xfrm>
           <a:prstGeom prst="rect">
             <a:avLst/>
@@ -5098,11 +5102,11 @@
               </a:lnSpc>
             </a:pPr>
             <a:r>
-              <a:rPr sz="1200" b="0" i="0">
+              <a:rPr sz="1100" b="0" i="0">
                 <a:solidFill>
                   <a:srgbClr val="6E6E6E"/>
                 </a:solidFill>
-                <a:latin typeface="Arial"/>
+                <a:latin typeface="Calibri"/>
               </a:rPr>
               <a:t>Call to action for the faculty</a:t>
             </a:r>
@@ -5111,14 +5115,14 @@
       </p:sp>
       <p:sp>
         <p:nvSpPr>
-          <p:cNvPr id="30" name="TextBox 29"/>
-          <p:cNvSpPr txBox="1"/>
-          <p:nvPr/>
-        </p:nvSpPr>
-        <p:spPr>
-          <a:xfrm>
-            <a:off x="10332720" y="5495544"/>
-            <a:ext cx="1097280" cy="676656"/>
+          <p:cNvPr id="31" name="TextBox 30"/>
+          <p:cNvSpPr txBox="1"/>
+          <p:nvPr/>
+        </p:nvSpPr>
+        <p:spPr>
+          <a:xfrm>
+            <a:off x="7955279" y="5413248"/>
+            <a:ext cx="640080" cy="667512"/>
           </a:xfrm>
           <a:prstGeom prst="rect">
             <a:avLst/>
@@ -5137,11 +5141,11 @@
               </a:lnSpc>
             </a:pPr>
             <a:r>
-              <a:rPr sz="1100" b="1" i="0">
-                <a:solidFill>
-                  <a:srgbClr val="B6267C"/>
-                </a:solidFill>
-                <a:latin typeface="Arial"/>
+              <a:rPr sz="1050" b="1" i="0">
+                <a:solidFill>
+                  <a:srgbClr val="E2007A"/>
+                </a:solidFill>
+                <a:latin typeface="Calibri"/>
               </a:rPr>
               <a:t>S. 07</a:t>
             </a:r>
@@ -5150,7 +5154,7 @@
       </p:sp>
       <p:sp>
         <p:nvSpPr>
-          <p:cNvPr id="31" name="Rectangle 30"/>
+          <p:cNvPr id="32" name="Rectangle 31"/>
           <p:cNvSpPr/>
           <p:nvPr/>
         </p:nvSpPr>
@@ -5194,7 +5198,7 @@
       </p:sp>
       <p:sp>
         <p:nvSpPr>
-          <p:cNvPr id="32" name="TextBox 31"/>
+          <p:cNvPr id="33" name="TextBox 32"/>
           <p:cNvSpPr txBox="1"/>
           <p:nvPr/>
         </p:nvSpPr>
@@ -5224,7 +5228,7 @@
                 <a:solidFill>
                   <a:srgbClr val="6E6E6E"/>
                 </a:solidFill>
-                <a:latin typeface="Arial"/>
+                <a:latin typeface="Calibri"/>
               </a:rPr>
               <a:t>THD · ZFE</a:t>
             </a:r>
@@ -5233,7 +5237,7 @@
       </p:sp>
       <p:sp>
         <p:nvSpPr>
-          <p:cNvPr id="33" name="TextBox 32"/>
+          <p:cNvPr id="34" name="TextBox 33"/>
           <p:cNvSpPr txBox="1"/>
           <p:nvPr/>
         </p:nvSpPr>
@@ -5261,9 +5265,9 @@
             <a:r>
               <a:rPr sz="850" b="1" i="0">
                 <a:solidFill>
-                  <a:srgbClr val="B6267C"/>
-                </a:solidFill>
-                <a:latin typeface="Arial"/>
+                  <a:srgbClr val="E2007A"/>
+                </a:solidFill>
+                <a:latin typeface="Calibri"/>
               </a:rPr>
               <a:t>02</a:t>
             </a:r>
@@ -5272,7 +5276,7 @@
                 <a:solidFill>
                   <a:srgbClr val="6E6E6E"/>
                 </a:solidFill>
-                <a:latin typeface="Arial"/>
+                <a:latin typeface="Calibri"/>
               </a:rPr>
               <a:t>  /  08</a:t>
             </a:r>
@@ -5350,13 +5354,13 @@
         <p:spPr>
           <a:xfrm>
             <a:off x="777240" y="640080"/>
-            <a:ext cx="1560697" cy="274320"/>
+            <a:ext cx="1509857" cy="274320"/>
           </a:xfrm>
           <a:prstGeom prst="rect">
             <a:avLst/>
           </a:prstGeom>
           <a:solidFill>
-            <a:srgbClr val="B6267C"/>
+            <a:srgbClr val="E2007A"/>
           </a:solidFill>
           <a:ln>
             <a:noFill/>
@@ -5394,7 +5398,7 @@
         <p:spPr>
           <a:xfrm>
             <a:off x="777240" y="640080"/>
-            <a:ext cx="1560697" cy="274320"/>
+            <a:ext cx="1509857" cy="274320"/>
           </a:xfrm>
           <a:prstGeom prst="rect">
             <a:avLst/>
@@ -5417,7 +5421,7 @@
                 <a:solidFill>
                   <a:srgbClr val="FFFFFF"/>
                 </a:solidFill>
-                <a:latin typeface="Arial"/>
+                <a:latin typeface="Calibri"/>
               </a:rPr>
               <a:t>01 · RESULTS</a:t>
             </a:r>
@@ -5456,16 +5460,16 @@
                 <a:solidFill>
                   <a:srgbClr val="222222"/>
                 </a:solidFill>
-                <a:latin typeface="Arial"/>
+                <a:latin typeface="Calibri"/>
               </a:rPr>
               <a:t>The teams </a:t>
             </a:r>
             <a:r>
               <a:rPr sz="3300" b="1" i="0">
                 <a:solidFill>
-                  <a:srgbClr val="B6267C"/>
-                </a:solidFill>
-                <a:latin typeface="Arial"/>
+                  <a:srgbClr val="E2007A"/>
+                </a:solidFill>
+                <a:latin typeface="Calibri"/>
               </a:rPr>
               <a:t>· Results</a:t>
             </a:r>
@@ -5493,7 +5497,7 @@
           </a:solidFill>
           <a:ln w="12700">
             <a:solidFill>
-              <a:srgbClr val="B6267C"/>
+              <a:srgbClr val="E2007A"/>
             </a:solidFill>
           </a:ln>
           <a:effectLst/>
@@ -5529,13 +5533,13 @@
         <p:spPr>
           <a:xfrm>
             <a:off x="978408" y="2441448"/>
-            <a:ext cx="751453" cy="274320"/>
+            <a:ext cx="741761" cy="274320"/>
           </a:xfrm>
           <a:prstGeom prst="rect">
             <a:avLst/>
           </a:prstGeom>
           <a:solidFill>
-            <a:srgbClr val="B6267C"/>
+            <a:srgbClr val="E2007A"/>
           </a:solidFill>
           <a:ln>
             <a:noFill/>
@@ -5573,7 +5577,7 @@
         <p:spPr>
           <a:xfrm>
             <a:off x="978408" y="2441448"/>
-            <a:ext cx="751453" cy="274320"/>
+            <a:ext cx="741761" cy="274320"/>
           </a:xfrm>
           <a:prstGeom prst="rect">
             <a:avLst/>
@@ -5596,7 +5600,7 @@
                 <a:solidFill>
                   <a:srgbClr val="FFFFFF"/>
                 </a:solidFill>
-                <a:latin typeface="Arial"/>
+                <a:latin typeface="Calibri"/>
               </a:rPr>
               <a:t>ACTIVE</a:t>
             </a:r>
@@ -5618,7 +5622,7 @@
             <a:avLst/>
           </a:prstGeom>
           <a:solidFill>
-            <a:srgbClr val="B6267C"/>
+            <a:srgbClr val="E2007A"/>
           </a:solidFill>
           <a:ln>
             <a:noFill/>
@@ -5679,7 +5683,7 @@
                 <a:solidFill>
                   <a:srgbClr val="FFFFFF"/>
                 </a:solidFill>
-                <a:latin typeface="Arial"/>
+                <a:latin typeface="Calibri"/>
               </a:rPr>
               <a:t>L</a:t>
             </a:r>
@@ -5718,7 +5722,7 @@
                 <a:solidFill>
                   <a:srgbClr val="222222"/>
                 </a:solidFill>
-                <a:latin typeface="Arial"/>
+                <a:latin typeface="Calibri"/>
               </a:rPr>
               <a:t>Lucas Barrios</a:t>
             </a:r>
@@ -5755,9 +5759,9 @@
             <a:r>
               <a:rPr sz="850" b="1" i="0" spc="80">
                 <a:solidFill>
-                  <a:srgbClr val="B6267C"/>
-                </a:solidFill>
-                <a:latin typeface="Arial"/>
+                  <a:srgbClr val="E2007A"/>
+                </a:solidFill>
+                <a:latin typeface="Calibri"/>
               </a:rPr>
               <a:t>DIGITAL HEALTH · BRAZIL</a:t>
             </a:r>
@@ -5796,7 +5800,7 @@
                 <a:solidFill>
                   <a:srgbClr val="6E6E6E"/>
                 </a:solidFill>
-                <a:latin typeface="Arial"/>
+                <a:latin typeface="Calibri"/>
               </a:rPr>
               <a:t>A prescription service for the Brazilian market.</a:t>
             </a:r>
@@ -5824,7 +5828,7 @@
           </a:solidFill>
           <a:ln w="12700">
             <a:solidFill>
-              <a:srgbClr val="B6267C"/>
+              <a:srgbClr val="E2007A"/>
             </a:solidFill>
           </a:ln>
           <a:effectLst/>
@@ -5860,13 +5864,13 @@
         <p:spPr>
           <a:xfrm>
             <a:off x="4599431" y="2441448"/>
-            <a:ext cx="751453" cy="274320"/>
+            <a:ext cx="741761" cy="274320"/>
           </a:xfrm>
           <a:prstGeom prst="rect">
             <a:avLst/>
           </a:prstGeom>
           <a:solidFill>
-            <a:srgbClr val="B6267C"/>
+            <a:srgbClr val="E2007A"/>
           </a:solidFill>
           <a:ln>
             <a:noFill/>
@@ -5904,7 +5908,7 @@
         <p:spPr>
           <a:xfrm>
             <a:off x="4599431" y="2441448"/>
-            <a:ext cx="751453" cy="274320"/>
+            <a:ext cx="741761" cy="274320"/>
           </a:xfrm>
           <a:prstGeom prst="rect">
             <a:avLst/>
@@ -5927,7 +5931,7 @@
                 <a:solidFill>
                   <a:srgbClr val="FFFFFF"/>
                 </a:solidFill>
-                <a:latin typeface="Arial"/>
+                <a:latin typeface="Calibri"/>
               </a:rPr>
               <a:t>ACTIVE</a:t>
             </a:r>
@@ -5949,7 +5953,7 @@
             <a:avLst/>
           </a:prstGeom>
           <a:solidFill>
-            <a:srgbClr val="B6267C"/>
+            <a:srgbClr val="E2007A"/>
           </a:solidFill>
           <a:ln>
             <a:noFill/>
@@ -6010,7 +6014,7 @@
                 <a:solidFill>
                   <a:srgbClr val="FFFFFF"/>
                 </a:solidFill>
-                <a:latin typeface="Arial"/>
+                <a:latin typeface="Calibri"/>
               </a:rPr>
               <a:t>K</a:t>
             </a:r>
@@ -6049,7 +6053,7 @@
                 <a:solidFill>
                   <a:srgbClr val="222222"/>
                 </a:solidFill>
-                <a:latin typeface="Arial"/>
+                <a:latin typeface="Calibri"/>
               </a:rPr>
               <a:t>Ksenia Vinogradova</a:t>
             </a:r>
@@ -6086,9 +6090,9 @@
             <a:r>
               <a:rPr sz="850" b="1" i="0" spc="80">
                 <a:solidFill>
-                  <a:srgbClr val="B6267C"/>
-                </a:solidFill>
-                <a:latin typeface="Arial"/>
+                  <a:srgbClr val="E2007A"/>
+                </a:solidFill>
+                <a:latin typeface="Calibri"/>
               </a:rPr>
               <a:t>ANIMAL HEALTH</a:t>
             </a:r>
@@ -6127,7 +6131,7 @@
                 <a:solidFill>
                   <a:srgbClr val="6E6E6E"/>
                 </a:solidFill>
-                <a:latin typeface="Arial"/>
+                <a:latin typeface="Calibri"/>
               </a:rPr>
               <a:t>An app to manage dental hygiene for horses, with a co-founder.</a:t>
             </a:r>
@@ -6155,7 +6159,7 @@
           </a:solidFill>
           <a:ln w="12700">
             <a:solidFill>
-              <a:srgbClr val="B6267C"/>
+              <a:srgbClr val="E2007A"/>
             </a:solidFill>
           </a:ln>
           <a:effectLst/>
@@ -6191,13 +6195,13 @@
         <p:spPr>
           <a:xfrm>
             <a:off x="8220456" y="2441448"/>
-            <a:ext cx="843168" cy="274320"/>
+            <a:ext cx="828812" cy="274320"/>
           </a:xfrm>
           <a:prstGeom prst="rect">
             <a:avLst/>
           </a:prstGeom>
           <a:solidFill>
-            <a:srgbClr val="B6267C"/>
+            <a:srgbClr val="E2007A"/>
           </a:solidFill>
           <a:ln>
             <a:noFill/>
@@ -6235,7 +6239,7 @@
         <p:spPr>
           <a:xfrm>
             <a:off x="8220456" y="2441448"/>
-            <a:ext cx="843168" cy="274320"/>
+            <a:ext cx="828812" cy="274320"/>
           </a:xfrm>
           <a:prstGeom prst="rect">
             <a:avLst/>
@@ -6258,7 +6262,7 @@
                 <a:solidFill>
                   <a:srgbClr val="FFFFFF"/>
                 </a:solidFill>
-                <a:latin typeface="Arial"/>
+                <a:latin typeface="Calibri"/>
               </a:rPr>
               <a:t>AT GREG</a:t>
             </a:r>
@@ -6280,7 +6284,7 @@
             <a:avLst/>
           </a:prstGeom>
           <a:solidFill>
-            <a:srgbClr val="B6267C"/>
+            <a:srgbClr val="E2007A"/>
           </a:solidFill>
           <a:ln>
             <a:noFill/>
@@ -6341,7 +6345,7 @@
                 <a:solidFill>
                   <a:srgbClr val="FFFFFF"/>
                 </a:solidFill>
-                <a:latin typeface="Arial"/>
+                <a:latin typeface="Calibri"/>
               </a:rPr>
               <a:t>I</a:t>
             </a:r>
@@ -6380,7 +6384,7 @@
                 <a:solidFill>
                   <a:srgbClr val="222222"/>
                 </a:solidFill>
-                <a:latin typeface="Arial"/>
+                <a:latin typeface="Calibri"/>
               </a:rPr>
               <a:t>Ibrahim Lawal</a:t>
             </a:r>
@@ -6417,9 +6421,9 @@
             <a:r>
               <a:rPr sz="850" b="1" i="0" spc="80">
                 <a:solidFill>
-                  <a:srgbClr val="B6267C"/>
-                </a:solidFill>
-                <a:latin typeface="Arial"/>
+                  <a:srgbClr val="E2007A"/>
+                </a:solidFill>
+                <a:latin typeface="Calibri"/>
               </a:rPr>
               <a:t>CULTURE CART</a:t>
             </a:r>
@@ -6458,7 +6462,7 @@
                 <a:solidFill>
                   <a:srgbClr val="6E6E6E"/>
                 </a:solidFill>
-                <a:latin typeface="Arial"/>
+                <a:latin typeface="Calibri"/>
               </a:rPr>
               <a:t>Founder of Culture Cart, based at the GreG Founding Center.</a:t>
             </a:r>
@@ -6486,7 +6490,7 @@
           </a:solidFill>
           <a:ln w="12700">
             <a:solidFill>
-              <a:srgbClr val="B6267C"/>
+              <a:srgbClr val="E2007A"/>
             </a:solidFill>
           </a:ln>
           <a:effectLst/>
@@ -6522,13 +6526,13 @@
         <p:spPr>
           <a:xfrm>
             <a:off x="978408" y="4453128"/>
-            <a:ext cx="751453" cy="274320"/>
+            <a:ext cx="741761" cy="274320"/>
           </a:xfrm>
           <a:prstGeom prst="rect">
             <a:avLst/>
           </a:prstGeom>
           <a:solidFill>
-            <a:srgbClr val="B6267C"/>
+            <a:srgbClr val="E2007A"/>
           </a:solidFill>
           <a:ln>
             <a:noFill/>
@@ -6566,7 +6570,7 @@
         <p:spPr>
           <a:xfrm>
             <a:off x="978408" y="4453128"/>
-            <a:ext cx="751453" cy="274320"/>
+            <a:ext cx="741761" cy="274320"/>
           </a:xfrm>
           <a:prstGeom prst="rect">
             <a:avLst/>
@@ -6589,7 +6593,7 @@
                 <a:solidFill>
                   <a:srgbClr val="FFFFFF"/>
                 </a:solidFill>
-                <a:latin typeface="Arial"/>
+                <a:latin typeface="Calibri"/>
               </a:rPr>
               <a:t>ACTIVE</a:t>
             </a:r>
@@ -6611,7 +6615,7 @@
             <a:avLst/>
           </a:prstGeom>
           <a:solidFill>
-            <a:srgbClr val="B6267C"/>
+            <a:srgbClr val="E2007A"/>
           </a:solidFill>
           <a:ln>
             <a:noFill/>
@@ -6672,7 +6676,7 @@
                 <a:solidFill>
                   <a:srgbClr val="FFFFFF"/>
                 </a:solidFill>
-                <a:latin typeface="Arial"/>
+                <a:latin typeface="Calibri"/>
               </a:rPr>
               <a:t>S</a:t>
             </a:r>
@@ -6711,7 +6715,7 @@
                 <a:solidFill>
                   <a:srgbClr val="222222"/>
                 </a:solidFill>
-                <a:latin typeface="Arial"/>
+                <a:latin typeface="Calibri"/>
               </a:rPr>
               <a:t>Samson Olawole</a:t>
             </a:r>
@@ -6748,9 +6752,9 @@
             <a:r>
               <a:rPr sz="850" b="1" i="0" spc="80">
                 <a:solidFill>
-                  <a:srgbClr val="B6267C"/>
-                </a:solidFill>
-                <a:latin typeface="Arial"/>
+                  <a:srgbClr val="E2007A"/>
+                </a:solidFill>
+                <a:latin typeface="Calibri"/>
               </a:rPr>
               <a:t>CCD SUITE · B2B SAAS</a:t>
             </a:r>
@@ -6789,7 +6793,7 @@
                 <a:solidFill>
                   <a:srgbClr val="6E6E6E"/>
                 </a:solidFill>
-                <a:latin typeface="Arial"/>
+                <a:latin typeface="Calibri"/>
               </a:rPr>
               <a:t>AI business management platform for modern agencies, nine integrated modules from CRM to finance.</a:t>
             </a:r>
@@ -6817,7 +6821,7 @@
           </a:solidFill>
           <a:ln w="12700">
             <a:solidFill>
-              <a:srgbClr val="B6267C"/>
+              <a:srgbClr val="E2007A"/>
             </a:solidFill>
           </a:ln>
           <a:effectLst/>
@@ -6853,13 +6857,13 @@
         <p:spPr>
           <a:xfrm>
             <a:off x="4599431" y="4453128"/>
-            <a:ext cx="751453" cy="274320"/>
+            <a:ext cx="741761" cy="274320"/>
           </a:xfrm>
           <a:prstGeom prst="rect">
             <a:avLst/>
           </a:prstGeom>
           <a:solidFill>
-            <a:srgbClr val="B6267C"/>
+            <a:srgbClr val="E2007A"/>
           </a:solidFill>
           <a:ln>
             <a:noFill/>
@@ -6897,7 +6901,7 @@
         <p:spPr>
           <a:xfrm>
             <a:off x="4599431" y="4453128"/>
-            <a:ext cx="751453" cy="274320"/>
+            <a:ext cx="741761" cy="274320"/>
           </a:xfrm>
           <a:prstGeom prst="rect">
             <a:avLst/>
@@ -6920,7 +6924,7 @@
                 <a:solidFill>
                   <a:srgbClr val="FFFFFF"/>
                 </a:solidFill>
-                <a:latin typeface="Arial"/>
+                <a:latin typeface="Calibri"/>
               </a:rPr>
               <a:t>ACTIVE</a:t>
             </a:r>
@@ -6942,7 +6946,7 @@
             <a:avLst/>
           </a:prstGeom>
           <a:solidFill>
-            <a:srgbClr val="B6267C"/>
+            <a:srgbClr val="E2007A"/>
           </a:solidFill>
           <a:ln>
             <a:noFill/>
@@ -7003,7 +7007,7 @@
                 <a:solidFill>
                   <a:srgbClr val="FFFFFF"/>
                 </a:solidFill>
-                <a:latin typeface="Arial"/>
+                <a:latin typeface="Calibri"/>
               </a:rPr>
               <a:t>H</a:t>
             </a:r>
@@ -7042,7 +7046,7 @@
                 <a:solidFill>
                   <a:srgbClr val="222222"/>
                 </a:solidFill>
-                <a:latin typeface="Arial"/>
+                <a:latin typeface="Calibri"/>
               </a:rPr>
               <a:t>Hazel D'couto</a:t>
             </a:r>
@@ -7079,9 +7083,9 @@
             <a:r>
               <a:rPr sz="850" b="1" i="0" spc="80">
                 <a:solidFill>
-                  <a:srgbClr val="B6267C"/>
-                </a:solidFill>
-                <a:latin typeface="Arial"/>
+                  <a:srgbClr val="E2007A"/>
+                </a:solidFill>
+                <a:latin typeface="Calibri"/>
               </a:rPr>
               <a:t>GESVIA · DIGITAL HEALTH</a:t>
             </a:r>
@@ -7120,7 +7124,7 @@
                 <a:solidFill>
                   <a:srgbClr val="6E6E6E"/>
                 </a:solidFill>
-                <a:latin typeface="Arial"/>
+                <a:latin typeface="Calibri"/>
               </a:rPr>
               <a:t>A digital health platform that turns complicated hospital forms into simple, engaging experiences for patients.</a:t>
             </a:r>
@@ -7144,11 +7148,11 @@
             </a:avLst>
           </a:prstGeom>
           <a:solidFill>
-            <a:srgbClr val="F7E6EF"/>
+            <a:srgbClr val="FBEAF2"/>
           </a:solidFill>
           <a:ln w="12700">
             <a:solidFill>
-              <a:srgbClr val="B6267C"/>
+              <a:srgbClr val="E2007A"/>
             </a:solidFill>
           </a:ln>
           <a:effectLst/>
@@ -7184,13 +7188,13 @@
         <p:spPr>
           <a:xfrm>
             <a:off x="8220456" y="4453128"/>
-            <a:ext cx="1576882" cy="274320"/>
+            <a:ext cx="1525219" cy="274320"/>
           </a:xfrm>
           <a:prstGeom prst="rect">
             <a:avLst/>
           </a:prstGeom>
           <a:solidFill>
-            <a:srgbClr val="B6267C"/>
+            <a:srgbClr val="E2007A"/>
           </a:solidFill>
           <a:ln>
             <a:noFill/>
@@ -7228,7 +7232,7 @@
         <p:spPr>
           <a:xfrm>
             <a:off x="8220456" y="4453128"/>
-            <a:ext cx="1576882" cy="274320"/>
+            <a:ext cx="1525219" cy="274320"/>
           </a:xfrm>
           <a:prstGeom prst="rect">
             <a:avLst/>
@@ -7251,7 +7255,7 @@
                 <a:solidFill>
                   <a:srgbClr val="FFFFFF"/>
                 </a:solidFill>
-                <a:latin typeface="Arial"/>
+                <a:latin typeface="Calibri"/>
               </a:rPr>
               <a:t>IN THE PIPELINE</a:t>
             </a:r>
@@ -7273,7 +7277,7 @@
             <a:avLst/>
           </a:prstGeom>
           <a:solidFill>
-            <a:srgbClr val="B6267C"/>
+            <a:srgbClr val="E2007A"/>
           </a:solidFill>
           <a:ln>
             <a:noFill/>
@@ -7334,7 +7338,7 @@
                 <a:solidFill>
                   <a:srgbClr val="FFFFFF"/>
                 </a:solidFill>
-                <a:latin typeface="Arial"/>
+                <a:latin typeface="Calibri"/>
               </a:rPr>
               <a:t>+</a:t>
             </a:r>
@@ -7373,7 +7377,7 @@
                 <a:solidFill>
                   <a:srgbClr val="222222"/>
                 </a:solidFill>
-                <a:latin typeface="Arial"/>
+                <a:latin typeface="Calibri"/>
               </a:rPr>
               <a:t>More teams to add</a:t>
             </a:r>
@@ -7410,9 +7414,9 @@
             <a:r>
               <a:rPr sz="850" b="1" i="0" spc="80">
                 <a:solidFill>
-                  <a:srgbClr val="B6267C"/>
-                </a:solidFill>
-                <a:latin typeface="Arial"/>
+                  <a:srgbClr val="E2007A"/>
+                </a:solidFill>
+                <a:latin typeface="Calibri"/>
               </a:rPr>
               <a:t>TO BE CONFIRMED</a:t>
             </a:r>
@@ -7451,7 +7455,7 @@
                 <a:solidFill>
                   <a:srgbClr val="6E6E6E"/>
                 </a:solidFill>
-                <a:latin typeface="Arial"/>
+                <a:latin typeface="Calibri"/>
               </a:rPr>
               <a:t>Further active teams to be confirmed before the board meeting.</a:t>
             </a:r>
@@ -7534,7 +7538,7 @@
                 <a:solidFill>
                   <a:srgbClr val="6E6E6E"/>
                 </a:solidFill>
-                <a:latin typeface="Arial"/>
+                <a:latin typeface="Calibri"/>
               </a:rPr>
               <a:t>THD · ZFE</a:t>
             </a:r>
@@ -7571,9 +7575,9 @@
             <a:r>
               <a:rPr sz="850" b="1" i="0">
                 <a:solidFill>
-                  <a:srgbClr val="B6267C"/>
-                </a:solidFill>
-                <a:latin typeface="Arial"/>
+                  <a:srgbClr val="E2007A"/>
+                </a:solidFill>
+                <a:latin typeface="Calibri"/>
               </a:rPr>
               <a:t>03</a:t>
             </a:r>
@@ -7582,7 +7586,7 @@
                 <a:solidFill>
                   <a:srgbClr val="6E6E6E"/>
                 </a:solidFill>
-                <a:latin typeface="Arial"/>
+                <a:latin typeface="Calibri"/>
               </a:rPr>
               <a:t>  /  08</a:t>
             </a:r>
@@ -7660,13 +7664,13 @@
         <p:spPr>
           <a:xfrm>
             <a:off x="777240" y="640080"/>
-            <a:ext cx="1560697" cy="274320"/>
+            <a:ext cx="1509857" cy="274320"/>
           </a:xfrm>
           <a:prstGeom prst="rect">
             <a:avLst/>
           </a:prstGeom>
           <a:solidFill>
-            <a:srgbClr val="B6267C"/>
+            <a:srgbClr val="E2007A"/>
           </a:solidFill>
           <a:ln>
             <a:noFill/>
@@ -7704,7 +7708,7 @@
         <p:spPr>
           <a:xfrm>
             <a:off x="777240" y="640080"/>
-            <a:ext cx="1560697" cy="274320"/>
+            <a:ext cx="1509857" cy="274320"/>
           </a:xfrm>
           <a:prstGeom prst="rect">
             <a:avLst/>
@@ -7727,7 +7731,7 @@
                 <a:solidFill>
                   <a:srgbClr val="FFFFFF"/>
                 </a:solidFill>
-                <a:latin typeface="Arial"/>
+                <a:latin typeface="Calibri"/>
               </a:rPr>
               <a:t>02 · NETWORK</a:t>
             </a:r>
@@ -7743,7 +7747,7 @@
         <p:spPr>
           <a:xfrm>
             <a:off x="758952" y="1078992"/>
-            <a:ext cx="10058400" cy="1097280"/>
+            <a:ext cx="7315200" cy="1097280"/>
           </a:xfrm>
           <a:prstGeom prst="rect">
             <a:avLst/>
@@ -7766,32 +7770,56 @@
                 <a:solidFill>
                   <a:srgbClr val="222222"/>
                 </a:solidFill>
-                <a:latin typeface="Arial"/>
+                <a:latin typeface="Calibri"/>
               </a:rPr>
               <a:t>The founder </a:t>
             </a:r>
             <a:r>
               <a:rPr sz="3300" b="1" i="0">
                 <a:solidFill>
-                  <a:srgbClr val="B6267C"/>
-                </a:solidFill>
-                <a:latin typeface="Arial"/>
+                  <a:srgbClr val="E2007A"/>
+                </a:solidFill>
+                <a:latin typeface="Calibri"/>
               </a:rPr>
               <a:t>· network</a:t>
             </a:r>
           </a:p>
         </p:txBody>
       </p:sp>
-      <p:sp>
-        <p:nvSpPr>
-          <p:cNvPr id="6" name="TextBox 5"/>
+      <p:pic>
+        <p:nvPicPr>
+          <p:cNvPr id="6" name="Picture 5" descr="net_photo.png"/>
+          <p:cNvPicPr>
+            <a:picLocks noChangeAspect="1"/>
+          </p:cNvPicPr>
+          <p:nvPr/>
+        </p:nvPicPr>
+        <p:blipFill>
+          <a:blip r:embed="rId2"/>
+          <a:stretch>
+            <a:fillRect/>
+          </a:stretch>
+        </p:blipFill>
+        <p:spPr>
+          <a:xfrm>
+            <a:off x="8549640" y="1371600"/>
+            <a:ext cx="2862072" cy="4480560"/>
+          </a:xfrm>
+          <a:prstGeom prst="rect">
+            <a:avLst/>
+          </a:prstGeom>
+        </p:spPr>
+      </p:pic>
+      <p:sp>
+        <p:nvSpPr>
+          <p:cNvPr id="7" name="TextBox 6"/>
           <p:cNvSpPr txBox="1"/>
           <p:nvPr/>
         </p:nvSpPr>
         <p:spPr>
           <a:xfrm>
             <a:off x="777240" y="1965960"/>
-            <a:ext cx="8686800" cy="640080"/>
+            <a:ext cx="7223760" cy="731520"/>
           </a:xfrm>
           <a:prstGeom prst="rect">
             <a:avLst/>
@@ -7814,7 +7842,7 @@
                 <a:solidFill>
                   <a:srgbClr val="6E6E6E"/>
                 </a:solidFill>
-                <a:latin typeface="Arial"/>
+                <a:latin typeface="Calibri"/>
               </a:rPr>
               <a:t>ECRI founders are part of a growing matching network. Students with ideas, talent looking to join a team, and mentors find each other in one place.</a:t>
             </a:r>
@@ -7823,18 +7851,18 @@
       </p:sp>
       <p:sp>
         <p:nvSpPr>
-          <p:cNvPr id="7" name="Rounded Rectangle 6"/>
+          <p:cNvPr id="8" name="Rounded Rectangle 7"/>
           <p:cNvSpPr/>
           <p:nvPr/>
         </p:nvSpPr>
         <p:spPr>
           <a:xfrm>
-            <a:off x="777240" y="3063240"/>
-            <a:ext cx="3456432" cy="2468880"/>
+            <a:off x="777240" y="3017520"/>
+            <a:ext cx="7360920" cy="914400"/>
           </a:xfrm>
           <a:prstGeom prst="roundRect">
             <a:avLst>
-              <a:gd name="adj" fmla="val 5000"/>
+              <a:gd name="adj" fmla="val 12000"/>
             </a:avLst>
           </a:prstGeom>
           <a:solidFill>
@@ -7842,7 +7870,7 @@
           </a:solidFill>
           <a:ln w="12700">
             <a:solidFill>
-              <a:srgbClr val="B6267C"/>
+              <a:srgbClr val="E2007A"/>
             </a:solidFill>
           </a:ln>
           <a:effectLst/>
@@ -7871,20 +7899,20 @@
       </p:sp>
       <p:sp>
         <p:nvSpPr>
-          <p:cNvPr id="8" name="Oval 7"/>
+          <p:cNvPr id="9" name="Oval 8"/>
           <p:cNvSpPr/>
           <p:nvPr/>
         </p:nvSpPr>
         <p:spPr>
           <a:xfrm>
-            <a:off x="1051560" y="3383280"/>
+            <a:off x="1051560" y="3319272"/>
             <a:ext cx="310896" cy="310896"/>
           </a:xfrm>
           <a:prstGeom prst="ellipse">
             <a:avLst/>
           </a:prstGeom>
           <a:solidFill>
-            <a:srgbClr val="B6267C"/>
+            <a:srgbClr val="E2007A"/>
           </a:solidFill>
           <a:ln>
             <a:noFill/>
@@ -7915,22 +7943,22 @@
       </p:sp>
       <p:sp>
         <p:nvSpPr>
-          <p:cNvPr id="9" name="TextBox 8"/>
-          <p:cNvSpPr txBox="1"/>
-          <p:nvPr/>
-        </p:nvSpPr>
-        <p:spPr>
-          <a:xfrm>
-            <a:off x="1051560" y="3931920"/>
-            <a:ext cx="2907791" cy="640080"/>
-          </a:xfrm>
-          <a:prstGeom prst="rect">
-            <a:avLst/>
-          </a:prstGeom>
-          <a:noFill/>
-        </p:spPr>
-        <p:txBody>
-          <a:bodyPr wrap="square" anchor="t" lIns="0" rIns="0" tIns="0" bIns="0">
+          <p:cNvPr id="10" name="TextBox 9"/>
+          <p:cNvSpPr txBox="1"/>
+          <p:nvPr/>
+        </p:nvSpPr>
+        <p:spPr>
+          <a:xfrm>
+            <a:off x="1554480" y="3172968"/>
+            <a:ext cx="3108960" cy="640080"/>
+          </a:xfrm>
+          <a:prstGeom prst="rect">
+            <a:avLst/>
+          </a:prstGeom>
+          <a:noFill/>
+        </p:spPr>
+        <p:txBody>
+          <a:bodyPr wrap="square" anchor="ctr" lIns="0" rIns="0" tIns="0" bIns="0">
             <a:noAutofit/>
           </a:bodyPr>
           <a:lstStyle/>
@@ -7941,11 +7969,11 @@
               </a:lnSpc>
             </a:pPr>
             <a:r>
-              <a:rPr sz="1500" b="1" i="0">
+              <a:rPr sz="1400" b="1" i="0">
                 <a:solidFill>
                   <a:srgbClr val="222222"/>
                 </a:solidFill>
-                <a:latin typeface="Arial"/>
+                <a:latin typeface="Calibri"/>
               </a:rPr>
               <a:t>FOUNDERS WITH IDEAS</a:t>
             </a:r>
@@ -7954,37 +7982,37 @@
       </p:sp>
       <p:sp>
         <p:nvSpPr>
-          <p:cNvPr id="10" name="TextBox 9"/>
-          <p:cNvSpPr txBox="1"/>
-          <p:nvPr/>
-        </p:nvSpPr>
-        <p:spPr>
-          <a:xfrm>
-            <a:off x="1051560" y="4617720"/>
-            <a:ext cx="2907791" cy="731520"/>
-          </a:xfrm>
-          <a:prstGeom prst="rect">
-            <a:avLst/>
-          </a:prstGeom>
-          <a:noFill/>
-        </p:spPr>
-        <p:txBody>
-          <a:bodyPr wrap="square" anchor="t" lIns="0" rIns="0" tIns="0" bIns="0">
+          <p:cNvPr id="11" name="TextBox 10"/>
+          <p:cNvSpPr txBox="1"/>
+          <p:nvPr/>
+        </p:nvSpPr>
+        <p:spPr>
+          <a:xfrm>
+            <a:off x="4754880" y="3172968"/>
+            <a:ext cx="3200400" cy="640080"/>
+          </a:xfrm>
+          <a:prstGeom prst="rect">
+            <a:avLst/>
+          </a:prstGeom>
+          <a:noFill/>
+        </p:spPr>
+        <p:txBody>
+          <a:bodyPr wrap="square" anchor="ctr" lIns="0" rIns="0" tIns="0" bIns="0">
             <a:noAutofit/>
           </a:bodyPr>
           <a:lstStyle/>
           <a:p>
             <a:pPr algn="l">
               <a:lnSpc>
-                <a:spcPct val="125000"/>
-              </a:lnSpc>
-            </a:pPr>
-            <a:r>
-              <a:rPr sz="1150" b="0" i="0">
+                <a:spcPct val="115000"/>
+              </a:lnSpc>
+            </a:pPr>
+            <a:r>
+              <a:rPr sz="1100" b="0" i="0">
                 <a:solidFill>
                   <a:srgbClr val="6E6E6E"/>
                 </a:solidFill>
-                <a:latin typeface="Arial"/>
+                <a:latin typeface="Calibri"/>
               </a:rPr>
               <a:t>Students bringing a startup concept and looking for a team.</a:t>
             </a:r>
@@ -7993,18 +8021,18 @@
       </p:sp>
       <p:sp>
         <p:nvSpPr>
-          <p:cNvPr id="11" name="Rounded Rectangle 10"/>
+          <p:cNvPr id="12" name="Rounded Rectangle 11"/>
           <p:cNvSpPr/>
           <p:nvPr/>
         </p:nvSpPr>
         <p:spPr>
           <a:xfrm>
-            <a:off x="4407407" y="3063240"/>
-            <a:ext cx="3456432" cy="2468880"/>
+            <a:off x="777240" y="4069079"/>
+            <a:ext cx="7360920" cy="914400"/>
           </a:xfrm>
           <a:prstGeom prst="roundRect">
             <a:avLst>
-              <a:gd name="adj" fmla="val 5000"/>
+              <a:gd name="adj" fmla="val 12000"/>
             </a:avLst>
           </a:prstGeom>
           <a:solidFill>
@@ -8012,7 +8040,7 @@
           </a:solidFill>
           <a:ln w="12700">
             <a:solidFill>
-              <a:srgbClr val="B6267C"/>
+              <a:srgbClr val="E2007A"/>
             </a:solidFill>
           </a:ln>
           <a:effectLst/>
@@ -8041,20 +8069,20 @@
       </p:sp>
       <p:sp>
         <p:nvSpPr>
-          <p:cNvPr id="12" name="Oval 11"/>
+          <p:cNvPr id="13" name="Oval 12"/>
           <p:cNvSpPr/>
           <p:nvPr/>
         </p:nvSpPr>
         <p:spPr>
           <a:xfrm>
-            <a:off x="4681727" y="3383280"/>
+            <a:off x="1051560" y="4370831"/>
             <a:ext cx="310896" cy="310896"/>
           </a:xfrm>
           <a:prstGeom prst="ellipse">
             <a:avLst/>
           </a:prstGeom>
           <a:solidFill>
-            <a:srgbClr val="B6267C"/>
+            <a:srgbClr val="E2007A"/>
           </a:solidFill>
           <a:ln>
             <a:noFill/>
@@ -8085,22 +8113,22 @@
       </p:sp>
       <p:sp>
         <p:nvSpPr>
-          <p:cNvPr id="13" name="TextBox 12"/>
-          <p:cNvSpPr txBox="1"/>
-          <p:nvPr/>
-        </p:nvSpPr>
-        <p:spPr>
-          <a:xfrm>
-            <a:off x="4681727" y="3931920"/>
-            <a:ext cx="2907791" cy="640080"/>
-          </a:xfrm>
-          <a:prstGeom prst="rect">
-            <a:avLst/>
-          </a:prstGeom>
-          <a:noFill/>
-        </p:spPr>
-        <p:txBody>
-          <a:bodyPr wrap="square" anchor="t" lIns="0" rIns="0" tIns="0" bIns="0">
+          <p:cNvPr id="14" name="TextBox 13"/>
+          <p:cNvSpPr txBox="1"/>
+          <p:nvPr/>
+        </p:nvSpPr>
+        <p:spPr>
+          <a:xfrm>
+            <a:off x="1554480" y="4224527"/>
+            <a:ext cx="3108960" cy="640080"/>
+          </a:xfrm>
+          <a:prstGeom prst="rect">
+            <a:avLst/>
+          </a:prstGeom>
+          <a:noFill/>
+        </p:spPr>
+        <p:txBody>
+          <a:bodyPr wrap="square" anchor="ctr" lIns="0" rIns="0" tIns="0" bIns="0">
             <a:noAutofit/>
           </a:bodyPr>
           <a:lstStyle/>
@@ -8111,11 +8139,11 @@
               </a:lnSpc>
             </a:pPr>
             <a:r>
-              <a:rPr sz="1500" b="1" i="0">
+              <a:rPr sz="1400" b="1" i="0">
                 <a:solidFill>
                   <a:srgbClr val="222222"/>
                 </a:solidFill>
-                <a:latin typeface="Arial"/>
+                <a:latin typeface="Calibri"/>
               </a:rPr>
               <a:t>TALENT LOOKING TO JOIN</a:t>
             </a:r>
@@ -8124,37 +8152,37 @@
       </p:sp>
       <p:sp>
         <p:nvSpPr>
-          <p:cNvPr id="14" name="TextBox 13"/>
-          <p:cNvSpPr txBox="1"/>
-          <p:nvPr/>
-        </p:nvSpPr>
-        <p:spPr>
-          <a:xfrm>
-            <a:off x="4681727" y="4617720"/>
-            <a:ext cx="2907791" cy="731520"/>
-          </a:xfrm>
-          <a:prstGeom prst="rect">
-            <a:avLst/>
-          </a:prstGeom>
-          <a:noFill/>
-        </p:spPr>
-        <p:txBody>
-          <a:bodyPr wrap="square" anchor="t" lIns="0" rIns="0" tIns="0" bIns="0">
+          <p:cNvPr id="15" name="TextBox 14"/>
+          <p:cNvSpPr txBox="1"/>
+          <p:nvPr/>
+        </p:nvSpPr>
+        <p:spPr>
+          <a:xfrm>
+            <a:off x="4754880" y="4224527"/>
+            <a:ext cx="3200400" cy="640080"/>
+          </a:xfrm>
+          <a:prstGeom prst="rect">
+            <a:avLst/>
+          </a:prstGeom>
+          <a:noFill/>
+        </p:spPr>
+        <p:txBody>
+          <a:bodyPr wrap="square" anchor="ctr" lIns="0" rIns="0" tIns="0" bIns="0">
             <a:noAutofit/>
           </a:bodyPr>
           <a:lstStyle/>
           <a:p>
             <a:pPr algn="l">
               <a:lnSpc>
-                <a:spcPct val="125000"/>
-              </a:lnSpc>
-            </a:pPr>
-            <a:r>
-              <a:rPr sz="1150" b="0" i="0">
+                <a:spcPct val="115000"/>
+              </a:lnSpc>
+            </a:pPr>
+            <a:r>
+              <a:rPr sz="1100" b="0" i="0">
                 <a:solidFill>
                   <a:srgbClr val="6E6E6E"/>
                 </a:solidFill>
-                <a:latin typeface="Arial"/>
+                <a:latin typeface="Calibri"/>
               </a:rPr>
               <a:t>Skilled students who want to join an existing startup.</a:t>
             </a:r>
@@ -8163,18 +8191,18 @@
       </p:sp>
       <p:sp>
         <p:nvSpPr>
-          <p:cNvPr id="15" name="Rounded Rectangle 14"/>
+          <p:cNvPr id="16" name="Rounded Rectangle 15"/>
           <p:cNvSpPr/>
           <p:nvPr/>
         </p:nvSpPr>
         <p:spPr>
           <a:xfrm>
-            <a:off x="8037575" y="3063240"/>
-            <a:ext cx="3456432" cy="2468880"/>
+            <a:off x="777240" y="5120640"/>
+            <a:ext cx="7360920" cy="914400"/>
           </a:xfrm>
           <a:prstGeom prst="roundRect">
             <a:avLst>
-              <a:gd name="adj" fmla="val 5000"/>
+              <a:gd name="adj" fmla="val 12000"/>
             </a:avLst>
           </a:prstGeom>
           <a:solidFill>
@@ -8182,7 +8210,7 @@
           </a:solidFill>
           <a:ln w="12700">
             <a:solidFill>
-              <a:srgbClr val="B6267C"/>
+              <a:srgbClr val="E2007A"/>
             </a:solidFill>
           </a:ln>
           <a:effectLst/>
@@ -8211,20 +8239,20 @@
       </p:sp>
       <p:sp>
         <p:nvSpPr>
-          <p:cNvPr id="16" name="Oval 15"/>
+          <p:cNvPr id="17" name="Oval 16"/>
           <p:cNvSpPr/>
           <p:nvPr/>
         </p:nvSpPr>
         <p:spPr>
           <a:xfrm>
-            <a:off x="8311896" y="3383280"/>
+            <a:off x="1051560" y="5422392"/>
             <a:ext cx="310896" cy="310896"/>
           </a:xfrm>
           <a:prstGeom prst="ellipse">
             <a:avLst/>
           </a:prstGeom>
           <a:solidFill>
-            <a:srgbClr val="B6267C"/>
+            <a:srgbClr val="E2007A"/>
           </a:solidFill>
           <a:ln>
             <a:noFill/>
@@ -8255,22 +8283,22 @@
       </p:sp>
       <p:sp>
         <p:nvSpPr>
-          <p:cNvPr id="17" name="TextBox 16"/>
-          <p:cNvSpPr txBox="1"/>
-          <p:nvPr/>
-        </p:nvSpPr>
-        <p:spPr>
-          <a:xfrm>
-            <a:off x="8311896" y="3931920"/>
-            <a:ext cx="2907791" cy="640080"/>
-          </a:xfrm>
-          <a:prstGeom prst="rect">
-            <a:avLst/>
-          </a:prstGeom>
-          <a:noFill/>
-        </p:spPr>
-        <p:txBody>
-          <a:bodyPr wrap="square" anchor="t" lIns="0" rIns="0" tIns="0" bIns="0">
+          <p:cNvPr id="18" name="TextBox 17"/>
+          <p:cNvSpPr txBox="1"/>
+          <p:nvPr/>
+        </p:nvSpPr>
+        <p:spPr>
+          <a:xfrm>
+            <a:off x="1554480" y="5276088"/>
+            <a:ext cx="3108960" cy="640080"/>
+          </a:xfrm>
+          <a:prstGeom prst="rect">
+            <a:avLst/>
+          </a:prstGeom>
+          <a:noFill/>
+        </p:spPr>
+        <p:txBody>
+          <a:bodyPr wrap="square" anchor="ctr" lIns="0" rIns="0" tIns="0" bIns="0">
             <a:noAutofit/>
           </a:bodyPr>
           <a:lstStyle/>
@@ -8281,11 +8309,11 @@
               </a:lnSpc>
             </a:pPr>
             <a:r>
-              <a:rPr sz="1500" b="1" i="0">
+              <a:rPr sz="1400" b="1" i="0">
                 <a:solidFill>
                   <a:srgbClr val="222222"/>
                 </a:solidFill>
-                <a:latin typeface="Arial"/>
+                <a:latin typeface="Calibri"/>
               </a:rPr>
               <a:t>MENTORS</a:t>
             </a:r>
@@ -8294,37 +8322,37 @@
       </p:sp>
       <p:sp>
         <p:nvSpPr>
-          <p:cNvPr id="18" name="TextBox 17"/>
-          <p:cNvSpPr txBox="1"/>
-          <p:nvPr/>
-        </p:nvSpPr>
-        <p:spPr>
-          <a:xfrm>
-            <a:off x="8311896" y="4617720"/>
-            <a:ext cx="2907791" cy="731520"/>
-          </a:xfrm>
-          <a:prstGeom prst="rect">
-            <a:avLst/>
-          </a:prstGeom>
-          <a:noFill/>
-        </p:spPr>
-        <p:txBody>
-          <a:bodyPr wrap="square" anchor="t" lIns="0" rIns="0" tIns="0" bIns="0">
+          <p:cNvPr id="19" name="TextBox 18"/>
+          <p:cNvSpPr txBox="1"/>
+          <p:nvPr/>
+        </p:nvSpPr>
+        <p:spPr>
+          <a:xfrm>
+            <a:off x="4754880" y="5276088"/>
+            <a:ext cx="3200400" cy="640080"/>
+          </a:xfrm>
+          <a:prstGeom prst="rect">
+            <a:avLst/>
+          </a:prstGeom>
+          <a:noFill/>
+        </p:spPr>
+        <p:txBody>
+          <a:bodyPr wrap="square" anchor="ctr" lIns="0" rIns="0" tIns="0" bIns="0">
             <a:noAutofit/>
           </a:bodyPr>
           <a:lstStyle/>
           <a:p>
             <a:pPr algn="l">
               <a:lnSpc>
-                <a:spcPct val="125000"/>
-              </a:lnSpc>
-            </a:pPr>
-            <a:r>
-              <a:rPr sz="1150" b="0" i="0">
+                <a:spcPct val="115000"/>
+              </a:lnSpc>
+            </a:pPr>
+            <a:r>
+              <a:rPr sz="1100" b="0" i="0">
                 <a:solidFill>
                   <a:srgbClr val="6E6E6E"/>
                 </a:solidFill>
-                <a:latin typeface="Arial"/>
+                <a:latin typeface="Calibri"/>
               </a:rPr>
               <a:t>Experienced advisors supporting the teams as they grow.</a:t>
             </a:r>
@@ -8333,7 +8361,7 @@
       </p:sp>
       <p:sp>
         <p:nvSpPr>
-          <p:cNvPr id="19" name="Rectangle 18"/>
+          <p:cNvPr id="20" name="Rectangle 19"/>
           <p:cNvSpPr/>
           <p:nvPr/>
         </p:nvSpPr>
@@ -8377,7 +8405,7 @@
       </p:sp>
       <p:sp>
         <p:nvSpPr>
-          <p:cNvPr id="20" name="TextBox 19"/>
+          <p:cNvPr id="21" name="TextBox 20"/>
           <p:cNvSpPr txBox="1"/>
           <p:nvPr/>
         </p:nvSpPr>
@@ -8407,7 +8435,7 @@
                 <a:solidFill>
                   <a:srgbClr val="6E6E6E"/>
                 </a:solidFill>
-                <a:latin typeface="Arial"/>
+                <a:latin typeface="Calibri"/>
               </a:rPr>
               <a:t>THD · ZFE</a:t>
             </a:r>
@@ -8416,7 +8444,7 @@
       </p:sp>
       <p:sp>
         <p:nvSpPr>
-          <p:cNvPr id="21" name="TextBox 20"/>
+          <p:cNvPr id="22" name="TextBox 21"/>
           <p:cNvSpPr txBox="1"/>
           <p:nvPr/>
         </p:nvSpPr>
@@ -8444,9 +8472,9 @@
             <a:r>
               <a:rPr sz="850" b="1" i="0">
                 <a:solidFill>
-                  <a:srgbClr val="B6267C"/>
-                </a:solidFill>
-                <a:latin typeface="Arial"/>
+                  <a:srgbClr val="E2007A"/>
+                </a:solidFill>
+                <a:latin typeface="Calibri"/>
               </a:rPr>
               <a:t>04</a:t>
             </a:r>
@@ -8455,7 +8483,7 @@
                 <a:solidFill>
                   <a:srgbClr val="6E6E6E"/>
                 </a:solidFill>
-                <a:latin typeface="Arial"/>
+                <a:latin typeface="Calibri"/>
               </a:rPr>
               <a:t>  /  08</a:t>
             </a:r>
@@ -8533,13 +8561,13 @@
         <p:spPr>
           <a:xfrm>
             <a:off x="777240" y="640080"/>
-            <a:ext cx="1560697" cy="274320"/>
+            <a:ext cx="1509857" cy="274320"/>
           </a:xfrm>
           <a:prstGeom prst="rect">
             <a:avLst/>
           </a:prstGeom>
           <a:solidFill>
-            <a:srgbClr val="B6267C"/>
+            <a:srgbClr val="E2007A"/>
           </a:solidFill>
           <a:ln>
             <a:noFill/>
@@ -8577,7 +8605,7 @@
         <p:spPr>
           <a:xfrm>
             <a:off x="777240" y="640080"/>
-            <a:ext cx="1560697" cy="274320"/>
+            <a:ext cx="1509857" cy="274320"/>
           </a:xfrm>
           <a:prstGeom prst="rect">
             <a:avLst/>
@@ -8600,7 +8628,7 @@
                 <a:solidFill>
                   <a:srgbClr val="FFFFFF"/>
                 </a:solidFill>
-                <a:latin typeface="Arial"/>
+                <a:latin typeface="Calibri"/>
               </a:rPr>
               <a:t>03 · FORMATS</a:t>
             </a:r>
@@ -8639,16 +8667,16 @@
                 <a:solidFill>
                   <a:srgbClr val="222222"/>
                 </a:solidFill>
-                <a:latin typeface="Arial"/>
+                <a:latin typeface="Calibri"/>
               </a:rPr>
               <a:t>Formats </a:t>
             </a:r>
             <a:r>
               <a:rPr sz="3300" b="1" i="0">
                 <a:solidFill>
-                  <a:srgbClr val="B6267C"/>
-                </a:solidFill>
-                <a:latin typeface="Arial"/>
+                  <a:srgbClr val="E2007A"/>
+                </a:solidFill>
+                <a:latin typeface="Calibri"/>
               </a:rPr>
               <a:t>· and resources</a:t>
             </a:r>
@@ -8663,12 +8691,12 @@
         </p:nvSpPr>
         <p:spPr>
           <a:xfrm>
-            <a:off x="777240" y="2331720"/>
-            <a:ext cx="3456432" cy="2834640"/>
+            <a:off x="777240" y="2194560"/>
+            <a:ext cx="3456432" cy="2331720"/>
           </a:xfrm>
           <a:prstGeom prst="roundRect">
             <a:avLst>
-              <a:gd name="adj" fmla="val 4500"/>
+              <a:gd name="adj" fmla="val 5000"/>
             </a:avLst>
           </a:prstGeom>
           <a:solidFill>
@@ -8676,7 +8704,7 @@
           </a:solidFill>
           <a:ln w="12700">
             <a:solidFill>
-              <a:srgbClr val="B6267C"/>
+              <a:srgbClr val="E2007A"/>
             </a:solidFill>
           </a:ln>
           <a:effectLst/>
@@ -8711,14 +8739,14 @@
         </p:nvSpPr>
         <p:spPr>
           <a:xfrm>
-            <a:off x="1051560" y="2624327"/>
-            <a:ext cx="548640" cy="548640"/>
+            <a:off x="1051560" y="2468879"/>
+            <a:ext cx="502920" cy="502920"/>
           </a:xfrm>
           <a:prstGeom prst="ellipse">
             <a:avLst/>
           </a:prstGeom>
           <a:solidFill>
-            <a:srgbClr val="B6267C"/>
+            <a:srgbClr val="E2007A"/>
           </a:solidFill>
           <a:ln>
             <a:noFill/>
@@ -8755,8 +8783,8 @@
         </p:nvSpPr>
         <p:spPr>
           <a:xfrm>
-            <a:off x="1051560" y="2624327"/>
-            <a:ext cx="548640" cy="548640"/>
+            <a:off x="1051560" y="2468879"/>
+            <a:ext cx="502920" cy="502920"/>
           </a:xfrm>
           <a:prstGeom prst="rect">
             <a:avLst/>
@@ -8775,11 +8803,11 @@
               </a:lnSpc>
             </a:pPr>
             <a:r>
-              <a:rPr sz="2400" b="1" i="0">
+              <a:rPr sz="2200" b="1" i="0">
                 <a:solidFill>
                   <a:srgbClr val="FFFFFF"/>
                 </a:solidFill>
-                <a:latin typeface="Arial"/>
+                <a:latin typeface="Calibri"/>
               </a:rPr>
               <a:t>A</a:t>
             </a:r>
@@ -8794,7 +8822,7 @@
         </p:nvSpPr>
         <p:spPr>
           <a:xfrm>
-            <a:off x="1051560" y="3383279"/>
+            <a:off x="1051560" y="3154680"/>
             <a:ext cx="2907791" cy="274320"/>
           </a:xfrm>
           <a:prstGeom prst="rect">
@@ -8816,9 +8844,9 @@
             <a:r>
               <a:rPr sz="950" b="1" i="0" spc="150">
                 <a:solidFill>
-                  <a:srgbClr val="B6267C"/>
-                </a:solidFill>
-                <a:latin typeface="Arial"/>
+                  <a:srgbClr val="E2007A"/>
+                </a:solidFill>
+                <a:latin typeface="Calibri"/>
               </a:rPr>
               <a:t>ACCESS</a:t>
             </a:r>
@@ -8833,8 +8861,8 @@
         </p:nvSpPr>
         <p:spPr>
           <a:xfrm>
-            <a:off x="1051560" y="3657600"/>
-            <a:ext cx="2907791" cy="457200"/>
+            <a:off x="1051560" y="3410712"/>
+            <a:ext cx="2907791" cy="365760"/>
           </a:xfrm>
           <a:prstGeom prst="rect">
             <a:avLst/>
@@ -8853,11 +8881,11 @@
               </a:lnSpc>
             </a:pPr>
             <a:r>
-              <a:rPr sz="1700" b="1" i="0">
+              <a:rPr sz="1600" b="1" i="0">
                 <a:solidFill>
                   <a:srgbClr val="222222"/>
                 </a:solidFill>
-                <a:latin typeface="Arial"/>
+                <a:latin typeface="Calibri"/>
               </a:rPr>
               <a:t>Office hours</a:t>
             </a:r>
@@ -8872,8 +8900,8 @@
         </p:nvSpPr>
         <p:spPr>
           <a:xfrm>
-            <a:off x="1051560" y="4160520"/>
-            <a:ext cx="2907791" cy="914400"/>
+            <a:off x="1051560" y="3822191"/>
+            <a:ext cx="2907791" cy="731520"/>
           </a:xfrm>
           <a:prstGeom prst="rect">
             <a:avLst/>
@@ -8888,15 +8916,15 @@
           <a:p>
             <a:pPr algn="l">
               <a:lnSpc>
-                <a:spcPct val="130000"/>
-              </a:lnSpc>
-            </a:pPr>
-            <a:r>
-              <a:rPr sz="1150" b="0" i="0">
+                <a:spcPct val="125000"/>
+              </a:lnSpc>
+            </a:pPr>
+            <a:r>
+              <a:rPr sz="1100" b="0" i="0">
                 <a:solidFill>
                   <a:srgbClr val="6E6E6E"/>
                 </a:solidFill>
-                <a:latin typeface="Arial"/>
+                <a:latin typeface="Calibri"/>
               </a:rPr>
               <a:t>Weekly walk-in slot, EC 2.11, Tuesdays 13:00 to 15:00. The first checkpoint of the founder pipeline.</a:t>
             </a:r>
@@ -8911,12 +8939,12 @@
         </p:nvSpPr>
         <p:spPr>
           <a:xfrm>
-            <a:off x="4407407" y="2331720"/>
-            <a:ext cx="3456432" cy="2834640"/>
+            <a:off x="4407407" y="2194560"/>
+            <a:ext cx="3456432" cy="2331720"/>
           </a:xfrm>
           <a:prstGeom prst="roundRect">
             <a:avLst>
-              <a:gd name="adj" fmla="val 4500"/>
+              <a:gd name="adj" fmla="val 5000"/>
             </a:avLst>
           </a:prstGeom>
           <a:solidFill>
@@ -8924,7 +8952,7 @@
           </a:solidFill>
           <a:ln w="12700">
             <a:solidFill>
-              <a:srgbClr val="B6267C"/>
+              <a:srgbClr val="E2007A"/>
             </a:solidFill>
           </a:ln>
           <a:effectLst/>
@@ -8959,14 +8987,14 @@
         </p:nvSpPr>
         <p:spPr>
           <a:xfrm>
-            <a:off x="4681727" y="2624327"/>
-            <a:ext cx="548640" cy="548640"/>
+            <a:off x="4681727" y="2468879"/>
+            <a:ext cx="502920" cy="502920"/>
           </a:xfrm>
           <a:prstGeom prst="ellipse">
             <a:avLst/>
           </a:prstGeom>
           <a:solidFill>
-            <a:srgbClr val="B6267C"/>
+            <a:srgbClr val="E2007A"/>
           </a:solidFill>
           <a:ln>
             <a:noFill/>
@@ -9003,8 +9031,8 @@
         </p:nvSpPr>
         <p:spPr>
           <a:xfrm>
-            <a:off x="4681727" y="2624327"/>
-            <a:ext cx="548640" cy="548640"/>
+            <a:off x="4681727" y="2468879"/>
+            <a:ext cx="502920" cy="502920"/>
           </a:xfrm>
           <a:prstGeom prst="rect">
             <a:avLst/>
@@ -9023,11 +9051,11 @@
               </a:lnSpc>
             </a:pPr>
             <a:r>
-              <a:rPr sz="2400" b="1" i="0">
+              <a:rPr sz="2200" b="1" i="0">
                 <a:solidFill>
                   <a:srgbClr val="FFFFFF"/>
                 </a:solidFill>
-                <a:latin typeface="Arial"/>
+                <a:latin typeface="Calibri"/>
               </a:rPr>
               <a:t>B</a:t>
             </a:r>
@@ -9042,7 +9070,7 @@
         </p:nvSpPr>
         <p:spPr>
           <a:xfrm>
-            <a:off x="4681727" y="3383279"/>
+            <a:off x="4681727" y="3154680"/>
             <a:ext cx="2907791" cy="274320"/>
           </a:xfrm>
           <a:prstGeom prst="rect">
@@ -9064,9 +9092,9 @@
             <a:r>
               <a:rPr sz="950" b="1" i="0" spc="150">
                 <a:solidFill>
-                  <a:srgbClr val="B6267C"/>
-                </a:solidFill>
-                <a:latin typeface="Arial"/>
+                  <a:srgbClr val="E2007A"/>
+                </a:solidFill>
+                <a:latin typeface="Calibri"/>
               </a:rPr>
               <a:t>TEACHING</a:t>
             </a:r>
@@ -9081,8 +9109,8 @@
         </p:nvSpPr>
         <p:spPr>
           <a:xfrm>
-            <a:off x="4681727" y="3657600"/>
-            <a:ext cx="2907791" cy="457200"/>
+            <a:off x="4681727" y="3410712"/>
+            <a:ext cx="2907791" cy="365760"/>
           </a:xfrm>
           <a:prstGeom prst="rect">
             <a:avLst/>
@@ -9101,11 +9129,11 @@
               </a:lnSpc>
             </a:pPr>
             <a:r>
-              <a:rPr sz="1700" b="1" i="0">
+              <a:rPr sz="1600" b="1" i="0">
                 <a:solidFill>
                   <a:srgbClr val="222222"/>
                 </a:solidFill>
-                <a:latin typeface="Arial"/>
+                <a:latin typeface="Calibri"/>
               </a:rPr>
               <a:t>Entrepreneurship class</a:t>
             </a:r>
@@ -9120,8 +9148,8 @@
         </p:nvSpPr>
         <p:spPr>
           <a:xfrm>
-            <a:off x="4681727" y="4160520"/>
-            <a:ext cx="2907791" cy="914400"/>
+            <a:off x="4681727" y="3822191"/>
+            <a:ext cx="2907791" cy="731520"/>
           </a:xfrm>
           <a:prstGeom prst="rect">
             <a:avLst/>
@@ -9136,15 +9164,15 @@
           <a:p>
             <a:pPr algn="l">
               <a:lnSpc>
-                <a:spcPct val="130000"/>
-              </a:lnSpc>
-            </a:pPr>
-            <a:r>
-              <a:rPr sz="1150" b="0" i="0">
+                <a:spcPct val="125000"/>
+              </a:lnSpc>
+            </a:pPr>
+            <a:r>
+              <a:rPr sz="1100" b="0" i="0">
                 <a:solidFill>
                   <a:srgbClr val="6E6E6E"/>
                 </a:solidFill>
-                <a:latin typeface="Arial"/>
+                <a:latin typeface="Calibri"/>
               </a:rPr>
               <a:t>Introduces students to startup thinking and channels interested founders into coaching.</a:t>
             </a:r>
@@ -9159,12 +9187,12 @@
         </p:nvSpPr>
         <p:spPr>
           <a:xfrm>
-            <a:off x="8037575" y="2331720"/>
-            <a:ext cx="3456432" cy="2834640"/>
+            <a:off x="8037575" y="2194560"/>
+            <a:ext cx="3456432" cy="2331720"/>
           </a:xfrm>
           <a:prstGeom prst="roundRect">
             <a:avLst>
-              <a:gd name="adj" fmla="val 4500"/>
+              <a:gd name="adj" fmla="val 5000"/>
             </a:avLst>
           </a:prstGeom>
           <a:solidFill>
@@ -9172,7 +9200,7 @@
           </a:solidFill>
           <a:ln w="12700">
             <a:solidFill>
-              <a:srgbClr val="B6267C"/>
+              <a:srgbClr val="E2007A"/>
             </a:solidFill>
           </a:ln>
           <a:effectLst/>
@@ -9207,14 +9235,14 @@
         </p:nvSpPr>
         <p:spPr>
           <a:xfrm>
-            <a:off x="8311896" y="2624327"/>
-            <a:ext cx="548640" cy="548640"/>
+            <a:off x="8311896" y="2468879"/>
+            <a:ext cx="502920" cy="502920"/>
           </a:xfrm>
           <a:prstGeom prst="ellipse">
             <a:avLst/>
           </a:prstGeom>
           <a:solidFill>
-            <a:srgbClr val="B6267C"/>
+            <a:srgbClr val="E2007A"/>
           </a:solidFill>
           <a:ln>
             <a:noFill/>
@@ -9251,8 +9279,8 @@
         </p:nvSpPr>
         <p:spPr>
           <a:xfrm>
-            <a:off x="8311896" y="2624327"/>
-            <a:ext cx="548640" cy="548640"/>
+            <a:off x="8311896" y="2468879"/>
+            <a:ext cx="502920" cy="502920"/>
           </a:xfrm>
           <a:prstGeom prst="rect">
             <a:avLst/>
@@ -9271,11 +9299,11 @@
               </a:lnSpc>
             </a:pPr>
             <a:r>
-              <a:rPr sz="2400" b="1" i="0">
+              <a:rPr sz="2200" b="1" i="0">
                 <a:solidFill>
                   <a:srgbClr val="FFFFFF"/>
                 </a:solidFill>
-                <a:latin typeface="Arial"/>
+                <a:latin typeface="Calibri"/>
               </a:rPr>
               <a:t>C</a:t>
             </a:r>
@@ -9290,7 +9318,7 @@
         </p:nvSpPr>
         <p:spPr>
           <a:xfrm>
-            <a:off x="8311896" y="3383279"/>
+            <a:off x="8311896" y="3154680"/>
             <a:ext cx="2907791" cy="274320"/>
           </a:xfrm>
           <a:prstGeom prst="rect">
@@ -9312,9 +9340,9 @@
             <a:r>
               <a:rPr sz="950" b="1" i="0" spc="150">
                 <a:solidFill>
-                  <a:srgbClr val="B6267C"/>
-                </a:solidFill>
-                <a:latin typeface="Arial"/>
+                  <a:srgbClr val="E2007A"/>
+                </a:solidFill>
+                <a:latin typeface="Calibri"/>
               </a:rPr>
               <a:t>SPACE</a:t>
             </a:r>
@@ -9329,8 +9357,8 @@
         </p:nvSpPr>
         <p:spPr>
           <a:xfrm>
-            <a:off x="8311896" y="3657600"/>
-            <a:ext cx="2907791" cy="457200"/>
+            <a:off x="8311896" y="3410712"/>
+            <a:ext cx="2907791" cy="365760"/>
           </a:xfrm>
           <a:prstGeom prst="rect">
             <a:avLst/>
@@ -9349,11 +9377,11 @@
               </a:lnSpc>
             </a:pPr>
             <a:r>
-              <a:rPr sz="1700" b="1" i="0">
+              <a:rPr sz="1600" b="1" i="0">
                 <a:solidFill>
                   <a:srgbClr val="222222"/>
                 </a:solidFill>
-                <a:latin typeface="Arial"/>
+                <a:latin typeface="Calibri"/>
               </a:rPr>
               <a:t>Room at GreG</a:t>
             </a:r>
@@ -9368,8 +9396,8 @@
         </p:nvSpPr>
         <p:spPr>
           <a:xfrm>
-            <a:off x="8311896" y="4160520"/>
-            <a:ext cx="2907791" cy="914400"/>
+            <a:off x="8311896" y="3822191"/>
+            <a:ext cx="2907791" cy="731520"/>
           </a:xfrm>
           <a:prstGeom prst="rect">
             <a:avLst/>
@@ -9384,24 +9412,131 @@
           <a:p>
             <a:pPr algn="l">
               <a:lnSpc>
-                <a:spcPct val="130000"/>
-              </a:lnSpc>
-            </a:pPr>
-            <a:r>
-              <a:rPr sz="1150" b="0" i="0">
+                <a:spcPct val="125000"/>
+              </a:lnSpc>
+            </a:pPr>
+            <a:r>
+              <a:rPr sz="1100" b="0" i="0">
                 <a:solidFill>
                   <a:srgbClr val="6E6E6E"/>
                 </a:solidFill>
-                <a:latin typeface="Arial"/>
+                <a:latin typeface="Calibri"/>
               </a:rPr>
               <a:t>Workspace and meeting point at the GreG Founding Center for project teams and small group sessions.</a:t>
             </a:r>
           </a:p>
         </p:txBody>
       </p:sp>
-      <p:sp>
-        <p:nvSpPr>
-          <p:cNvPr id="24" name="Rectangle 23"/>
+      <p:pic>
+        <p:nvPicPr>
+          <p:cNvPr id="24" name="Picture 23" descr="greg_banner.png"/>
+          <p:cNvPicPr>
+            <a:picLocks noChangeAspect="1"/>
+          </p:cNvPicPr>
+          <p:nvPr/>
+        </p:nvPicPr>
+        <p:blipFill>
+          <a:blip r:embed="rId2"/>
+          <a:stretch>
+            <a:fillRect/>
+          </a:stretch>
+        </p:blipFill>
+        <p:spPr>
+          <a:xfrm>
+            <a:off x="777240" y="4800600"/>
+            <a:ext cx="10637215" cy="1234440"/>
+          </a:xfrm>
+          <a:prstGeom prst="rect">
+            <a:avLst/>
+          </a:prstGeom>
+        </p:spPr>
+      </p:pic>
+      <p:sp>
+        <p:nvSpPr>
+          <p:cNvPr id="25" name="Rectangle 24"/>
+          <p:cNvSpPr/>
+          <p:nvPr/>
+        </p:nvSpPr>
+        <p:spPr>
+          <a:xfrm>
+            <a:off x="1005840" y="5029200"/>
+            <a:ext cx="3168944" cy="274320"/>
+          </a:xfrm>
+          <a:prstGeom prst="rect">
+            <a:avLst/>
+          </a:prstGeom>
+          <a:solidFill>
+            <a:srgbClr val="E2007A"/>
+          </a:solidFill>
+          <a:ln>
+            <a:noFill/>
+          </a:ln>
+          <a:effectLst/>
+        </p:spPr>
+        <p:style>
+          <a:lnRef idx="1">
+            <a:schemeClr val="accent1"/>
+          </a:lnRef>
+          <a:fillRef idx="3">
+            <a:schemeClr val="accent1"/>
+          </a:fillRef>
+          <a:effectRef idx="2">
+            <a:schemeClr val="accent1"/>
+          </a:effectRef>
+          <a:fontRef idx="minor">
+            <a:schemeClr val="lt1"/>
+          </a:fontRef>
+        </p:style>
+        <p:txBody>
+          <a:bodyPr rtlCol="0" anchor="ctr"/>
+          <a:lstStyle/>
+          <a:p>
+            <a:pPr algn="ctr"/>
+          </a:p>
+        </p:txBody>
+      </p:sp>
+      <p:sp>
+        <p:nvSpPr>
+          <p:cNvPr id="26" name="TextBox 25"/>
+          <p:cNvSpPr txBox="1"/>
+          <p:nvPr/>
+        </p:nvSpPr>
+        <p:spPr>
+          <a:xfrm>
+            <a:off x="1005840" y="5029200"/>
+            <a:ext cx="3168944" cy="274320"/>
+          </a:xfrm>
+          <a:prstGeom prst="rect">
+            <a:avLst/>
+          </a:prstGeom>
+          <a:noFill/>
+        </p:spPr>
+        <p:txBody>
+          <a:bodyPr wrap="square" anchor="ctr" lIns="0" rIns="0" tIns="0" bIns="0">
+            <a:noAutofit/>
+          </a:bodyPr>
+          <a:lstStyle/>
+          <a:p>
+            <a:pPr algn="ctr">
+              <a:lnSpc>
+                <a:spcPct val="100000"/>
+              </a:lnSpc>
+            </a:pPr>
+            <a:r>
+              <a:rPr sz="900" b="1" i="0" spc="120">
+                <a:solidFill>
+                  <a:srgbClr val="FFFFFF"/>
+                </a:solidFill>
+                <a:latin typeface="Calibri"/>
+              </a:rPr>
+              <a:t>ROOM AT THE GREG FOUNDING CENTER</a:t>
+            </a:r>
+          </a:p>
+        </p:txBody>
+      </p:sp>
+      <p:sp>
+        <p:nvSpPr>
+          <p:cNvPr id="27" name="Rectangle 26"/>
           <p:cNvSpPr/>
           <p:nvPr/>
         </p:nvSpPr>
@@ -9445,7 +9580,7 @@
       </p:sp>
       <p:sp>
         <p:nvSpPr>
-          <p:cNvPr id="25" name="TextBox 24"/>
+          <p:cNvPr id="28" name="TextBox 27"/>
           <p:cNvSpPr txBox="1"/>
           <p:nvPr/>
         </p:nvSpPr>
@@ -9475,7 +9610,7 @@
                 <a:solidFill>
                   <a:srgbClr val="6E6E6E"/>
                 </a:solidFill>
-                <a:latin typeface="Arial"/>
+                <a:latin typeface="Calibri"/>
               </a:rPr>
               <a:t>THD · ZFE</a:t>
             </a:r>
@@ -9484,7 +9619,7 @@
       </p:sp>
       <p:sp>
         <p:nvSpPr>
-          <p:cNvPr id="26" name="TextBox 25"/>
+          <p:cNvPr id="29" name="TextBox 28"/>
           <p:cNvSpPr txBox="1"/>
           <p:nvPr/>
         </p:nvSpPr>
@@ -9512,9 +9647,9 @@
             <a:r>
               <a:rPr sz="850" b="1" i="0">
                 <a:solidFill>
-                  <a:srgbClr val="B6267C"/>
-                </a:solidFill>
-                <a:latin typeface="Arial"/>
+                  <a:srgbClr val="E2007A"/>
+                </a:solidFill>
+                <a:latin typeface="Calibri"/>
               </a:rPr>
               <a:t>05</a:t>
             </a:r>
@@ -9523,7 +9658,7 @@
                 <a:solidFill>
                   <a:srgbClr val="6E6E6E"/>
                 </a:solidFill>
-                <a:latin typeface="Arial"/>
+                <a:latin typeface="Calibri"/>
               </a:rPr>
               <a:t>  /  08</a:t>
             </a:r>
@@ -9601,13 +9736,13 @@
         <p:spPr>
           <a:xfrm>
             <a:off x="777240" y="640080"/>
-            <a:ext cx="1560697" cy="274320"/>
+            <a:ext cx="1509857" cy="274320"/>
           </a:xfrm>
           <a:prstGeom prst="rect">
             <a:avLst/>
           </a:prstGeom>
           <a:solidFill>
-            <a:srgbClr val="B6267C"/>
+            <a:srgbClr val="E2007A"/>
           </a:solidFill>
           <a:ln>
             <a:noFill/>
@@ -9645,7 +9780,7 @@
         <p:spPr>
           <a:xfrm>
             <a:off x="777240" y="640080"/>
-            <a:ext cx="1560697" cy="274320"/>
+            <a:ext cx="1509857" cy="274320"/>
           </a:xfrm>
           <a:prstGeom prst="rect">
             <a:avLst/>
@@ -9668,7 +9803,7 @@
                 <a:solidFill>
                   <a:srgbClr val="FFFFFF"/>
                 </a:solidFill>
-                <a:latin typeface="Arial"/>
+                <a:latin typeface="Calibri"/>
               </a:rPr>
               <a:t>04 · FIGURES</a:t>
             </a:r>
@@ -9684,7 +9819,7 @@
         <p:spPr>
           <a:xfrm>
             <a:off x="758952" y="1078992"/>
-            <a:ext cx="10058400" cy="1097280"/>
+            <a:ext cx="7315200" cy="1097280"/>
           </a:xfrm>
           <a:prstGeom prst="rect">
             <a:avLst/>
@@ -9707,32 +9842,56 @@
                 <a:solidFill>
                   <a:srgbClr val="222222"/>
                 </a:solidFill>
-                <a:latin typeface="Arial"/>
+                <a:latin typeface="Calibri"/>
               </a:rPr>
               <a:t>Activities </a:t>
             </a:r>
             <a:r>
               <a:rPr sz="3300" b="1" i="0">
                 <a:solidFill>
-                  <a:srgbClr val="B6267C"/>
-                </a:solidFill>
-                <a:latin typeface="Arial"/>
+                  <a:srgbClr val="E2007A"/>
+                </a:solidFill>
+                <a:latin typeface="Calibri"/>
               </a:rPr>
               <a:t>· and KPIs</a:t>
             </a:r>
           </a:p>
         </p:txBody>
       </p:sp>
-      <p:sp>
-        <p:nvSpPr>
-          <p:cNvPr id="6" name="TextBox 5"/>
-          <p:cNvSpPr txBox="1"/>
-          <p:nvPr/>
-        </p:nvSpPr>
-        <p:spPr>
-          <a:xfrm>
-            <a:off x="777240" y="1920240"/>
-            <a:ext cx="8686800" cy="548640"/>
+      <p:pic>
+        <p:nvPicPr>
+          <p:cNvPr id="6" name="Picture 5" descr="workshop.png"/>
+          <p:cNvPicPr>
+            <a:picLocks noChangeAspect="1"/>
+          </p:cNvPicPr>
+          <p:nvPr/>
+        </p:nvPicPr>
+        <p:blipFill>
+          <a:blip r:embed="rId2"/>
+          <a:stretch>
+            <a:fillRect/>
+          </a:stretch>
+        </p:blipFill>
+        <p:spPr>
+          <a:xfrm>
+            <a:off x="8869680" y="640080"/>
+            <a:ext cx="2542032" cy="1874519"/>
+          </a:xfrm>
+          <a:prstGeom prst="rect">
+            <a:avLst/>
+          </a:prstGeom>
+        </p:spPr>
+      </p:pic>
+      <p:sp>
+        <p:nvSpPr>
+          <p:cNvPr id="7" name="TextBox 6"/>
+          <p:cNvSpPr txBox="1"/>
+          <p:nvPr/>
+        </p:nvSpPr>
+        <p:spPr>
+          <a:xfrm>
+            <a:off x="777240" y="1874519"/>
+            <a:ext cx="7498079" cy="548640"/>
           </a:xfrm>
           <a:prstGeom prst="rect">
             <a:avLst/>
@@ -9755,29 +9914,170 @@
                 <a:solidFill>
                   <a:srgbClr val="6E6E6E"/>
                 </a:solidFill>
-                <a:latin typeface="Arial"/>
+                <a:latin typeface="Calibri"/>
               </a:rPr>
               <a:t>The current term on one slide. Individual talks and class visits are rolled up into a single outreach figure.</a:t>
             </a:r>
           </a:p>
         </p:txBody>
       </p:sp>
-      <p:sp>
-        <p:nvSpPr>
-          <p:cNvPr id="7" name="Rounded Rectangle 6"/>
+      <p:pic>
+        <p:nvPicPr>
+          <p:cNvPr id="8" name="Picture 7" descr="stat_band.png"/>
+          <p:cNvPicPr>
+            <a:picLocks noChangeAspect="1"/>
+          </p:cNvPicPr>
+          <p:nvPr/>
+        </p:nvPicPr>
+        <p:blipFill>
+          <a:blip r:embed="rId3"/>
+          <a:stretch>
+            <a:fillRect/>
+          </a:stretch>
+        </p:blipFill>
+        <p:spPr>
+          <a:xfrm>
+            <a:off x="777240" y="2788920"/>
+            <a:ext cx="10637215" cy="2743200"/>
+          </a:xfrm>
+          <a:prstGeom prst="rect">
+            <a:avLst/>
+          </a:prstGeom>
+        </p:spPr>
+      </p:pic>
+      <p:sp>
+        <p:nvSpPr>
+          <p:cNvPr id="9" name="TextBox 8"/>
+          <p:cNvSpPr txBox="1"/>
+          <p:nvPr/>
+        </p:nvSpPr>
+        <p:spPr>
+          <a:xfrm>
+            <a:off x="1051560" y="3246120"/>
+            <a:ext cx="2293543" cy="1005840"/>
+          </a:xfrm>
+          <a:prstGeom prst="rect">
+            <a:avLst/>
+          </a:prstGeom>
+          <a:noFill/>
+        </p:spPr>
+        <p:txBody>
+          <a:bodyPr wrap="square" anchor="ctr" lIns="0" rIns="0" tIns="0" bIns="0">
+            <a:noAutofit/>
+          </a:bodyPr>
+          <a:lstStyle/>
+          <a:p>
+            <a:pPr algn="l">
+              <a:lnSpc>
+                <a:spcPct val="100000"/>
+              </a:lnSpc>
+            </a:pPr>
+            <a:r>
+              <a:rPr sz="5200" b="1" i="0">
+                <a:solidFill>
+                  <a:srgbClr val="FFFFFF"/>
+                </a:solidFill>
+                <a:latin typeface="Calibri"/>
+              </a:rPr>
+              <a:t>300+</a:t>
+            </a:r>
+          </a:p>
+        </p:txBody>
+      </p:sp>
+      <p:sp>
+        <p:nvSpPr>
+          <p:cNvPr id="10" name="TextBox 9"/>
+          <p:cNvSpPr txBox="1"/>
+          <p:nvPr/>
+        </p:nvSpPr>
+        <p:spPr>
+          <a:xfrm>
+            <a:off x="1069848" y="4361688"/>
+            <a:ext cx="2293543" cy="274320"/>
+          </a:xfrm>
+          <a:prstGeom prst="rect">
+            <a:avLst/>
+          </a:prstGeom>
+          <a:noFill/>
+        </p:spPr>
+        <p:txBody>
+          <a:bodyPr wrap="square" anchor="t" lIns="0" rIns="0" tIns="0" bIns="0">
+            <a:noAutofit/>
+          </a:bodyPr>
+          <a:lstStyle/>
+          <a:p>
+            <a:pPr algn="l">
+              <a:lnSpc>
+                <a:spcPct val="100000"/>
+              </a:lnSpc>
+            </a:pPr>
+            <a:r>
+              <a:rPr sz="1100" b="1" i="0" spc="100">
+                <a:solidFill>
+                  <a:srgbClr val="FFFFFF"/>
+                </a:solidFill>
+                <a:latin typeface="Calibri"/>
+              </a:rPr>
+              <a:t>STUDENTS REACHED</a:t>
+            </a:r>
+          </a:p>
+        </p:txBody>
+      </p:sp>
+      <p:sp>
+        <p:nvSpPr>
+          <p:cNvPr id="11" name="TextBox 10"/>
+          <p:cNvSpPr txBox="1"/>
+          <p:nvPr/>
+        </p:nvSpPr>
+        <p:spPr>
+          <a:xfrm>
+            <a:off x="1069848" y="4709160"/>
+            <a:ext cx="2293543" cy="365760"/>
+          </a:xfrm>
+          <a:prstGeom prst="rect">
+            <a:avLst/>
+          </a:prstGeom>
+          <a:noFill/>
+        </p:spPr>
+        <p:txBody>
+          <a:bodyPr wrap="square" anchor="t" lIns="0" rIns="0" tIns="0" bIns="0">
+            <a:noAutofit/>
+          </a:bodyPr>
+          <a:lstStyle/>
+          <a:p>
+            <a:pPr algn="l">
+              <a:lnSpc>
+                <a:spcPct val="100000"/>
+              </a:lnSpc>
+            </a:pPr>
+            <a:r>
+              <a:rPr sz="1000" b="0" i="0">
+                <a:solidFill>
+                  <a:srgbClr val="F4C6DE"/>
+                </a:solidFill>
+                <a:latin typeface="Calibri"/>
+              </a:rPr>
+              <a:t>outreach this term</a:t>
+            </a:r>
+          </a:p>
+        </p:txBody>
+      </p:sp>
+      <p:sp>
+        <p:nvSpPr>
+          <p:cNvPr id="12" name="Rectangle 11"/>
           <p:cNvSpPr/>
           <p:nvPr/>
         </p:nvSpPr>
         <p:spPr>
           <a:xfrm>
-            <a:off x="777240" y="2743200"/>
-            <a:ext cx="10637215" cy="2743200"/>
-          </a:xfrm>
-          <a:prstGeom prst="roundRect">
+            <a:off x="3436543" y="3291839"/>
+            <a:ext cx="10972" cy="1737360"/>
+          </a:xfrm>
+          <a:prstGeom prst="rect">
             <a:avLst/>
           </a:prstGeom>
           <a:solidFill>
-            <a:srgbClr val="1C1C1E"/>
+            <a:srgbClr val="F49CC6"/>
           </a:solidFill>
           <a:ln>
             <a:noFill/>
@@ -9808,13 +10108,13 @@
       </p:sp>
       <p:sp>
         <p:nvSpPr>
-          <p:cNvPr id="8" name="TextBox 7"/>
-          <p:cNvSpPr txBox="1"/>
-          <p:nvPr/>
-        </p:nvSpPr>
-        <p:spPr>
-          <a:xfrm>
-            <a:off x="1005840" y="3246120"/>
+          <p:cNvPr id="13" name="TextBox 12"/>
+          <p:cNvSpPr txBox="1"/>
+          <p:nvPr/>
+        </p:nvSpPr>
+        <p:spPr>
+          <a:xfrm>
+            <a:off x="3710863" y="3246120"/>
             <a:ext cx="2293543" cy="1005840"/>
           </a:xfrm>
           <a:prstGeom prst="rect">
@@ -9836,24 +10136,24 @@
             <a:r>
               <a:rPr sz="5200" b="1" i="0">
                 <a:solidFill>
-                  <a:srgbClr val="B6267C"/>
-                </a:solidFill>
-                <a:latin typeface="Arial"/>
-              </a:rPr>
-              <a:t>300+</a:t>
-            </a:r>
-          </a:p>
-        </p:txBody>
-      </p:sp>
-      <p:sp>
-        <p:nvSpPr>
-          <p:cNvPr id="9" name="TextBox 8"/>
-          <p:cNvSpPr txBox="1"/>
-          <p:nvPr/>
-        </p:nvSpPr>
-        <p:spPr>
-          <a:xfrm>
-            <a:off x="1024128" y="4343400"/>
+                  <a:srgbClr val="FFFFFF"/>
+                </a:solidFill>
+                <a:latin typeface="Calibri"/>
+              </a:rPr>
+              <a:t>7</a:t>
+            </a:r>
+          </a:p>
+        </p:txBody>
+      </p:sp>
+      <p:sp>
+        <p:nvSpPr>
+          <p:cNvPr id="14" name="TextBox 13"/>
+          <p:cNvSpPr txBox="1"/>
+          <p:nvPr/>
+        </p:nvSpPr>
+        <p:spPr>
+          <a:xfrm>
+            <a:off x="3729151" y="4361688"/>
             <a:ext cx="2293543" cy="274320"/>
           </a:xfrm>
           <a:prstGeom prst="rect">
@@ -9877,22 +10177,22 @@
                 <a:solidFill>
                   <a:srgbClr val="FFFFFF"/>
                 </a:solidFill>
-                <a:latin typeface="Arial"/>
-              </a:rPr>
-              <a:t>STUDENTS REACHED</a:t>
-            </a:r>
-          </a:p>
-        </p:txBody>
-      </p:sp>
-      <p:sp>
-        <p:nvSpPr>
-          <p:cNvPr id="10" name="TextBox 9"/>
-          <p:cNvSpPr txBox="1"/>
-          <p:nvPr/>
-        </p:nvSpPr>
-        <p:spPr>
-          <a:xfrm>
-            <a:off x="1024128" y="4681728"/>
+                <a:latin typeface="Calibri"/>
+              </a:rPr>
+              <a:t>TALKS &amp; LECTURES</a:t>
+            </a:r>
+          </a:p>
+        </p:txBody>
+      </p:sp>
+      <p:sp>
+        <p:nvSpPr>
+          <p:cNvPr id="15" name="TextBox 14"/>
+          <p:cNvSpPr txBox="1"/>
+          <p:nvPr/>
+        </p:nvSpPr>
+        <p:spPr>
+          <a:xfrm>
+            <a:off x="3729151" y="4709160"/>
             <a:ext cx="2293543" cy="365760"/>
           </a:xfrm>
           <a:prstGeom prst="rect">
@@ -9914,31 +10214,31 @@
             <a:r>
               <a:rPr sz="1000" b="0" i="0">
                 <a:solidFill>
-                  <a:srgbClr val="9A9A9A"/>
-                </a:solidFill>
-                <a:latin typeface="Arial"/>
-              </a:rPr>
-              <a:t>outreach this term</a:t>
-            </a:r>
-          </a:p>
-        </p:txBody>
-      </p:sp>
-      <p:sp>
-        <p:nvSpPr>
-          <p:cNvPr id="11" name="Rectangle 10"/>
+                  <a:srgbClr val="F4C6DE"/>
+                </a:solidFill>
+                <a:latin typeface="Calibri"/>
+              </a:rPr>
+              <a:t>3 more planned</a:t>
+            </a:r>
+          </a:p>
+        </p:txBody>
+      </p:sp>
+      <p:sp>
+        <p:nvSpPr>
+          <p:cNvPr id="16" name="Rectangle 15"/>
           <p:cNvSpPr/>
           <p:nvPr/>
         </p:nvSpPr>
         <p:spPr>
           <a:xfrm>
-            <a:off x="3436543" y="3246120"/>
+            <a:off x="6095847" y="3291839"/>
             <a:ext cx="10972" cy="1737360"/>
           </a:xfrm>
           <a:prstGeom prst="rect">
             <a:avLst/>
           </a:prstGeom>
           <a:solidFill>
-            <a:srgbClr val="444447"/>
+            <a:srgbClr val="F49CC6"/>
           </a:solidFill>
           <a:ln>
             <a:noFill/>
@@ -9969,13 +10269,13 @@
       </p:sp>
       <p:sp>
         <p:nvSpPr>
-          <p:cNvPr id="12" name="TextBox 11"/>
-          <p:cNvSpPr txBox="1"/>
-          <p:nvPr/>
-        </p:nvSpPr>
-        <p:spPr>
-          <a:xfrm>
-            <a:off x="3665143" y="3246120"/>
+          <p:cNvPr id="17" name="TextBox 16"/>
+          <p:cNvSpPr txBox="1"/>
+          <p:nvPr/>
+        </p:nvSpPr>
+        <p:spPr>
+          <a:xfrm>
+            <a:off x="6370167" y="3246120"/>
             <a:ext cx="2293543" cy="1005840"/>
           </a:xfrm>
           <a:prstGeom prst="rect">
@@ -9997,24 +10297,24 @@
             <a:r>
               <a:rPr sz="5200" b="1" i="0">
                 <a:solidFill>
-                  <a:srgbClr val="B6267C"/>
-                </a:solidFill>
-                <a:latin typeface="Arial"/>
-              </a:rPr>
-              <a:t>7</a:t>
-            </a:r>
-          </a:p>
-        </p:txBody>
-      </p:sp>
-      <p:sp>
-        <p:nvSpPr>
-          <p:cNvPr id="13" name="TextBox 12"/>
-          <p:cNvSpPr txBox="1"/>
-          <p:nvPr/>
-        </p:nvSpPr>
-        <p:spPr>
-          <a:xfrm>
-            <a:off x="3683431" y="4343400"/>
+                  <a:srgbClr val="FFFFFF"/>
+                </a:solidFill>
+                <a:latin typeface="Calibri"/>
+              </a:rPr>
+              <a:t>27</a:t>
+            </a:r>
+          </a:p>
+        </p:txBody>
+      </p:sp>
+      <p:sp>
+        <p:nvSpPr>
+          <p:cNvPr id="18" name="TextBox 17"/>
+          <p:cNvSpPr txBox="1"/>
+          <p:nvPr/>
+        </p:nvSpPr>
+        <p:spPr>
+          <a:xfrm>
+            <a:off x="6388455" y="4361688"/>
             <a:ext cx="2293543" cy="274320"/>
           </a:xfrm>
           <a:prstGeom prst="rect">
@@ -10038,22 +10338,22 @@
                 <a:solidFill>
                   <a:srgbClr val="FFFFFF"/>
                 </a:solidFill>
-                <a:latin typeface="Arial"/>
-              </a:rPr>
-              <a:t>TALKS &amp; LECTURES</a:t>
-            </a:r>
-          </a:p>
-        </p:txBody>
-      </p:sp>
-      <p:sp>
-        <p:nvSpPr>
-          <p:cNvPr id="14" name="TextBox 13"/>
-          <p:cNvSpPr txBox="1"/>
-          <p:nvPr/>
-        </p:nvSpPr>
-        <p:spPr>
-          <a:xfrm>
-            <a:off x="3683431" y="4681728"/>
+                <a:latin typeface="Calibri"/>
+              </a:rPr>
+              <a:t>1:1 COACHING</a:t>
+            </a:r>
+          </a:p>
+        </p:txBody>
+      </p:sp>
+      <p:sp>
+        <p:nvSpPr>
+          <p:cNvPr id="19" name="TextBox 18"/>
+          <p:cNvSpPr txBox="1"/>
+          <p:nvPr/>
+        </p:nvSpPr>
+        <p:spPr>
+          <a:xfrm>
+            <a:off x="6388455" y="4709160"/>
             <a:ext cx="2293543" cy="365760"/>
           </a:xfrm>
           <a:prstGeom prst="rect">
@@ -10075,31 +10375,31 @@
             <a:r>
               <a:rPr sz="1000" b="0" i="0">
                 <a:solidFill>
-                  <a:srgbClr val="9A9A9A"/>
-                </a:solidFill>
-                <a:latin typeface="Arial"/>
-              </a:rPr>
-              <a:t>3 more planned</a:t>
-            </a:r>
-          </a:p>
-        </p:txBody>
-      </p:sp>
-      <p:sp>
-        <p:nvSpPr>
-          <p:cNvPr id="15" name="Rectangle 14"/>
+                  <a:srgbClr val="F4C6DE"/>
+                </a:solidFill>
+                <a:latin typeface="Calibri"/>
+              </a:rPr>
+              <a:t>students, Unit 01</a:t>
+            </a:r>
+          </a:p>
+        </p:txBody>
+      </p:sp>
+      <p:sp>
+        <p:nvSpPr>
+          <p:cNvPr id="20" name="Rectangle 19"/>
           <p:cNvSpPr/>
           <p:nvPr/>
         </p:nvSpPr>
         <p:spPr>
           <a:xfrm>
-            <a:off x="6095847" y="3246120"/>
+            <a:off x="8755151" y="3291839"/>
             <a:ext cx="10972" cy="1737360"/>
           </a:xfrm>
           <a:prstGeom prst="rect">
             <a:avLst/>
           </a:prstGeom>
           <a:solidFill>
-            <a:srgbClr val="444447"/>
+            <a:srgbClr val="F49CC6"/>
           </a:solidFill>
           <a:ln>
             <a:noFill/>
@@ -10130,13 +10430,13 @@
       </p:sp>
       <p:sp>
         <p:nvSpPr>
-          <p:cNvPr id="16" name="TextBox 15"/>
-          <p:cNvSpPr txBox="1"/>
-          <p:nvPr/>
-        </p:nvSpPr>
-        <p:spPr>
-          <a:xfrm>
-            <a:off x="6324447" y="3246120"/>
+          <p:cNvPr id="21" name="TextBox 20"/>
+          <p:cNvSpPr txBox="1"/>
+          <p:nvPr/>
+        </p:nvSpPr>
+        <p:spPr>
+          <a:xfrm>
+            <a:off x="9029471" y="3246120"/>
             <a:ext cx="2293543" cy="1005840"/>
           </a:xfrm>
           <a:prstGeom prst="rect">
@@ -10158,24 +10458,24 @@
             <a:r>
               <a:rPr sz="5200" b="1" i="0">
                 <a:solidFill>
-                  <a:srgbClr val="B6267C"/>
-                </a:solidFill>
-                <a:latin typeface="Arial"/>
-              </a:rPr>
-              <a:t>27</a:t>
-            </a:r>
-          </a:p>
-        </p:txBody>
-      </p:sp>
-      <p:sp>
-        <p:nvSpPr>
-          <p:cNvPr id="17" name="TextBox 16"/>
-          <p:cNvSpPr txBox="1"/>
-          <p:nvPr/>
-        </p:nvSpPr>
-        <p:spPr>
-          <a:xfrm>
-            <a:off x="6342735" y="4343400"/>
+                  <a:srgbClr val="FFFFFF"/>
+                </a:solidFill>
+                <a:latin typeface="Calibri"/>
+              </a:rPr>
+              <a:t>2</a:t>
+            </a:r>
+          </a:p>
+        </p:txBody>
+      </p:sp>
+      <p:sp>
+        <p:nvSpPr>
+          <p:cNvPr id="22" name="TextBox 21"/>
+          <p:cNvSpPr txBox="1"/>
+          <p:nvPr/>
+        </p:nvSpPr>
+        <p:spPr>
+          <a:xfrm>
+            <a:off x="9047759" y="4361688"/>
             <a:ext cx="2293543" cy="274320"/>
           </a:xfrm>
           <a:prstGeom prst="rect">
@@ -10199,22 +10499,22 @@
                 <a:solidFill>
                   <a:srgbClr val="FFFFFF"/>
                 </a:solidFill>
-                <a:latin typeface="Arial"/>
-              </a:rPr>
-              <a:t>1:1 COACHING</a:t>
-            </a:r>
-          </a:p>
-        </p:txBody>
-      </p:sp>
-      <p:sp>
-        <p:nvSpPr>
-          <p:cNvPr id="18" name="TextBox 17"/>
-          <p:cNvSpPr txBox="1"/>
-          <p:nvPr/>
-        </p:nvSpPr>
-        <p:spPr>
-          <a:xfrm>
-            <a:off x="6342735" y="4681728"/>
+                <a:latin typeface="Calibri"/>
+              </a:rPr>
+              <a:t>WORKSHOPS</a:t>
+            </a:r>
+          </a:p>
+        </p:txBody>
+      </p:sp>
+      <p:sp>
+        <p:nvSpPr>
+          <p:cNvPr id="23" name="TextBox 22"/>
+          <p:cNvSpPr txBox="1"/>
+          <p:nvPr/>
+        </p:nvSpPr>
+        <p:spPr>
+          <a:xfrm>
+            <a:off x="9047759" y="4709160"/>
             <a:ext cx="2293543" cy="365760"/>
           </a:xfrm>
           <a:prstGeom prst="rect">
@@ -10236,170 +10536,9 @@
             <a:r>
               <a:rPr sz="1000" b="0" i="0">
                 <a:solidFill>
-                  <a:srgbClr val="9A9A9A"/>
-                </a:solidFill>
-                <a:latin typeface="Arial"/>
-              </a:rPr>
-              <a:t>students, Unit 01</a:t>
-            </a:r>
-          </a:p>
-        </p:txBody>
-      </p:sp>
-      <p:sp>
-        <p:nvSpPr>
-          <p:cNvPr id="19" name="Rectangle 18"/>
-          <p:cNvSpPr/>
-          <p:nvPr/>
-        </p:nvSpPr>
-        <p:spPr>
-          <a:xfrm>
-            <a:off x="8755151" y="3246120"/>
-            <a:ext cx="10972" cy="1737360"/>
-          </a:xfrm>
-          <a:prstGeom prst="rect">
-            <a:avLst/>
-          </a:prstGeom>
-          <a:solidFill>
-            <a:srgbClr val="444447"/>
-          </a:solidFill>
-          <a:ln>
-            <a:noFill/>
-          </a:ln>
-          <a:effectLst/>
-        </p:spPr>
-        <p:style>
-          <a:lnRef idx="1">
-            <a:schemeClr val="accent1"/>
-          </a:lnRef>
-          <a:fillRef idx="3">
-            <a:schemeClr val="accent1"/>
-          </a:fillRef>
-          <a:effectRef idx="2">
-            <a:schemeClr val="accent1"/>
-          </a:effectRef>
-          <a:fontRef idx="minor">
-            <a:schemeClr val="lt1"/>
-          </a:fontRef>
-        </p:style>
-        <p:txBody>
-          <a:bodyPr rtlCol="0" anchor="ctr"/>
-          <a:lstStyle/>
-          <a:p>
-            <a:pPr algn="ctr"/>
-          </a:p>
-        </p:txBody>
-      </p:sp>
-      <p:sp>
-        <p:nvSpPr>
-          <p:cNvPr id="20" name="TextBox 19"/>
-          <p:cNvSpPr txBox="1"/>
-          <p:nvPr/>
-        </p:nvSpPr>
-        <p:spPr>
-          <a:xfrm>
-            <a:off x="8983751" y="3246120"/>
-            <a:ext cx="2293543" cy="1005840"/>
-          </a:xfrm>
-          <a:prstGeom prst="rect">
-            <a:avLst/>
-          </a:prstGeom>
-          <a:noFill/>
-        </p:spPr>
-        <p:txBody>
-          <a:bodyPr wrap="square" anchor="ctr" lIns="0" rIns="0" tIns="0" bIns="0">
-            <a:noAutofit/>
-          </a:bodyPr>
-          <a:lstStyle/>
-          <a:p>
-            <a:pPr algn="l">
-              <a:lnSpc>
-                <a:spcPct val="100000"/>
-              </a:lnSpc>
-            </a:pPr>
-            <a:r>
-              <a:rPr sz="5200" b="1" i="0">
-                <a:solidFill>
-                  <a:srgbClr val="B6267C"/>
-                </a:solidFill>
-                <a:latin typeface="Arial"/>
-              </a:rPr>
-              <a:t>2</a:t>
-            </a:r>
-          </a:p>
-        </p:txBody>
-      </p:sp>
-      <p:sp>
-        <p:nvSpPr>
-          <p:cNvPr id="21" name="TextBox 20"/>
-          <p:cNvSpPr txBox="1"/>
-          <p:nvPr/>
-        </p:nvSpPr>
-        <p:spPr>
-          <a:xfrm>
-            <a:off x="9002039" y="4343400"/>
-            <a:ext cx="2293543" cy="274320"/>
-          </a:xfrm>
-          <a:prstGeom prst="rect">
-            <a:avLst/>
-          </a:prstGeom>
-          <a:noFill/>
-        </p:spPr>
-        <p:txBody>
-          <a:bodyPr wrap="square" anchor="t" lIns="0" rIns="0" tIns="0" bIns="0">
-            <a:noAutofit/>
-          </a:bodyPr>
-          <a:lstStyle/>
-          <a:p>
-            <a:pPr algn="l">
-              <a:lnSpc>
-                <a:spcPct val="100000"/>
-              </a:lnSpc>
-            </a:pPr>
-            <a:r>
-              <a:rPr sz="1100" b="1" i="0" spc="100">
-                <a:solidFill>
-                  <a:srgbClr val="FFFFFF"/>
-                </a:solidFill>
-                <a:latin typeface="Arial"/>
-              </a:rPr>
-              <a:t>WORKSHOPS</a:t>
-            </a:r>
-          </a:p>
-        </p:txBody>
-      </p:sp>
-      <p:sp>
-        <p:nvSpPr>
-          <p:cNvPr id="22" name="TextBox 21"/>
-          <p:cNvSpPr txBox="1"/>
-          <p:nvPr/>
-        </p:nvSpPr>
-        <p:spPr>
-          <a:xfrm>
-            <a:off x="9002039" y="4681728"/>
-            <a:ext cx="2293543" cy="365760"/>
-          </a:xfrm>
-          <a:prstGeom prst="rect">
-            <a:avLst/>
-          </a:prstGeom>
-          <a:noFill/>
-        </p:spPr>
-        <p:txBody>
-          <a:bodyPr wrap="square" anchor="t" lIns="0" rIns="0" tIns="0" bIns="0">
-            <a:noAutofit/>
-          </a:bodyPr>
-          <a:lstStyle/>
-          <a:p>
-            <a:pPr algn="l">
-              <a:lnSpc>
-                <a:spcPct val="100000"/>
-              </a:lnSpc>
-            </a:pPr>
-            <a:r>
-              <a:rPr sz="1000" b="0" i="0">
-                <a:solidFill>
-                  <a:srgbClr val="9A9A9A"/>
-                </a:solidFill>
-                <a:latin typeface="Arial"/>
+                  <a:srgbClr val="F4C6DE"/>
+                </a:solidFill>
+                <a:latin typeface="Calibri"/>
               </a:rPr>
               <a:t>3 expected</a:t>
             </a:r>
@@ -10408,7 +10547,7 @@
       </p:sp>
       <p:sp>
         <p:nvSpPr>
-          <p:cNvPr id="23" name="Rectangle 22"/>
+          <p:cNvPr id="24" name="Rectangle 23"/>
           <p:cNvSpPr/>
           <p:nvPr/>
         </p:nvSpPr>
@@ -10452,7 +10591,7 @@
       </p:sp>
       <p:sp>
         <p:nvSpPr>
-          <p:cNvPr id="24" name="TextBox 23"/>
+          <p:cNvPr id="25" name="TextBox 24"/>
           <p:cNvSpPr txBox="1"/>
           <p:nvPr/>
         </p:nvSpPr>
@@ -10482,7 +10621,7 @@
                 <a:solidFill>
                   <a:srgbClr val="6E6E6E"/>
                 </a:solidFill>
-                <a:latin typeface="Arial"/>
+                <a:latin typeface="Calibri"/>
               </a:rPr>
               <a:t>THD · ZFE</a:t>
             </a:r>
@@ -10491,7 +10630,7 @@
       </p:sp>
       <p:sp>
         <p:nvSpPr>
-          <p:cNvPr id="25" name="TextBox 24"/>
+          <p:cNvPr id="26" name="TextBox 25"/>
           <p:cNvSpPr txBox="1"/>
           <p:nvPr/>
         </p:nvSpPr>
@@ -10519,9 +10658,9 @@
             <a:r>
               <a:rPr sz="850" b="1" i="0">
                 <a:solidFill>
-                  <a:srgbClr val="B6267C"/>
-                </a:solidFill>
-                <a:latin typeface="Arial"/>
+                  <a:srgbClr val="E2007A"/>
+                </a:solidFill>
+                <a:latin typeface="Calibri"/>
               </a:rPr>
               <a:t>06</a:t>
             </a:r>
@@ -10530,7 +10669,7 @@
                 <a:solidFill>
                   <a:srgbClr val="6E6E6E"/>
                 </a:solidFill>
-                <a:latin typeface="Arial"/>
+                <a:latin typeface="Calibri"/>
               </a:rPr>
               <a:t>  /  08</a:t>
             </a:r>
@@ -10608,13 +10747,13 @@
         <p:spPr>
           <a:xfrm>
             <a:off x="777240" y="640080"/>
-            <a:ext cx="2353757" cy="274320"/>
+            <a:ext cx="2262591" cy="274320"/>
           </a:xfrm>
           <a:prstGeom prst="rect">
             <a:avLst/>
           </a:prstGeom>
           <a:solidFill>
-            <a:srgbClr val="B6267C"/>
+            <a:srgbClr val="E2007A"/>
           </a:solidFill>
           <a:ln>
             <a:noFill/>
@@ -10652,7 +10791,7 @@
         <p:spPr>
           <a:xfrm>
             <a:off x="777240" y="640080"/>
-            <a:ext cx="2353757" cy="274320"/>
+            <a:ext cx="2262591" cy="274320"/>
           </a:xfrm>
           <a:prstGeom prst="rect">
             <a:avLst/>
@@ -10675,7 +10814,7 @@
                 <a:solidFill>
                   <a:srgbClr val="FFFFFF"/>
                 </a:solidFill>
-                <a:latin typeface="Arial"/>
+                <a:latin typeface="Calibri"/>
               </a:rPr>
               <a:t>05 · CALL TO ACTION</a:t>
             </a:r>
@@ -10714,16 +10853,16 @@
                 <a:solidFill>
                   <a:srgbClr val="222222"/>
                 </a:solidFill>
-                <a:latin typeface="Arial"/>
+                <a:latin typeface="Calibri"/>
               </a:rPr>
               <a:t>What we need </a:t>
             </a:r>
             <a:r>
               <a:rPr sz="3300" b="1" i="0">
                 <a:solidFill>
-                  <a:srgbClr val="B6267C"/>
-                </a:solidFill>
-                <a:latin typeface="Arial"/>
+                  <a:srgbClr val="E2007A"/>
+                </a:solidFill>
+                <a:latin typeface="Calibri"/>
               </a:rPr>
               <a:t>· and where next</a:t>
             </a:r>
@@ -10739,7 +10878,509 @@
         <p:spPr>
           <a:xfrm>
             <a:off x="777240" y="2286000"/>
-            <a:ext cx="5230368" cy="3108960"/>
+            <a:ext cx="5230368" cy="3200400"/>
+          </a:xfrm>
+          <a:prstGeom prst="roundRect">
+            <a:avLst>
+              <a:gd name="adj" fmla="val 3000"/>
+            </a:avLst>
+          </a:prstGeom>
+          <a:solidFill>
+            <a:srgbClr val="FBEAF2"/>
+          </a:solidFill>
+          <a:ln w="12700">
+            <a:solidFill>
+              <a:srgbClr val="E2007A"/>
+            </a:solidFill>
+          </a:ln>
+          <a:effectLst/>
+        </p:spPr>
+        <p:style>
+          <a:lnRef idx="1">
+            <a:schemeClr val="accent1"/>
+          </a:lnRef>
+          <a:fillRef idx="3">
+            <a:schemeClr val="accent1"/>
+          </a:fillRef>
+          <a:effectRef idx="2">
+            <a:schemeClr val="accent1"/>
+          </a:effectRef>
+          <a:fontRef idx="minor">
+            <a:schemeClr val="lt1"/>
+          </a:fontRef>
+        </p:style>
+        <p:txBody>
+          <a:bodyPr rtlCol="0" anchor="ctr"/>
+          <a:lstStyle/>
+          <a:p>
+            <a:pPr algn="ctr"/>
+          </a:p>
+        </p:txBody>
+      </p:sp>
+      <p:sp>
+        <p:nvSpPr>
+          <p:cNvPr id="7" name="Rectangle 6"/>
+          <p:cNvSpPr/>
+          <p:nvPr/>
+        </p:nvSpPr>
+        <p:spPr>
+          <a:xfrm>
+            <a:off x="1069848" y="2578608"/>
+            <a:ext cx="2800258" cy="274320"/>
+          </a:xfrm>
+          <a:prstGeom prst="rect">
+            <a:avLst/>
+          </a:prstGeom>
+          <a:solidFill>
+            <a:srgbClr val="E2007A"/>
+          </a:solidFill>
+          <a:ln>
+            <a:noFill/>
+          </a:ln>
+          <a:effectLst/>
+        </p:spPr>
+        <p:style>
+          <a:lnRef idx="1">
+            <a:schemeClr val="accent1"/>
+          </a:lnRef>
+          <a:fillRef idx="3">
+            <a:schemeClr val="accent1"/>
+          </a:fillRef>
+          <a:effectRef idx="2">
+            <a:schemeClr val="accent1"/>
+          </a:effectRef>
+          <a:fontRef idx="minor">
+            <a:schemeClr val="lt1"/>
+          </a:fontRef>
+        </p:style>
+        <p:txBody>
+          <a:bodyPr rtlCol="0" anchor="ctr"/>
+          <a:lstStyle/>
+          <a:p>
+            <a:pPr algn="ctr"/>
+          </a:p>
+        </p:txBody>
+      </p:sp>
+      <p:sp>
+        <p:nvSpPr>
+          <p:cNvPr id="8" name="TextBox 7"/>
+          <p:cNvSpPr txBox="1"/>
+          <p:nvPr/>
+        </p:nvSpPr>
+        <p:spPr>
+          <a:xfrm>
+            <a:off x="1069848" y="2578608"/>
+            <a:ext cx="2800258" cy="274320"/>
+          </a:xfrm>
+          <a:prstGeom prst="rect">
+            <a:avLst/>
+          </a:prstGeom>
+          <a:noFill/>
+        </p:spPr>
+        <p:txBody>
+          <a:bodyPr wrap="square" anchor="ctr" lIns="0" rIns="0" tIns="0" bIns="0">
+            <a:noAutofit/>
+          </a:bodyPr>
+          <a:lstStyle/>
+          <a:p>
+            <a:pPr algn="ctr">
+              <a:lnSpc>
+                <a:spcPct val="100000"/>
+              </a:lnSpc>
+            </a:pPr>
+            <a:r>
+              <a:rPr sz="900" b="1" i="0" spc="120">
+                <a:solidFill>
+                  <a:srgbClr val="FFFFFF"/>
+                </a:solidFill>
+                <a:latin typeface="Calibri"/>
+              </a:rPr>
+              <a:t>WHAT WE NEED FROM COLLEAGUES</a:t>
+            </a:r>
+          </a:p>
+        </p:txBody>
+      </p:sp>
+      <p:sp>
+        <p:nvSpPr>
+          <p:cNvPr id="9" name="TextBox 8"/>
+          <p:cNvSpPr txBox="1"/>
+          <p:nvPr/>
+        </p:nvSpPr>
+        <p:spPr>
+          <a:xfrm>
+            <a:off x="1088136" y="3017520"/>
+            <a:ext cx="4590288" cy="274320"/>
+          </a:xfrm>
+          <a:prstGeom prst="rect">
+            <a:avLst/>
+          </a:prstGeom>
+          <a:noFill/>
+        </p:spPr>
+        <p:txBody>
+          <a:bodyPr wrap="square" anchor="t" lIns="0" rIns="0" tIns="0" bIns="0">
+            <a:noAutofit/>
+          </a:bodyPr>
+          <a:lstStyle/>
+          <a:p>
+            <a:pPr algn="l">
+              <a:lnSpc>
+                <a:spcPct val="100000"/>
+              </a:lnSpc>
+            </a:pPr>
+            <a:r>
+              <a:rPr sz="1100" b="0" i="1">
+                <a:solidFill>
+                  <a:srgbClr val="6E6E6E"/>
+                </a:solidFill>
+                <a:latin typeface="Calibri"/>
+              </a:rPr>
+              <a:t>How the faculty can help us grow</a:t>
+            </a:r>
+          </a:p>
+        </p:txBody>
+      </p:sp>
+      <p:sp>
+        <p:nvSpPr>
+          <p:cNvPr id="10" name="Rectangle 9"/>
+          <p:cNvSpPr/>
+          <p:nvPr/>
+        </p:nvSpPr>
+        <p:spPr>
+          <a:xfrm>
+            <a:off x="1106424" y="3493008"/>
+            <a:ext cx="91440" cy="91440"/>
+          </a:xfrm>
+          <a:prstGeom prst="rect">
+            <a:avLst/>
+          </a:prstGeom>
+          <a:solidFill>
+            <a:srgbClr val="E2007A"/>
+          </a:solidFill>
+          <a:ln>
+            <a:noFill/>
+          </a:ln>
+          <a:effectLst/>
+        </p:spPr>
+        <p:style>
+          <a:lnRef idx="1">
+            <a:schemeClr val="accent1"/>
+          </a:lnRef>
+          <a:fillRef idx="3">
+            <a:schemeClr val="accent1"/>
+          </a:fillRef>
+          <a:effectRef idx="2">
+            <a:schemeClr val="accent1"/>
+          </a:effectRef>
+          <a:fontRef idx="minor">
+            <a:schemeClr val="lt1"/>
+          </a:fontRef>
+        </p:style>
+        <p:txBody>
+          <a:bodyPr rtlCol="0" anchor="ctr"/>
+          <a:lstStyle/>
+          <a:p>
+            <a:pPr algn="ctr"/>
+          </a:p>
+        </p:txBody>
+      </p:sp>
+      <p:sp>
+        <p:nvSpPr>
+          <p:cNvPr id="11" name="TextBox 10"/>
+          <p:cNvSpPr txBox="1"/>
+          <p:nvPr/>
+        </p:nvSpPr>
+        <p:spPr>
+          <a:xfrm>
+            <a:off x="1344168" y="3429000"/>
+            <a:ext cx="4315968" cy="548640"/>
+          </a:xfrm>
+          <a:prstGeom prst="rect">
+            <a:avLst/>
+          </a:prstGeom>
+          <a:noFill/>
+        </p:spPr>
+        <p:txBody>
+          <a:bodyPr wrap="square" anchor="t" lIns="0" rIns="0" tIns="0" bIns="0">
+            <a:noAutofit/>
+          </a:bodyPr>
+          <a:lstStyle/>
+          <a:p>
+            <a:pPr algn="l">
+              <a:lnSpc>
+                <a:spcPct val="120000"/>
+              </a:lnSpc>
+            </a:pPr>
+            <a:r>
+              <a:rPr sz="1150" b="0" i="0">
+                <a:solidFill>
+                  <a:srgbClr val="222222"/>
+                </a:solidFill>
+                <a:latin typeface="Calibri"/>
+              </a:rPr>
+              <a:t>Refer student founders to office hours and the entrepreneurship class.</a:t>
+            </a:r>
+          </a:p>
+        </p:txBody>
+      </p:sp>
+      <p:sp>
+        <p:nvSpPr>
+          <p:cNvPr id="12" name="Rectangle 11"/>
+          <p:cNvSpPr/>
+          <p:nvPr/>
+        </p:nvSpPr>
+        <p:spPr>
+          <a:xfrm>
+            <a:off x="1106424" y="3968496"/>
+            <a:ext cx="91440" cy="91440"/>
+          </a:xfrm>
+          <a:prstGeom prst="rect">
+            <a:avLst/>
+          </a:prstGeom>
+          <a:solidFill>
+            <a:srgbClr val="E2007A"/>
+          </a:solidFill>
+          <a:ln>
+            <a:noFill/>
+          </a:ln>
+          <a:effectLst/>
+        </p:spPr>
+        <p:style>
+          <a:lnRef idx="1">
+            <a:schemeClr val="accent1"/>
+          </a:lnRef>
+          <a:fillRef idx="3">
+            <a:schemeClr val="accent1"/>
+          </a:fillRef>
+          <a:effectRef idx="2">
+            <a:schemeClr val="accent1"/>
+          </a:effectRef>
+          <a:fontRef idx="minor">
+            <a:schemeClr val="lt1"/>
+          </a:fontRef>
+        </p:style>
+        <p:txBody>
+          <a:bodyPr rtlCol="0" anchor="ctr"/>
+          <a:lstStyle/>
+          <a:p>
+            <a:pPr algn="ctr"/>
+          </a:p>
+        </p:txBody>
+      </p:sp>
+      <p:sp>
+        <p:nvSpPr>
+          <p:cNvPr id="13" name="TextBox 12"/>
+          <p:cNvSpPr txBox="1"/>
+          <p:nvPr/>
+        </p:nvSpPr>
+        <p:spPr>
+          <a:xfrm>
+            <a:off x="1344168" y="3904487"/>
+            <a:ext cx="4315968" cy="548640"/>
+          </a:xfrm>
+          <a:prstGeom prst="rect">
+            <a:avLst/>
+          </a:prstGeom>
+          <a:noFill/>
+        </p:spPr>
+        <p:txBody>
+          <a:bodyPr wrap="square" anchor="t" lIns="0" rIns="0" tIns="0" bIns="0">
+            <a:noAutofit/>
+          </a:bodyPr>
+          <a:lstStyle/>
+          <a:p>
+            <a:pPr algn="l">
+              <a:lnSpc>
+                <a:spcPct val="120000"/>
+              </a:lnSpc>
+            </a:pPr>
+            <a:r>
+              <a:rPr sz="1150" b="0" i="0">
+                <a:solidFill>
+                  <a:srgbClr val="222222"/>
+                </a:solidFill>
+                <a:latin typeface="Calibri"/>
+              </a:rPr>
+              <a:t>Offer short slots in lectures to reach students early.</a:t>
+            </a:r>
+          </a:p>
+        </p:txBody>
+      </p:sp>
+      <p:sp>
+        <p:nvSpPr>
+          <p:cNvPr id="14" name="Rectangle 13"/>
+          <p:cNvSpPr/>
+          <p:nvPr/>
+        </p:nvSpPr>
+        <p:spPr>
+          <a:xfrm>
+            <a:off x="1106424" y="4443983"/>
+            <a:ext cx="91440" cy="91440"/>
+          </a:xfrm>
+          <a:prstGeom prst="rect">
+            <a:avLst/>
+          </a:prstGeom>
+          <a:solidFill>
+            <a:srgbClr val="E2007A"/>
+          </a:solidFill>
+          <a:ln>
+            <a:noFill/>
+          </a:ln>
+          <a:effectLst/>
+        </p:spPr>
+        <p:style>
+          <a:lnRef idx="1">
+            <a:schemeClr val="accent1"/>
+          </a:lnRef>
+          <a:fillRef idx="3">
+            <a:schemeClr val="accent1"/>
+          </a:fillRef>
+          <a:effectRef idx="2">
+            <a:schemeClr val="accent1"/>
+          </a:effectRef>
+          <a:fontRef idx="minor">
+            <a:schemeClr val="lt1"/>
+          </a:fontRef>
+        </p:style>
+        <p:txBody>
+          <a:bodyPr rtlCol="0" anchor="ctr"/>
+          <a:lstStyle/>
+          <a:p>
+            <a:pPr algn="ctr"/>
+          </a:p>
+        </p:txBody>
+      </p:sp>
+      <p:sp>
+        <p:nvSpPr>
+          <p:cNvPr id="15" name="TextBox 14"/>
+          <p:cNvSpPr txBox="1"/>
+          <p:nvPr/>
+        </p:nvSpPr>
+        <p:spPr>
+          <a:xfrm>
+            <a:off x="1344168" y="4379975"/>
+            <a:ext cx="4315968" cy="548640"/>
+          </a:xfrm>
+          <a:prstGeom prst="rect">
+            <a:avLst/>
+          </a:prstGeom>
+          <a:noFill/>
+        </p:spPr>
+        <p:txBody>
+          <a:bodyPr wrap="square" anchor="t" lIns="0" rIns="0" tIns="0" bIns="0">
+            <a:noAutofit/>
+          </a:bodyPr>
+          <a:lstStyle/>
+          <a:p>
+            <a:pPr algn="l">
+              <a:lnSpc>
+                <a:spcPct val="120000"/>
+              </a:lnSpc>
+            </a:pPr>
+            <a:r>
+              <a:rPr sz="1150" b="0" i="0">
+                <a:solidFill>
+                  <a:srgbClr val="222222"/>
+                </a:solidFill>
+                <a:latin typeface="Calibri"/>
+              </a:rPr>
+              <a:t>Support and resource the room at GreG.</a:t>
+            </a:r>
+          </a:p>
+        </p:txBody>
+      </p:sp>
+      <p:sp>
+        <p:nvSpPr>
+          <p:cNvPr id="16" name="Rectangle 15"/>
+          <p:cNvSpPr/>
+          <p:nvPr/>
+        </p:nvSpPr>
+        <p:spPr>
+          <a:xfrm>
+            <a:off x="1106424" y="4919471"/>
+            <a:ext cx="91440" cy="91440"/>
+          </a:xfrm>
+          <a:prstGeom prst="rect">
+            <a:avLst/>
+          </a:prstGeom>
+          <a:solidFill>
+            <a:srgbClr val="E2007A"/>
+          </a:solidFill>
+          <a:ln>
+            <a:noFill/>
+          </a:ln>
+          <a:effectLst/>
+        </p:spPr>
+        <p:style>
+          <a:lnRef idx="1">
+            <a:schemeClr val="accent1"/>
+          </a:lnRef>
+          <a:fillRef idx="3">
+            <a:schemeClr val="accent1"/>
+          </a:fillRef>
+          <a:effectRef idx="2">
+            <a:schemeClr val="accent1"/>
+          </a:effectRef>
+          <a:fontRef idx="minor">
+            <a:schemeClr val="lt1"/>
+          </a:fontRef>
+        </p:style>
+        <p:txBody>
+          <a:bodyPr rtlCol="0" anchor="ctr"/>
+          <a:lstStyle/>
+          <a:p>
+            <a:pPr algn="ctr"/>
+          </a:p>
+        </p:txBody>
+      </p:sp>
+      <p:sp>
+        <p:nvSpPr>
+          <p:cNvPr id="17" name="TextBox 16"/>
+          <p:cNvSpPr txBox="1"/>
+          <p:nvPr/>
+        </p:nvSpPr>
+        <p:spPr>
+          <a:xfrm>
+            <a:off x="1344168" y="4855463"/>
+            <a:ext cx="4315968" cy="548640"/>
+          </a:xfrm>
+          <a:prstGeom prst="rect">
+            <a:avLst/>
+          </a:prstGeom>
+          <a:noFill/>
+        </p:spPr>
+        <p:txBody>
+          <a:bodyPr wrap="square" anchor="t" lIns="0" rIns="0" tIns="0" bIns="0">
+            <a:noAutofit/>
+          </a:bodyPr>
+          <a:lstStyle/>
+          <a:p>
+            <a:pPr algn="l">
+              <a:lnSpc>
+                <a:spcPct val="120000"/>
+              </a:lnSpc>
+            </a:pPr>
+            <a:r>
+              <a:rPr sz="1150" b="0" i="0">
+                <a:solidFill>
+                  <a:srgbClr val="222222"/>
+                </a:solidFill>
+                <a:latin typeface="Calibri"/>
+              </a:rPr>
+              <a:t>Open doors to industry partners and follow-on funding.</a:t>
+            </a:r>
+          </a:p>
+        </p:txBody>
+      </p:sp>
+      <p:sp>
+        <p:nvSpPr>
+          <p:cNvPr id="18" name="Rounded Rectangle 17"/>
+          <p:cNvSpPr/>
+          <p:nvPr/>
+        </p:nvSpPr>
+        <p:spPr>
+          <a:xfrm>
+            <a:off x="6327647" y="2286000"/>
+            <a:ext cx="5230368" cy="3200400"/>
           </a:xfrm>
           <a:prstGeom prst="roundRect">
             <a:avLst>
@@ -10751,7 +11392,7 @@
           </a:solidFill>
           <a:ln w="12700">
             <a:solidFill>
-              <a:srgbClr val="B6267C"/>
+              <a:srgbClr val="E2007A"/>
             </a:solidFill>
           </a:ln>
           <a:effectLst/>
@@ -10780,20 +11421,20 @@
       </p:sp>
       <p:sp>
         <p:nvSpPr>
-          <p:cNvPr id="7" name="Rectangle 6"/>
+          <p:cNvPr id="19" name="Rectangle 18"/>
           <p:cNvSpPr/>
           <p:nvPr/>
         </p:nvSpPr>
         <p:spPr>
           <a:xfrm>
-            <a:off x="1069848" y="2578608"/>
-            <a:ext cx="2920227" cy="274320"/>
+            <a:off x="6620255" y="2578608"/>
+            <a:ext cx="2155057" cy="274320"/>
           </a:xfrm>
           <a:prstGeom prst="rect">
             <a:avLst/>
           </a:prstGeom>
           <a:solidFill>
-            <a:srgbClr val="B6267C"/>
+            <a:srgbClr val="E2007A"/>
           </a:solidFill>
           <a:ln>
             <a:noFill/>
@@ -10824,14 +11465,14 @@
       </p:sp>
       <p:sp>
         <p:nvSpPr>
-          <p:cNvPr id="8" name="TextBox 7"/>
-          <p:cNvSpPr txBox="1"/>
-          <p:nvPr/>
-        </p:nvSpPr>
-        <p:spPr>
-          <a:xfrm>
-            <a:off x="1069848" y="2578608"/>
-            <a:ext cx="2920227" cy="274320"/>
+          <p:cNvPr id="20" name="TextBox 19"/>
+          <p:cNvSpPr txBox="1"/>
+          <p:nvPr/>
+        </p:nvSpPr>
+        <p:spPr>
+          <a:xfrm>
+            <a:off x="6620255" y="2578608"/>
+            <a:ext cx="2155057" cy="274320"/>
           </a:xfrm>
           <a:prstGeom prst="rect">
             <a:avLst/>
@@ -10854,22 +11495,22 @@
                 <a:solidFill>
                   <a:srgbClr val="FFFFFF"/>
                 </a:solidFill>
-                <a:latin typeface="Arial"/>
-              </a:rPr>
-              <a:t>WHAT WE NEED FROM COLLEAGUES</a:t>
-            </a:r>
-          </a:p>
-        </p:txBody>
-      </p:sp>
-      <p:sp>
-        <p:nvSpPr>
-          <p:cNvPr id="9" name="TextBox 8"/>
-          <p:cNvSpPr txBox="1"/>
-          <p:nvPr/>
-        </p:nvSpPr>
-        <p:spPr>
-          <a:xfrm>
-            <a:off x="1088136" y="2999232"/>
+                <a:latin typeface="Calibri"/>
+              </a:rPr>
+              <a:t>WHERE WE GO FROM HERE</a:t>
+            </a:r>
+          </a:p>
+        </p:txBody>
+      </p:sp>
+      <p:sp>
+        <p:nvSpPr>
+          <p:cNvPr id="21" name="TextBox 20"/>
+          <p:cNvSpPr txBox="1"/>
+          <p:nvPr/>
+        </p:nvSpPr>
+        <p:spPr>
+          <a:xfrm>
+            <a:off x="6638543" y="3017520"/>
             <a:ext cx="4590288" cy="274320"/>
           </a:xfrm>
           <a:prstGeom prst="rect">
@@ -10893,29 +11534,29 @@
                 <a:solidFill>
                   <a:srgbClr val="6E6E6E"/>
                 </a:solidFill>
-                <a:latin typeface="Arial"/>
-              </a:rPr>
-              <a:t>How the faculty can help us grow</a:t>
-            </a:r>
-          </a:p>
-        </p:txBody>
-      </p:sp>
-      <p:sp>
-        <p:nvSpPr>
-          <p:cNvPr id="10" name="Rectangle 9"/>
+                <a:latin typeface="Calibri"/>
+              </a:rPr>
+              <a:t>The direction from here</a:t>
+            </a:r>
+          </a:p>
+        </p:txBody>
+      </p:sp>
+      <p:sp>
+        <p:nvSpPr>
+          <p:cNvPr id="22" name="Rectangle 21"/>
           <p:cNvSpPr/>
           <p:nvPr/>
         </p:nvSpPr>
         <p:spPr>
           <a:xfrm>
-            <a:off x="1106424" y="3447288"/>
+            <a:off x="6656831" y="3493008"/>
             <a:ext cx="91440" cy="91440"/>
           </a:xfrm>
           <a:prstGeom prst="rect">
             <a:avLst/>
           </a:prstGeom>
           <a:solidFill>
-            <a:srgbClr val="B6267C"/>
+            <a:srgbClr val="E2007A"/>
           </a:solidFill>
           <a:ln>
             <a:noFill/>
@@ -10946,13 +11587,13 @@
       </p:sp>
       <p:sp>
         <p:nvSpPr>
-          <p:cNvPr id="11" name="TextBox 10"/>
-          <p:cNvSpPr txBox="1"/>
-          <p:nvPr/>
-        </p:nvSpPr>
-        <p:spPr>
-          <a:xfrm>
-            <a:off x="1344168" y="3383280"/>
+          <p:cNvPr id="23" name="TextBox 22"/>
+          <p:cNvSpPr txBox="1"/>
+          <p:nvPr/>
+        </p:nvSpPr>
+        <p:spPr>
+          <a:xfrm>
+            <a:off x="6894575" y="3429000"/>
             <a:ext cx="4315968" cy="548640"/>
           </a:xfrm>
           <a:prstGeom prst="rect">
@@ -10976,29 +11617,29 @@
                 <a:solidFill>
                   <a:srgbClr val="222222"/>
                 </a:solidFill>
-                <a:latin typeface="Arial"/>
-              </a:rPr>
-              <a:t>Refer student founders to office hours and the entrepreneurship class.</a:t>
-            </a:r>
-          </a:p>
-        </p:txBody>
-      </p:sp>
-      <p:sp>
-        <p:nvSpPr>
-          <p:cNvPr id="12" name="Rectangle 11"/>
+                <a:latin typeface="Calibri"/>
+              </a:rPr>
+              <a:t>Grow the number of active teams term over term.</a:t>
+            </a:r>
+          </a:p>
+        </p:txBody>
+      </p:sp>
+      <p:sp>
+        <p:nvSpPr>
+          <p:cNvPr id="24" name="Rectangle 23"/>
           <p:cNvSpPr/>
           <p:nvPr/>
         </p:nvSpPr>
         <p:spPr>
           <a:xfrm>
-            <a:off x="1106424" y="3922776"/>
+            <a:off x="6656831" y="3968496"/>
             <a:ext cx="91440" cy="91440"/>
           </a:xfrm>
           <a:prstGeom prst="rect">
             <a:avLst/>
           </a:prstGeom>
           <a:solidFill>
-            <a:srgbClr val="B6267C"/>
+            <a:srgbClr val="E2007A"/>
           </a:solidFill>
           <a:ln>
             <a:noFill/>
@@ -11029,13 +11670,13 @@
       </p:sp>
       <p:sp>
         <p:nvSpPr>
-          <p:cNvPr id="13" name="TextBox 12"/>
-          <p:cNvSpPr txBox="1"/>
-          <p:nvPr/>
-        </p:nvSpPr>
-        <p:spPr>
-          <a:xfrm>
-            <a:off x="1344168" y="3858768"/>
+          <p:cNvPr id="25" name="TextBox 24"/>
+          <p:cNvSpPr txBox="1"/>
+          <p:nvPr/>
+        </p:nvSpPr>
+        <p:spPr>
+          <a:xfrm>
+            <a:off x="6894575" y="3904487"/>
             <a:ext cx="4315968" cy="548640"/>
           </a:xfrm>
           <a:prstGeom prst="rect">
@@ -11059,29 +11700,29 @@
                 <a:solidFill>
                   <a:srgbClr val="222222"/>
                 </a:solidFill>
-                <a:latin typeface="Arial"/>
-              </a:rPr>
-              <a:t>Offer short slots in lectures to reach students early.</a:t>
-            </a:r>
-          </a:p>
-        </p:txBody>
-      </p:sp>
-      <p:sp>
-        <p:nvSpPr>
-          <p:cNvPr id="14" name="Rectangle 13"/>
+                <a:latin typeface="Calibri"/>
+              </a:rPr>
+              <a:t>Move the funnel from estimate to measurement, including GreG room booking.</a:t>
+            </a:r>
+          </a:p>
+        </p:txBody>
+      </p:sp>
+      <p:sp>
+        <p:nvSpPr>
+          <p:cNvPr id="26" name="Rectangle 25"/>
           <p:cNvSpPr/>
           <p:nvPr/>
         </p:nvSpPr>
         <p:spPr>
           <a:xfrm>
-            <a:off x="1106424" y="4398264"/>
+            <a:off x="6656831" y="4443983"/>
             <a:ext cx="91440" cy="91440"/>
           </a:xfrm>
           <a:prstGeom prst="rect">
             <a:avLst/>
           </a:prstGeom>
           <a:solidFill>
-            <a:srgbClr val="B6267C"/>
+            <a:srgbClr val="E2007A"/>
           </a:solidFill>
           <a:ln>
             <a:noFill/>
@@ -11112,13 +11753,13 @@
       </p:sp>
       <p:sp>
         <p:nvSpPr>
-          <p:cNvPr id="15" name="TextBox 14"/>
-          <p:cNvSpPr txBox="1"/>
-          <p:nvPr/>
-        </p:nvSpPr>
-        <p:spPr>
-          <a:xfrm>
-            <a:off x="1344168" y="4334256"/>
+          <p:cNvPr id="27" name="TextBox 26"/>
+          <p:cNvSpPr txBox="1"/>
+          <p:nvPr/>
+        </p:nvSpPr>
+        <p:spPr>
+          <a:xfrm>
+            <a:off x="6894575" y="4379975"/>
             <a:ext cx="4315968" cy="548640"/>
           </a:xfrm>
           <a:prstGeom prst="rect">
@@ -11142,29 +11783,29 @@
                 <a:solidFill>
                   <a:srgbClr val="222222"/>
                 </a:solidFill>
-                <a:latin typeface="Arial"/>
-              </a:rPr>
-              <a:t>Support and resource the room at GreG.</a:t>
-            </a:r>
-          </a:p>
-        </p:txBody>
-      </p:sp>
-      <p:sp>
-        <p:nvSpPr>
-          <p:cNvPr id="16" name="Rectangle 15"/>
+                <a:latin typeface="Calibri"/>
+              </a:rPr>
+              <a:t>Track people reached, projects built and teams since 2022.</a:t>
+            </a:r>
+          </a:p>
+        </p:txBody>
+      </p:sp>
+      <p:sp>
+        <p:nvSpPr>
+          <p:cNvPr id="28" name="Rectangle 27"/>
           <p:cNvSpPr/>
           <p:nvPr/>
         </p:nvSpPr>
         <p:spPr>
           <a:xfrm>
-            <a:off x="1106424" y="4873752"/>
+            <a:off x="6656831" y="4919471"/>
             <a:ext cx="91440" cy="91440"/>
           </a:xfrm>
           <a:prstGeom prst="rect">
             <a:avLst/>
           </a:prstGeom>
           <a:solidFill>
-            <a:srgbClr val="B6267C"/>
+            <a:srgbClr val="E2007A"/>
           </a:solidFill>
           <a:ln>
             <a:noFill/>
@@ -11195,13 +11836,13 @@
       </p:sp>
       <p:sp>
         <p:nvSpPr>
-          <p:cNvPr id="17" name="TextBox 16"/>
-          <p:cNvSpPr txBox="1"/>
-          <p:nvPr/>
-        </p:nvSpPr>
-        <p:spPr>
-          <a:xfrm>
-            <a:off x="1344168" y="4809744"/>
+          <p:cNvPr id="29" name="TextBox 28"/>
+          <p:cNvSpPr txBox="1"/>
+          <p:nvPr/>
+        </p:nvSpPr>
+        <p:spPr>
+          <a:xfrm>
+            <a:off x="6894575" y="4855463"/>
             <a:ext cx="4315968" cy="548640"/>
           </a:xfrm>
           <a:prstGeom prst="rect">
@@ -11225,509 +11866,7 @@
                 <a:solidFill>
                   <a:srgbClr val="222222"/>
                 </a:solidFill>
-                <a:latin typeface="Arial"/>
-              </a:rPr>
-              <a:t>Open doors to industry partners and follow-on funding.</a:t>
-            </a:r>
-          </a:p>
-        </p:txBody>
-      </p:sp>
-      <p:sp>
-        <p:nvSpPr>
-          <p:cNvPr id="18" name="Rounded Rectangle 17"/>
-          <p:cNvSpPr/>
-          <p:nvPr/>
-        </p:nvSpPr>
-        <p:spPr>
-          <a:xfrm>
-            <a:off x="6327647" y="2286000"/>
-            <a:ext cx="5230368" cy="3108960"/>
-          </a:xfrm>
-          <a:prstGeom prst="roundRect">
-            <a:avLst>
-              <a:gd name="adj" fmla="val 3000"/>
-            </a:avLst>
-          </a:prstGeom>
-          <a:solidFill>
-            <a:srgbClr val="FFFFFF"/>
-          </a:solidFill>
-          <a:ln w="12700">
-            <a:solidFill>
-              <a:srgbClr val="B6267C"/>
-            </a:solidFill>
-          </a:ln>
-          <a:effectLst/>
-        </p:spPr>
-        <p:style>
-          <a:lnRef idx="1">
-            <a:schemeClr val="accent1"/>
-          </a:lnRef>
-          <a:fillRef idx="3">
-            <a:schemeClr val="accent1"/>
-          </a:fillRef>
-          <a:effectRef idx="2">
-            <a:schemeClr val="accent1"/>
-          </a:effectRef>
-          <a:fontRef idx="minor">
-            <a:schemeClr val="lt1"/>
-          </a:fontRef>
-        </p:style>
-        <p:txBody>
-          <a:bodyPr rtlCol="0" anchor="ctr"/>
-          <a:lstStyle/>
-          <a:p>
-            <a:pPr algn="ctr"/>
-          </a:p>
-        </p:txBody>
-      </p:sp>
-      <p:sp>
-        <p:nvSpPr>
-          <p:cNvPr id="19" name="Rectangle 18"/>
-          <p:cNvSpPr/>
-          <p:nvPr/>
-        </p:nvSpPr>
-        <p:spPr>
-          <a:xfrm>
-            <a:off x="6620255" y="2578608"/>
-            <a:ext cx="2240462" cy="274320"/>
-          </a:xfrm>
-          <a:prstGeom prst="rect">
-            <a:avLst/>
-          </a:prstGeom>
-          <a:solidFill>
-            <a:srgbClr val="B6267C"/>
-          </a:solidFill>
-          <a:ln>
-            <a:noFill/>
-          </a:ln>
-          <a:effectLst/>
-        </p:spPr>
-        <p:style>
-          <a:lnRef idx="1">
-            <a:schemeClr val="accent1"/>
-          </a:lnRef>
-          <a:fillRef idx="3">
-            <a:schemeClr val="accent1"/>
-          </a:fillRef>
-          <a:effectRef idx="2">
-            <a:schemeClr val="accent1"/>
-          </a:effectRef>
-          <a:fontRef idx="minor">
-            <a:schemeClr val="lt1"/>
-          </a:fontRef>
-        </p:style>
-        <p:txBody>
-          <a:bodyPr rtlCol="0" anchor="ctr"/>
-          <a:lstStyle/>
-          <a:p>
-            <a:pPr algn="ctr"/>
-          </a:p>
-        </p:txBody>
-      </p:sp>
-      <p:sp>
-        <p:nvSpPr>
-          <p:cNvPr id="20" name="TextBox 19"/>
-          <p:cNvSpPr txBox="1"/>
-          <p:nvPr/>
-        </p:nvSpPr>
-        <p:spPr>
-          <a:xfrm>
-            <a:off x="6620255" y="2578608"/>
-            <a:ext cx="2240462" cy="274320"/>
-          </a:xfrm>
-          <a:prstGeom prst="rect">
-            <a:avLst/>
-          </a:prstGeom>
-          <a:noFill/>
-        </p:spPr>
-        <p:txBody>
-          <a:bodyPr wrap="square" anchor="ctr" lIns="0" rIns="0" tIns="0" bIns="0">
-            <a:noAutofit/>
-          </a:bodyPr>
-          <a:lstStyle/>
-          <a:p>
-            <a:pPr algn="ctr">
-              <a:lnSpc>
-                <a:spcPct val="100000"/>
-              </a:lnSpc>
-            </a:pPr>
-            <a:r>
-              <a:rPr sz="900" b="1" i="0" spc="120">
-                <a:solidFill>
-                  <a:srgbClr val="FFFFFF"/>
-                </a:solidFill>
-                <a:latin typeface="Arial"/>
-              </a:rPr>
-              <a:t>WHERE WE GO FROM HERE</a:t>
-            </a:r>
-          </a:p>
-        </p:txBody>
-      </p:sp>
-      <p:sp>
-        <p:nvSpPr>
-          <p:cNvPr id="21" name="TextBox 20"/>
-          <p:cNvSpPr txBox="1"/>
-          <p:nvPr/>
-        </p:nvSpPr>
-        <p:spPr>
-          <a:xfrm>
-            <a:off x="6638543" y="2999232"/>
-            <a:ext cx="4590288" cy="274320"/>
-          </a:xfrm>
-          <a:prstGeom prst="rect">
-            <a:avLst/>
-          </a:prstGeom>
-          <a:noFill/>
-        </p:spPr>
-        <p:txBody>
-          <a:bodyPr wrap="square" anchor="t" lIns="0" rIns="0" tIns="0" bIns="0">
-            <a:noAutofit/>
-          </a:bodyPr>
-          <a:lstStyle/>
-          <a:p>
-            <a:pPr algn="l">
-              <a:lnSpc>
-                <a:spcPct val="100000"/>
-              </a:lnSpc>
-            </a:pPr>
-            <a:r>
-              <a:rPr sz="1100" b="0" i="1">
-                <a:solidFill>
-                  <a:srgbClr val="6E6E6E"/>
-                </a:solidFill>
-                <a:latin typeface="Arial"/>
-              </a:rPr>
-              <a:t>The direction from here</a:t>
-            </a:r>
-          </a:p>
-        </p:txBody>
-      </p:sp>
-      <p:sp>
-        <p:nvSpPr>
-          <p:cNvPr id="22" name="Rectangle 21"/>
-          <p:cNvSpPr/>
-          <p:nvPr/>
-        </p:nvSpPr>
-        <p:spPr>
-          <a:xfrm>
-            <a:off x="6656831" y="3447288"/>
-            <a:ext cx="91440" cy="91440"/>
-          </a:xfrm>
-          <a:prstGeom prst="rect">
-            <a:avLst/>
-          </a:prstGeom>
-          <a:solidFill>
-            <a:srgbClr val="B6267C"/>
-          </a:solidFill>
-          <a:ln>
-            <a:noFill/>
-          </a:ln>
-          <a:effectLst/>
-        </p:spPr>
-        <p:style>
-          <a:lnRef idx="1">
-            <a:schemeClr val="accent1"/>
-          </a:lnRef>
-          <a:fillRef idx="3">
-            <a:schemeClr val="accent1"/>
-          </a:fillRef>
-          <a:effectRef idx="2">
-            <a:schemeClr val="accent1"/>
-          </a:effectRef>
-          <a:fontRef idx="minor">
-            <a:schemeClr val="lt1"/>
-          </a:fontRef>
-        </p:style>
-        <p:txBody>
-          <a:bodyPr rtlCol="0" anchor="ctr"/>
-          <a:lstStyle/>
-          <a:p>
-            <a:pPr algn="ctr"/>
-          </a:p>
-        </p:txBody>
-      </p:sp>
-      <p:sp>
-        <p:nvSpPr>
-          <p:cNvPr id="23" name="TextBox 22"/>
-          <p:cNvSpPr txBox="1"/>
-          <p:nvPr/>
-        </p:nvSpPr>
-        <p:spPr>
-          <a:xfrm>
-            <a:off x="6894575" y="3383280"/>
-            <a:ext cx="4315968" cy="548640"/>
-          </a:xfrm>
-          <a:prstGeom prst="rect">
-            <a:avLst/>
-          </a:prstGeom>
-          <a:noFill/>
-        </p:spPr>
-        <p:txBody>
-          <a:bodyPr wrap="square" anchor="t" lIns="0" rIns="0" tIns="0" bIns="0">
-            <a:noAutofit/>
-          </a:bodyPr>
-          <a:lstStyle/>
-          <a:p>
-            <a:pPr algn="l">
-              <a:lnSpc>
-                <a:spcPct val="120000"/>
-              </a:lnSpc>
-            </a:pPr>
-            <a:r>
-              <a:rPr sz="1150" b="0" i="0">
-                <a:solidFill>
-                  <a:srgbClr val="222222"/>
-                </a:solidFill>
-                <a:latin typeface="Arial"/>
-              </a:rPr>
-              <a:t>Grow the number of active teams term over term.</a:t>
-            </a:r>
-          </a:p>
-        </p:txBody>
-      </p:sp>
-      <p:sp>
-        <p:nvSpPr>
-          <p:cNvPr id="24" name="Rectangle 23"/>
-          <p:cNvSpPr/>
-          <p:nvPr/>
-        </p:nvSpPr>
-        <p:spPr>
-          <a:xfrm>
-            <a:off x="6656831" y="3922776"/>
-            <a:ext cx="91440" cy="91440"/>
-          </a:xfrm>
-          <a:prstGeom prst="rect">
-            <a:avLst/>
-          </a:prstGeom>
-          <a:solidFill>
-            <a:srgbClr val="B6267C"/>
-          </a:solidFill>
-          <a:ln>
-            <a:noFill/>
-          </a:ln>
-          <a:effectLst/>
-        </p:spPr>
-        <p:style>
-          <a:lnRef idx="1">
-            <a:schemeClr val="accent1"/>
-          </a:lnRef>
-          <a:fillRef idx="3">
-            <a:schemeClr val="accent1"/>
-          </a:fillRef>
-          <a:effectRef idx="2">
-            <a:schemeClr val="accent1"/>
-          </a:effectRef>
-          <a:fontRef idx="minor">
-            <a:schemeClr val="lt1"/>
-          </a:fontRef>
-        </p:style>
-        <p:txBody>
-          <a:bodyPr rtlCol="0" anchor="ctr"/>
-          <a:lstStyle/>
-          <a:p>
-            <a:pPr algn="ctr"/>
-          </a:p>
-        </p:txBody>
-      </p:sp>
-      <p:sp>
-        <p:nvSpPr>
-          <p:cNvPr id="25" name="TextBox 24"/>
-          <p:cNvSpPr txBox="1"/>
-          <p:nvPr/>
-        </p:nvSpPr>
-        <p:spPr>
-          <a:xfrm>
-            <a:off x="6894575" y="3858768"/>
-            <a:ext cx="4315968" cy="548640"/>
-          </a:xfrm>
-          <a:prstGeom prst="rect">
-            <a:avLst/>
-          </a:prstGeom>
-          <a:noFill/>
-        </p:spPr>
-        <p:txBody>
-          <a:bodyPr wrap="square" anchor="t" lIns="0" rIns="0" tIns="0" bIns="0">
-            <a:noAutofit/>
-          </a:bodyPr>
-          <a:lstStyle/>
-          <a:p>
-            <a:pPr algn="l">
-              <a:lnSpc>
-                <a:spcPct val="120000"/>
-              </a:lnSpc>
-            </a:pPr>
-            <a:r>
-              <a:rPr sz="1150" b="0" i="0">
-                <a:solidFill>
-                  <a:srgbClr val="222222"/>
-                </a:solidFill>
-                <a:latin typeface="Arial"/>
-              </a:rPr>
-              <a:t>Move the funnel from estimate to measurement, including GreG room booking.</a:t>
-            </a:r>
-          </a:p>
-        </p:txBody>
-      </p:sp>
-      <p:sp>
-        <p:nvSpPr>
-          <p:cNvPr id="26" name="Rectangle 25"/>
-          <p:cNvSpPr/>
-          <p:nvPr/>
-        </p:nvSpPr>
-        <p:spPr>
-          <a:xfrm>
-            <a:off x="6656831" y="4398264"/>
-            <a:ext cx="91440" cy="91440"/>
-          </a:xfrm>
-          <a:prstGeom prst="rect">
-            <a:avLst/>
-          </a:prstGeom>
-          <a:solidFill>
-            <a:srgbClr val="B6267C"/>
-          </a:solidFill>
-          <a:ln>
-            <a:noFill/>
-          </a:ln>
-          <a:effectLst/>
-        </p:spPr>
-        <p:style>
-          <a:lnRef idx="1">
-            <a:schemeClr val="accent1"/>
-          </a:lnRef>
-          <a:fillRef idx="3">
-            <a:schemeClr val="accent1"/>
-          </a:fillRef>
-          <a:effectRef idx="2">
-            <a:schemeClr val="accent1"/>
-          </a:effectRef>
-          <a:fontRef idx="minor">
-            <a:schemeClr val="lt1"/>
-          </a:fontRef>
-        </p:style>
-        <p:txBody>
-          <a:bodyPr rtlCol="0" anchor="ctr"/>
-          <a:lstStyle/>
-          <a:p>
-            <a:pPr algn="ctr"/>
-          </a:p>
-        </p:txBody>
-      </p:sp>
-      <p:sp>
-        <p:nvSpPr>
-          <p:cNvPr id="27" name="TextBox 26"/>
-          <p:cNvSpPr txBox="1"/>
-          <p:nvPr/>
-        </p:nvSpPr>
-        <p:spPr>
-          <a:xfrm>
-            <a:off x="6894575" y="4334256"/>
-            <a:ext cx="4315968" cy="548640"/>
-          </a:xfrm>
-          <a:prstGeom prst="rect">
-            <a:avLst/>
-          </a:prstGeom>
-          <a:noFill/>
-        </p:spPr>
-        <p:txBody>
-          <a:bodyPr wrap="square" anchor="t" lIns="0" rIns="0" tIns="0" bIns="0">
-            <a:noAutofit/>
-          </a:bodyPr>
-          <a:lstStyle/>
-          <a:p>
-            <a:pPr algn="l">
-              <a:lnSpc>
-                <a:spcPct val="120000"/>
-              </a:lnSpc>
-            </a:pPr>
-            <a:r>
-              <a:rPr sz="1150" b="0" i="0">
-                <a:solidFill>
-                  <a:srgbClr val="222222"/>
-                </a:solidFill>
-                <a:latin typeface="Arial"/>
-              </a:rPr>
-              <a:t>Track people reached, projects built and teams since 2022.</a:t>
-            </a:r>
-          </a:p>
-        </p:txBody>
-      </p:sp>
-      <p:sp>
-        <p:nvSpPr>
-          <p:cNvPr id="28" name="Rectangle 27"/>
-          <p:cNvSpPr/>
-          <p:nvPr/>
-        </p:nvSpPr>
-        <p:spPr>
-          <a:xfrm>
-            <a:off x="6656831" y="4873752"/>
-            <a:ext cx="91440" cy="91440"/>
-          </a:xfrm>
-          <a:prstGeom prst="rect">
-            <a:avLst/>
-          </a:prstGeom>
-          <a:solidFill>
-            <a:srgbClr val="B6267C"/>
-          </a:solidFill>
-          <a:ln>
-            <a:noFill/>
-          </a:ln>
-          <a:effectLst/>
-        </p:spPr>
-        <p:style>
-          <a:lnRef idx="1">
-            <a:schemeClr val="accent1"/>
-          </a:lnRef>
-          <a:fillRef idx="3">
-            <a:schemeClr val="accent1"/>
-          </a:fillRef>
-          <a:effectRef idx="2">
-            <a:schemeClr val="accent1"/>
-          </a:effectRef>
-          <a:fontRef idx="minor">
-            <a:schemeClr val="lt1"/>
-          </a:fontRef>
-        </p:style>
-        <p:txBody>
-          <a:bodyPr rtlCol="0" anchor="ctr"/>
-          <a:lstStyle/>
-          <a:p>
-            <a:pPr algn="ctr"/>
-          </a:p>
-        </p:txBody>
-      </p:sp>
-      <p:sp>
-        <p:nvSpPr>
-          <p:cNvPr id="29" name="TextBox 28"/>
-          <p:cNvSpPr txBox="1"/>
-          <p:nvPr/>
-        </p:nvSpPr>
-        <p:spPr>
-          <a:xfrm>
-            <a:off x="6894575" y="4809744"/>
-            <a:ext cx="4315968" cy="548640"/>
-          </a:xfrm>
-          <a:prstGeom prst="rect">
-            <a:avLst/>
-          </a:prstGeom>
-          <a:noFill/>
-        </p:spPr>
-        <p:txBody>
-          <a:bodyPr wrap="square" anchor="t" lIns="0" rIns="0" tIns="0" bIns="0">
-            <a:noAutofit/>
-          </a:bodyPr>
-          <a:lstStyle/>
-          <a:p>
-            <a:pPr algn="l">
-              <a:lnSpc>
-                <a:spcPct val="120000"/>
-              </a:lnSpc>
-            </a:pPr>
-            <a:r>
-              <a:rPr sz="1150" b="0" i="0">
-                <a:solidFill>
-                  <a:srgbClr val="222222"/>
-                </a:solidFill>
-                <a:latin typeface="Arial"/>
+                <a:latin typeface="Calibri"/>
               </a:rPr>
               <a:t>Turn more early conversations into funded ventures.</a:t>
             </a:r>
@@ -11810,7 +11949,7 @@
                 <a:solidFill>
                   <a:srgbClr val="6E6E6E"/>
                 </a:solidFill>
-                <a:latin typeface="Arial"/>
+                <a:latin typeface="Calibri"/>
               </a:rPr>
               <a:t>THD · ZFE</a:t>
             </a:r>
@@ -11847,9 +11986,9 @@
             <a:r>
               <a:rPr sz="850" b="1" i="0">
                 <a:solidFill>
-                  <a:srgbClr val="B6267C"/>
-                </a:solidFill>
-                <a:latin typeface="Arial"/>
+                  <a:srgbClr val="E2007A"/>
+                </a:solidFill>
+                <a:latin typeface="Calibri"/>
               </a:rPr>
               <a:t>07</a:t>
             </a:r>
@@ -11858,7 +11997,7 @@
                 <a:solidFill>
                   <a:srgbClr val="6E6E6E"/>
                 </a:solidFill>
-                <a:latin typeface="Arial"/>
+                <a:latin typeface="Calibri"/>
               </a:rPr>
               <a:t>  /  08</a:t>
             </a:r>
@@ -11883,22 +12022,46 @@
         <p:nvPr/>
       </p:nvGrpSpPr>
       <p:grpSpPr/>
-      <p:sp>
-        <p:nvSpPr>
-          <p:cNvPr id="2" name="Rectangle 1"/>
+      <p:pic>
+        <p:nvPicPr>
+          <p:cNvPr id="2" name="Picture 1" descr="closing_hero.jpg"/>
+          <p:cNvPicPr>
+            <a:picLocks noChangeAspect="1"/>
+          </p:cNvPicPr>
+          <p:nvPr/>
+        </p:nvPicPr>
+        <p:blipFill>
+          <a:blip r:embed="rId2"/>
+          <a:stretch>
+            <a:fillRect/>
+          </a:stretch>
+        </p:blipFill>
+        <p:spPr>
+          <a:xfrm>
+            <a:off x="0" y="0"/>
+            <a:ext cx="12191695" cy="6858000"/>
+          </a:xfrm>
+          <a:prstGeom prst="rect">
+            <a:avLst/>
+          </a:prstGeom>
+        </p:spPr>
+      </p:pic>
+      <p:sp>
+        <p:nvSpPr>
+          <p:cNvPr id="3" name="Rectangle 2"/>
           <p:cNvSpPr/>
           <p:nvPr/>
         </p:nvSpPr>
         <p:spPr>
           <a:xfrm>
             <a:off x="0" y="0"/>
-            <a:ext cx="12192000" cy="6858000"/>
+            <a:ext cx="256032" cy="6858000"/>
           </a:xfrm>
           <a:prstGeom prst="rect">
             <a:avLst/>
           </a:prstGeom>
           <a:solidFill>
-            <a:srgbClr val="1C1C1E"/>
+            <a:srgbClr val="FFFFFF"/>
           </a:solidFill>
           <a:ln>
             <a:noFill/>
@@ -11929,20 +12092,20 @@
       </p:sp>
       <p:sp>
         <p:nvSpPr>
-          <p:cNvPr id="3" name="Rectangle 2"/>
+          <p:cNvPr id="4" name="Rectangle 3"/>
           <p:cNvSpPr/>
           <p:nvPr/>
         </p:nvSpPr>
         <p:spPr>
           <a:xfrm>
-            <a:off x="0" y="0"/>
-            <a:ext cx="256032" cy="6858000"/>
+            <a:off x="777240" y="777240"/>
+            <a:ext cx="3148462" cy="274320"/>
           </a:xfrm>
           <a:prstGeom prst="rect">
             <a:avLst/>
           </a:prstGeom>
           <a:solidFill>
-            <a:srgbClr val="B6267C"/>
+            <a:srgbClr val="FFFFFF"/>
           </a:solidFill>
           <a:ln>
             <a:noFill/>
@@ -11973,20 +12136,153 @@
       </p:sp>
       <p:sp>
         <p:nvSpPr>
-          <p:cNvPr id="4" name="Rectangle 3"/>
+          <p:cNvPr id="5" name="TextBox 4"/>
+          <p:cNvSpPr txBox="1"/>
+          <p:nvPr/>
+        </p:nvSpPr>
+        <p:spPr>
+          <a:xfrm>
+            <a:off x="777240" y="777240"/>
+            <a:ext cx="3148462" cy="274320"/>
+          </a:xfrm>
+          <a:prstGeom prst="rect">
+            <a:avLst/>
+          </a:prstGeom>
+          <a:noFill/>
+        </p:spPr>
+        <p:txBody>
+          <a:bodyPr wrap="square" anchor="ctr" lIns="0" rIns="0" tIns="0" bIns="0">
+            <a:noAutofit/>
+          </a:bodyPr>
+          <a:lstStyle/>
+          <a:p>
+            <a:pPr algn="ctr">
+              <a:lnSpc>
+                <a:spcPct val="100000"/>
+              </a:lnSpc>
+            </a:pPr>
+            <a:r>
+              <a:rPr sz="1100" b="1" i="0" spc="120">
+                <a:solidFill>
+                  <a:srgbClr val="E2007A"/>
+                </a:solidFill>
+                <a:latin typeface="Calibri"/>
+              </a:rPr>
+              <a:t>FACULTY BOARD · 16.06.2026</a:t>
+            </a:r>
+          </a:p>
+        </p:txBody>
+      </p:sp>
+      <p:sp>
+        <p:nvSpPr>
+          <p:cNvPr id="6" name="TextBox 5"/>
+          <p:cNvSpPr txBox="1"/>
+          <p:nvPr/>
+        </p:nvSpPr>
+        <p:spPr>
+          <a:xfrm>
+            <a:off x="758952" y="2103120"/>
+            <a:ext cx="7772400" cy="1828800"/>
+          </a:xfrm>
+          <a:prstGeom prst="rect">
+            <a:avLst/>
+          </a:prstGeom>
+          <a:noFill/>
+        </p:spPr>
+        <p:txBody>
+          <a:bodyPr wrap="square" anchor="t" lIns="0" rIns="0" tIns="0" bIns="0">
+            <a:noAutofit/>
+          </a:bodyPr>
+          <a:lstStyle/>
+          <a:p>
+            <a:pPr algn="l">
+              <a:lnSpc>
+                <a:spcPct val="98000"/>
+              </a:lnSpc>
+            </a:pPr>
+            <a:r>
+              <a:rPr sz="5600" b="1" i="0">
+                <a:solidFill>
+                  <a:srgbClr val="FFFFFF"/>
+                </a:solidFill>
+                <a:latin typeface="Calibri"/>
+              </a:rPr>
+              <a:t>Let's grow this</a:t>
+            </a:r>
+          </a:p>
+          <a:p>
+            <a:pPr algn="l">
+              <a:lnSpc>
+                <a:spcPct val="98000"/>
+              </a:lnSpc>
+            </a:pPr>
+            <a:r>
+              <a:rPr sz="5600" b="1" i="0">
+                <a:solidFill>
+                  <a:srgbClr val="2A0A1C"/>
+                </a:solidFill>
+                <a:latin typeface="Calibri"/>
+              </a:rPr>
+              <a:t>together.</a:t>
+            </a:r>
+          </a:p>
+        </p:txBody>
+      </p:sp>
+      <p:sp>
+        <p:nvSpPr>
+          <p:cNvPr id="7" name="TextBox 6"/>
+          <p:cNvSpPr txBox="1"/>
+          <p:nvPr/>
+        </p:nvSpPr>
+        <p:spPr>
+          <a:xfrm>
+            <a:off x="777240" y="4114800"/>
+            <a:ext cx="6035040" cy="548640"/>
+          </a:xfrm>
+          <a:prstGeom prst="rect">
+            <a:avLst/>
+          </a:prstGeom>
+          <a:noFill/>
+        </p:spPr>
+        <p:txBody>
+          <a:bodyPr wrap="square" anchor="t" lIns="0" rIns="0" tIns="0" bIns="0">
+            <a:noAutofit/>
+          </a:bodyPr>
+          <a:lstStyle/>
+          <a:p>
+            <a:pPr algn="l">
+              <a:lnSpc>
+                <a:spcPct val="100000"/>
+              </a:lnSpc>
+            </a:pPr>
+            <a:r>
+              <a:rPr sz="1600" b="0" i="0">
+                <a:solidFill>
+                  <a:srgbClr val="FBEAF2"/>
+                </a:solidFill>
+                <a:latin typeface="Calibri"/>
+              </a:rPr>
+              <a:t>What do you need from us, and what can we ask of you?</a:t>
+            </a:r>
+          </a:p>
+        </p:txBody>
+      </p:sp>
+      <p:sp>
+        <p:nvSpPr>
+          <p:cNvPr id="8" name="Rectangle 7"/>
           <p:cNvSpPr/>
           <p:nvPr/>
         </p:nvSpPr>
         <p:spPr>
           <a:xfrm>
-            <a:off x="777240" y="713232"/>
-            <a:ext cx="822960" cy="64008"/>
+            <a:off x="777240" y="5257800"/>
+            <a:ext cx="411480" cy="32004"/>
           </a:xfrm>
           <a:prstGeom prst="rect">
             <a:avLst/>
           </a:prstGeom>
           <a:solidFill>
-            <a:srgbClr val="B6267C"/>
+            <a:srgbClr val="FFFFFF"/>
           </a:solidFill>
           <a:ln>
             <a:noFill/>
@@ -12017,14 +12313,14 @@
       </p:sp>
       <p:sp>
         <p:nvSpPr>
-          <p:cNvPr id="5" name="TextBox 4"/>
-          <p:cNvSpPr txBox="1"/>
-          <p:nvPr/>
-        </p:nvSpPr>
-        <p:spPr>
-          <a:xfrm>
-            <a:off x="777240" y="868680"/>
-            <a:ext cx="9144000" cy="365760"/>
+          <p:cNvPr id="9" name="TextBox 8"/>
+          <p:cNvSpPr txBox="1"/>
+          <p:nvPr/>
+        </p:nvSpPr>
+        <p:spPr>
+          <a:xfrm>
+            <a:off x="777240" y="5367528"/>
+            <a:ext cx="2651760" cy="274320"/>
           </a:xfrm>
           <a:prstGeom prst="rect">
             <a:avLst/>
@@ -12043,27 +12339,27 @@
               </a:lnSpc>
             </a:pPr>
             <a:r>
-              <a:rPr sz="1200" b="1" i="0" spc="250">
-                <a:solidFill>
-                  <a:srgbClr val="B6267C"/>
-                </a:solidFill>
-                <a:latin typeface="Arial"/>
-              </a:rPr>
-              <a:t>FACULTY BOARD · 16.06.2026</a:t>
-            </a:r>
-          </a:p>
-        </p:txBody>
-      </p:sp>
-      <p:sp>
-        <p:nvSpPr>
-          <p:cNvPr id="6" name="TextBox 5"/>
-          <p:cNvSpPr txBox="1"/>
-          <p:nvPr/>
-        </p:nvSpPr>
-        <p:spPr>
-          <a:xfrm>
-            <a:off x="758952" y="2148840"/>
-            <a:ext cx="10515600" cy="1828800"/>
+              <a:rPr sz="900" b="1" i="0" spc="180">
+                <a:solidFill>
+                  <a:srgbClr val="FFFFFF"/>
+                </a:solidFill>
+                <a:latin typeface="Calibri"/>
+              </a:rPr>
+              <a:t>CONTACT</a:t>
+            </a:r>
+          </a:p>
+        </p:txBody>
+      </p:sp>
+      <p:sp>
+        <p:nvSpPr>
+          <p:cNvPr id="10" name="TextBox 9"/>
+          <p:cNvSpPr txBox="1"/>
+          <p:nvPr/>
+        </p:nvSpPr>
+        <p:spPr>
+          <a:xfrm>
+            <a:off x="777240" y="5641848"/>
+            <a:ext cx="2651760" cy="457200"/>
           </a:xfrm>
           <a:prstGeom prst="rect">
             <a:avLst/>
@@ -12078,92 +12374,37 @@
           <a:p>
             <a:pPr algn="l">
               <a:lnSpc>
-                <a:spcPct val="98000"/>
-              </a:lnSpc>
-            </a:pPr>
-            <a:r>
-              <a:rPr sz="5600" b="1" i="0">
+                <a:spcPct val="110000"/>
+              </a:lnSpc>
+            </a:pPr>
+            <a:r>
+              <a:rPr sz="1100" b="1" i="0">
                 <a:solidFill>
                   <a:srgbClr val="FFFFFF"/>
                 </a:solidFill>
-                <a:latin typeface="Arial"/>
-              </a:rPr>
-              <a:t>Let's grow this</a:t>
-            </a:r>
-          </a:p>
-          <a:p>
-            <a:pPr algn="l">
-              <a:lnSpc>
-                <a:spcPct val="98000"/>
-              </a:lnSpc>
-            </a:pPr>
-            <a:r>
-              <a:rPr sz="5600" b="1" i="0">
-                <a:solidFill>
-                  <a:srgbClr val="B6267C"/>
-                </a:solidFill>
-                <a:latin typeface="Arial"/>
-              </a:rPr>
-              <a:t>together.</a:t>
-            </a:r>
-          </a:p>
-        </p:txBody>
-      </p:sp>
-      <p:sp>
-        <p:nvSpPr>
-          <p:cNvPr id="7" name="TextBox 6"/>
-          <p:cNvSpPr txBox="1"/>
-          <p:nvPr/>
-        </p:nvSpPr>
-        <p:spPr>
-          <a:xfrm>
-            <a:off x="777240" y="4160520"/>
-            <a:ext cx="8229600" cy="548640"/>
-          </a:xfrm>
-          <a:prstGeom prst="rect">
-            <a:avLst/>
-          </a:prstGeom>
-          <a:noFill/>
-        </p:spPr>
-        <p:txBody>
-          <a:bodyPr wrap="square" anchor="t" lIns="0" rIns="0" tIns="0" bIns="0">
-            <a:noAutofit/>
-          </a:bodyPr>
-          <a:lstStyle/>
-          <a:p>
-            <a:pPr algn="l">
-              <a:lnSpc>
-                <a:spcPct val="100000"/>
-              </a:lnSpc>
-            </a:pPr>
-            <a:r>
-              <a:rPr sz="1600" b="0" i="0">
-                <a:solidFill>
-                  <a:srgbClr val="CFCFD2"/>
-                </a:solidFill>
-                <a:latin typeface="Arial"/>
-              </a:rPr>
-              <a:t>What do you need from us, and what can we ask of you?</a:t>
-            </a:r>
-          </a:p>
-        </p:txBody>
-      </p:sp>
-      <p:sp>
-        <p:nvSpPr>
-          <p:cNvPr id="8" name="Rectangle 7"/>
+                <a:latin typeface="Calibri"/>
+              </a:rPr>
+              <a:t>Mohammad Abu-Rezeq, Unit 01</a:t>
+            </a:r>
+          </a:p>
+        </p:txBody>
+      </p:sp>
+      <p:sp>
+        <p:nvSpPr>
+          <p:cNvPr id="11" name="Rectangle 10"/>
           <p:cNvSpPr/>
           <p:nvPr/>
         </p:nvSpPr>
         <p:spPr>
           <a:xfrm>
-            <a:off x="777240" y="5212080"/>
+            <a:off x="3520440" y="5257800"/>
             <a:ext cx="411480" cy="32004"/>
           </a:xfrm>
           <a:prstGeom prst="rect">
             <a:avLst/>
           </a:prstGeom>
           <a:solidFill>
-            <a:srgbClr val="B6267C"/>
+            <a:srgbClr val="FFFFFF"/>
           </a:solidFill>
           <a:ln>
             <a:noFill/>
@@ -12194,14 +12435,14 @@
       </p:sp>
       <p:sp>
         <p:nvSpPr>
-          <p:cNvPr id="9" name="TextBox 8"/>
-          <p:cNvSpPr txBox="1"/>
-          <p:nvPr/>
-        </p:nvSpPr>
-        <p:spPr>
-          <a:xfrm>
-            <a:off x="777240" y="5321808"/>
-            <a:ext cx="3383279" cy="274320"/>
+          <p:cNvPr id="12" name="TextBox 11"/>
+          <p:cNvSpPr txBox="1"/>
+          <p:nvPr/>
+        </p:nvSpPr>
+        <p:spPr>
+          <a:xfrm>
+            <a:off x="3520440" y="5367528"/>
+            <a:ext cx="2651760" cy="274320"/>
           </a:xfrm>
           <a:prstGeom prst="rect">
             <a:avLst/>
@@ -12222,25 +12463,25 @@
             <a:r>
               <a:rPr sz="900" b="1" i="0" spc="180">
                 <a:solidFill>
-                  <a:srgbClr val="B6267C"/>
-                </a:solidFill>
-                <a:latin typeface="Arial"/>
-              </a:rPr>
-              <a:t>CONTACT</a:t>
-            </a:r>
-          </a:p>
-        </p:txBody>
-      </p:sp>
-      <p:sp>
-        <p:nvSpPr>
-          <p:cNvPr id="10" name="TextBox 9"/>
-          <p:cNvSpPr txBox="1"/>
-          <p:nvPr/>
-        </p:nvSpPr>
-        <p:spPr>
-          <a:xfrm>
-            <a:off x="777240" y="5596128"/>
-            <a:ext cx="3383279" cy="457200"/>
+                  <a:srgbClr val="FFFFFF"/>
+                </a:solidFill>
+                <a:latin typeface="Calibri"/>
+              </a:rPr>
+              <a:t>EMAIL</a:t>
+            </a:r>
+          </a:p>
+        </p:txBody>
+      </p:sp>
+      <p:sp>
+        <p:nvSpPr>
+          <p:cNvPr id="13" name="TextBox 12"/>
+          <p:cNvSpPr txBox="1"/>
+          <p:nvPr/>
+        </p:nvSpPr>
+        <p:spPr>
+          <a:xfrm>
+            <a:off x="3520440" y="5641848"/>
+            <a:ext cx="2651760" cy="457200"/>
           </a:xfrm>
           <a:prstGeom prst="rect">
             <a:avLst/>
@@ -12259,33 +12500,33 @@
               </a:lnSpc>
             </a:pPr>
             <a:r>
-              <a:rPr sz="1150" b="1" i="0">
+              <a:rPr sz="1100" b="1" i="0">
                 <a:solidFill>
                   <a:srgbClr val="FFFFFF"/>
                 </a:solidFill>
-                <a:latin typeface="Arial"/>
-              </a:rPr>
-              <a:t>Mohammad Abu-Rezeq, Unit 01</a:t>
-            </a:r>
-          </a:p>
-        </p:txBody>
-      </p:sp>
-      <p:sp>
-        <p:nvSpPr>
-          <p:cNvPr id="11" name="Rectangle 10"/>
+                <a:latin typeface="Calibri"/>
+              </a:rPr>
+              <a:t>mohammad.abu-rezeq@th-deg.de</a:t>
+            </a:r>
+          </a:p>
+        </p:txBody>
+      </p:sp>
+      <p:sp>
+        <p:nvSpPr>
+          <p:cNvPr id="14" name="Rectangle 13"/>
           <p:cNvSpPr/>
           <p:nvPr/>
         </p:nvSpPr>
         <p:spPr>
           <a:xfrm>
-            <a:off x="4343400" y="5212080"/>
+            <a:off x="6263640" y="5257800"/>
             <a:ext cx="411480" cy="32004"/>
           </a:xfrm>
           <a:prstGeom prst="rect">
             <a:avLst/>
           </a:prstGeom>
           <a:solidFill>
-            <a:srgbClr val="B6267C"/>
+            <a:srgbClr val="FFFFFF"/>
           </a:solidFill>
           <a:ln>
             <a:noFill/>
@@ -12316,14 +12557,14 @@
       </p:sp>
       <p:sp>
         <p:nvSpPr>
-          <p:cNvPr id="12" name="TextBox 11"/>
-          <p:cNvSpPr txBox="1"/>
-          <p:nvPr/>
-        </p:nvSpPr>
-        <p:spPr>
-          <a:xfrm>
-            <a:off x="4343400" y="5321808"/>
-            <a:ext cx="3383279" cy="274320"/>
+          <p:cNvPr id="15" name="TextBox 14"/>
+          <p:cNvSpPr txBox="1"/>
+          <p:nvPr/>
+        </p:nvSpPr>
+        <p:spPr>
+          <a:xfrm>
+            <a:off x="6263640" y="5367528"/>
+            <a:ext cx="2651760" cy="274320"/>
           </a:xfrm>
           <a:prstGeom prst="rect">
             <a:avLst/>
@@ -12344,25 +12585,25 @@
             <a:r>
               <a:rPr sz="900" b="1" i="0" spc="180">
                 <a:solidFill>
-                  <a:srgbClr val="B6267C"/>
-                </a:solidFill>
-                <a:latin typeface="Arial"/>
-              </a:rPr>
-              <a:t>EMAIL</a:t>
-            </a:r>
-          </a:p>
-        </p:txBody>
-      </p:sp>
-      <p:sp>
-        <p:nvSpPr>
-          <p:cNvPr id="13" name="TextBox 12"/>
-          <p:cNvSpPr txBox="1"/>
-          <p:nvPr/>
-        </p:nvSpPr>
-        <p:spPr>
-          <a:xfrm>
-            <a:off x="4343400" y="5596128"/>
-            <a:ext cx="3383279" cy="457200"/>
+                  <a:srgbClr val="FFFFFF"/>
+                </a:solidFill>
+                <a:latin typeface="Calibri"/>
+              </a:rPr>
+              <a:t>OFFICE HOURS</a:t>
+            </a:r>
+          </a:p>
+        </p:txBody>
+      </p:sp>
+      <p:sp>
+        <p:nvSpPr>
+          <p:cNvPr id="16" name="TextBox 15"/>
+          <p:cNvSpPr txBox="1"/>
+          <p:nvPr/>
+        </p:nvSpPr>
+        <p:spPr>
+          <a:xfrm>
+            <a:off x="6263640" y="5641848"/>
+            <a:ext cx="2651760" cy="457200"/>
           </a:xfrm>
           <a:prstGeom prst="rect">
             <a:avLst/>
@@ -12381,133 +12622,11 @@
               </a:lnSpc>
             </a:pPr>
             <a:r>
-              <a:rPr sz="1150" b="1" i="0">
+              <a:rPr sz="1100" b="1" i="0">
                 <a:solidFill>
                   <a:srgbClr val="FFFFFF"/>
                 </a:solidFill>
-                <a:latin typeface="Arial"/>
-              </a:rPr>
-              <a:t>mohammad.abu-rezeq@th-deg.de</a:t>
-            </a:r>
-          </a:p>
-        </p:txBody>
-      </p:sp>
-      <p:sp>
-        <p:nvSpPr>
-          <p:cNvPr id="14" name="Rectangle 13"/>
-          <p:cNvSpPr/>
-          <p:nvPr/>
-        </p:nvSpPr>
-        <p:spPr>
-          <a:xfrm>
-            <a:off x="7909560" y="5212080"/>
-            <a:ext cx="411480" cy="32004"/>
-          </a:xfrm>
-          <a:prstGeom prst="rect">
-            <a:avLst/>
-          </a:prstGeom>
-          <a:solidFill>
-            <a:srgbClr val="B6267C"/>
-          </a:solidFill>
-          <a:ln>
-            <a:noFill/>
-          </a:ln>
-          <a:effectLst/>
-        </p:spPr>
-        <p:style>
-          <a:lnRef idx="1">
-            <a:schemeClr val="accent1"/>
-          </a:lnRef>
-          <a:fillRef idx="3">
-            <a:schemeClr val="accent1"/>
-          </a:fillRef>
-          <a:effectRef idx="2">
-            <a:schemeClr val="accent1"/>
-          </a:effectRef>
-          <a:fontRef idx="minor">
-            <a:schemeClr val="lt1"/>
-          </a:fontRef>
-        </p:style>
-        <p:txBody>
-          <a:bodyPr rtlCol="0" anchor="ctr"/>
-          <a:lstStyle/>
-          <a:p>
-            <a:pPr algn="ctr"/>
-          </a:p>
-        </p:txBody>
-      </p:sp>
-      <p:sp>
-        <p:nvSpPr>
-          <p:cNvPr id="15" name="TextBox 14"/>
-          <p:cNvSpPr txBox="1"/>
-          <p:nvPr/>
-        </p:nvSpPr>
-        <p:spPr>
-          <a:xfrm>
-            <a:off x="7909560" y="5321808"/>
-            <a:ext cx="3383279" cy="274320"/>
-          </a:xfrm>
-          <a:prstGeom prst="rect">
-            <a:avLst/>
-          </a:prstGeom>
-          <a:noFill/>
-        </p:spPr>
-        <p:txBody>
-          <a:bodyPr wrap="square" anchor="t" lIns="0" rIns="0" tIns="0" bIns="0">
-            <a:noAutofit/>
-          </a:bodyPr>
-          <a:lstStyle/>
-          <a:p>
-            <a:pPr algn="l">
-              <a:lnSpc>
-                <a:spcPct val="100000"/>
-              </a:lnSpc>
-            </a:pPr>
-            <a:r>
-              <a:rPr sz="900" b="1" i="0" spc="180">
-                <a:solidFill>
-                  <a:srgbClr val="B6267C"/>
-                </a:solidFill>
-                <a:latin typeface="Arial"/>
-              </a:rPr>
-              <a:t>OFFICE HOURS</a:t>
-            </a:r>
-          </a:p>
-        </p:txBody>
-      </p:sp>
-      <p:sp>
-        <p:nvSpPr>
-          <p:cNvPr id="16" name="TextBox 15"/>
-          <p:cNvSpPr txBox="1"/>
-          <p:nvPr/>
-        </p:nvSpPr>
-        <p:spPr>
-          <a:xfrm>
-            <a:off x="7909560" y="5596128"/>
-            <a:ext cx="3383279" cy="457200"/>
-          </a:xfrm>
-          <a:prstGeom prst="rect">
-            <a:avLst/>
-          </a:prstGeom>
-          <a:noFill/>
-        </p:spPr>
-        <p:txBody>
-          <a:bodyPr wrap="square" anchor="t" lIns="0" rIns="0" tIns="0" bIns="0">
-            <a:noAutofit/>
-          </a:bodyPr>
-          <a:lstStyle/>
-          <a:p>
-            <a:pPr algn="l">
-              <a:lnSpc>
-                <a:spcPct val="110000"/>
-              </a:lnSpc>
-            </a:pPr>
-            <a:r>
-              <a:rPr sz="1150" b="1" i="0">
-                <a:solidFill>
-                  <a:srgbClr val="FFFFFF"/>
-                </a:solidFill>
-                <a:latin typeface="Arial"/>
+                <a:latin typeface="Calibri"/>
               </a:rPr>
               <a:t>EC 2.11, Tuesdays 13:00 to 15:00</a:t>
             </a:r>
@@ -12544,18 +12663,18 @@
             <a:r>
               <a:rPr sz="850" b="1" i="0">
                 <a:solidFill>
-                  <a:srgbClr val="B6267C"/>
-                </a:solidFill>
-                <a:latin typeface="Arial"/>
+                  <a:srgbClr val="FFFFFF"/>
+                </a:solidFill>
+                <a:latin typeface="Calibri"/>
               </a:rPr>
               <a:t>08</a:t>
             </a:r>
             <a:r>
               <a:rPr sz="850" b="0" i="0">
                 <a:solidFill>
-                  <a:srgbClr val="9A9A9A"/>
-                </a:solidFill>
-                <a:latin typeface="Arial"/>
+                  <a:srgbClr val="F4C6DE"/>
+                </a:solidFill>
+                <a:latin typeface="Calibri"/>
               </a:rPr>
               <a:t>  /  08</a:t>
             </a:r>
